--- a/output/deck/lake-trout-ecotypes-PAV-methylation.pptx
+++ b/output/deck/lake-trout-ecotypes-PAV-methylation.pptx
@@ -18,6 +18,9 @@
     <p:sldId id="266" r:id="rId17"/>
     <p:sldId id="267" r:id="rId18"/>
     <p:sldId id="268" r:id="rId19"/>
+    <p:sldId id="269" r:id="rId20"/>
+    <p:sldId id="270" r:id="rId21"/>
+    <p:sldId id="271" r:id="rId22"/>
   </p:sldIdLst>
   <p:sldSz cx="12191695" cy="6858000" type="screen4x3"/>
   <p:notesSz cx="6858000" cy="9144000"/>
@@ -3652,7 +3655,7 @@
         </p:nvSpPr>
         <p:spPr>
           <a:xfrm>
-            <a:off x="822960" y="960120"/>
+            <a:off x="822960" y="868680"/>
             <a:ext cx="7315200" cy="320040"/>
           </a:xfrm>
           <a:prstGeom prst="rect">
@@ -3687,7 +3690,7 @@
         </p:nvSpPr>
         <p:spPr>
           <a:xfrm>
-            <a:off x="822960" y="1463040"/>
+            <a:off x="822960" y="1325880"/>
             <a:ext cx="10515600" cy="2194560"/>
           </a:xfrm>
           <a:prstGeom prst="rect">
@@ -3707,13 +3710,13 @@
               </a:spcAft>
             </a:pPr>
             <a:r>
-              <a:rPr sz="5200" b="1" i="0">
+              <a:rPr sz="4800" b="1" i="0">
                 <a:solidFill>
                   <a:srgbClr val="FFFFFF"/>
                 </a:solidFill>
                 <a:latin typeface="Georgia"/>
               </a:rPr>
-              <a:t>Two Ecotypes,</a:t>
+              <a:t>From Variation to</a:t>
             </a:r>
           </a:p>
           <a:p>
@@ -3723,13 +3726,13 @@
               </a:spcAft>
             </a:pPr>
             <a:r>
-              <a:rPr sz="5200" b="1" i="0">
+              <a:rPr sz="4800" b="1" i="0">
                 <a:solidFill>
                   <a:srgbClr val="CADCFC"/>
                 </a:solidFill>
                 <a:latin typeface="Georgia"/>
               </a:rPr>
-              <a:t>One Genome</a:t>
+              <a:t>Candidate Genes</a:t>
             </a:r>
           </a:p>
         </p:txBody>
@@ -3742,8 +3745,8 @@
         </p:nvSpPr>
         <p:spPr>
           <a:xfrm>
-            <a:off x="841248" y="3657600"/>
-            <a:ext cx="10515600" cy="731520"/>
+            <a:off x="841248" y="3383280"/>
+            <a:ext cx="10515600" cy="822960"/>
           </a:xfrm>
           <a:prstGeom prst="rect">
             <a:avLst/>
@@ -3758,16 +3761,16 @@
           <a:p>
             <a:pPr algn="l"/>
             <a:r>
-              <a:rPr sz="2100" b="0" i="0">
+              <a:rPr sz="2000" b="0" i="0">
                 <a:solidFill>
                   <a:srgbClr val="CADCFC"/>
                 </a:solidFill>
                 <a:latin typeface="Calibri"/>
               </a:rPr>
-              <a:t>How presence-absence variation and DNA methylation may drive </a:t>
-            </a:r>
-            <a:r>
-              <a:rPr sz="2100" b="1" i="0">
+              <a:t>Methylation, structural variation, and functional annotation of </a:t>
+            </a:r>
+            <a:r>
+              <a:rPr sz="2000" b="1" i="0">
                 <a:solidFill>
                   <a:srgbClr val="FFFFFF"/>
                 </a:solidFill>
@@ -3776,13 +3779,13 @@
               <a:t>lean vs. siscowet</a:t>
             </a:r>
             <a:r>
-              <a:rPr sz="2100" b="0" i="0">
+              <a:rPr sz="2000" b="0" i="0">
                 <a:solidFill>
                   <a:srgbClr val="CADCFC"/>
                 </a:solidFill>
                 <a:latin typeface="Calibri"/>
               </a:rPr>
-              <a:t> divergence in lake trout</a:t>
+              <a:t> lake trout ecotypes</a:t>
             </a:r>
           </a:p>
         </p:txBody>
@@ -3795,7 +3798,42 @@
         </p:nvSpPr>
         <p:spPr>
           <a:xfrm>
-            <a:off x="841248" y="6355080"/>
+            <a:off x="841248" y="5989320"/>
+            <a:ext cx="10515600" cy="365760"/>
+          </a:xfrm>
+          <a:prstGeom prst="rect">
+            <a:avLst/>
+          </a:prstGeom>
+          <a:noFill/>
+        </p:spPr>
+        <p:txBody>
+          <a:bodyPr wrap="square" anchor="t" lIns="0" rIns="0" tIns="0" bIns="0">
+            <a:spAutoFit/>
+          </a:bodyPr>
+          <a:lstStyle/>
+          <a:p>
+            <a:pPr algn="l"/>
+            <a:r>
+              <a:rPr sz="1350" b="1" i="0">
+                <a:solidFill>
+                  <a:srgbClr val="FFFFFF"/>
+                </a:solidFill>
+                <a:latin typeface="Calibri"/>
+              </a:rPr>
+              <a:t>Rick Goetz · Sam White · Cristian Gallardo-Escarate · Steven Roberts</a:t>
+            </a:r>
+          </a:p>
+        </p:txBody>
+      </p:sp>
+      <p:sp>
+        <p:nvSpPr>
+          <p:cNvPr id="9" name="TextBox 8"/>
+          <p:cNvSpPr txBox="1"/>
+          <p:nvPr/>
+        </p:nvSpPr>
+        <p:spPr>
+          <a:xfrm>
+            <a:off x="841248" y="6400800"/>
             <a:ext cx="7315200" cy="365760"/>
           </a:xfrm>
           <a:prstGeom prst="rect">
@@ -3811,13 +3849,13 @@
           <a:p>
             <a:pPr algn="l"/>
             <a:r>
-              <a:rPr sz="1300" b="0" i="0">
-                <a:solidFill>
-                  <a:srgbClr val="FFFFFF"/>
-                </a:solidFill>
-                <a:latin typeface="Calibri"/>
-              </a:rPr>
-              <a:t>15-minute research talk  ·  PacBio HiFi comparative genomics</a:t>
+              <a:rPr sz="1200" b="0" i="0">
+                <a:solidFill>
+                  <a:srgbClr val="CADCFC"/>
+                </a:solidFill>
+                <a:latin typeface="Calibri"/>
+              </a:rPr>
+              <a:t>PacBio HiFi comparative epigenomics  ·  research talk</a:t>
             </a:r>
           </a:p>
         </p:txBody>
@@ -4391,11 +4429,11 @@
             <a:r>
               <a:rPr sz="1300" b="1" i="0" spc="250">
                 <a:solidFill>
-                  <a:srgbClr val="E9964E"/>
-                </a:solidFill>
-                <a:latin typeface="Calibri"/>
-              </a:rPr>
-              <a:t>INTEGRATION · THE KEY MOVE</a:t>
+                  <a:srgbClr val="C97B2E"/>
+                </a:solidFill>
+                <a:latin typeface="Calibri"/>
+              </a:rPr>
+              <a:t>LAYER 3 · FUNCTIONAL ANNOTATION  (NEW)</a:t>
             </a:r>
           </a:p>
         </p:txBody>
@@ -4430,34 +4468,39 @@
                 </a:solidFill>
                 <a:latin typeface="Georgia"/>
               </a:rPr>
-              <a:t>Do the layers converge on the same genes?</a:t>
-            </a:r>
-          </a:p>
-        </p:txBody>
-      </p:sp>
-      <p:sp>
-        <p:nvSpPr>
-          <p:cNvPr id="4" name="Oval 3"/>
+              <a:t>Turning coordinates into candidate genes</a:t>
+            </a:r>
+          </a:p>
+        </p:txBody>
+      </p:sp>
+      <p:sp>
+        <p:nvSpPr>
+          <p:cNvPr id="4" name="Rounded Rectangle 3"/>
           <p:cNvSpPr/>
           <p:nvPr/>
         </p:nvSpPr>
         <p:spPr>
           <a:xfrm>
-            <a:off x="2788920" y="3108959"/>
-            <a:ext cx="2651760" cy="2651760"/>
-          </a:xfrm>
-          <a:prstGeom prst="ellipse">
+            <a:off x="822960" y="1965960"/>
+            <a:ext cx="3337560" cy="1463040"/>
+          </a:xfrm>
+          <a:prstGeom prst="roundRect">
             <a:avLst/>
           </a:prstGeom>
           <a:solidFill>
-            <a:srgbClr val="E9964E">
-              <a:alpha val="58000"/>
-            </a:srgbClr>
+            <a:srgbClr val="F4F7F9"/>
           </a:solidFill>
           <a:ln>
             <a:noFill/>
           </a:ln>
           <a:effectLst/>
+          <a:effectLst>
+            <a:outerShdw blurRad="60000" dist="25000" dir="5400000" rotWithShape="0">
+              <a:srgbClr val="0A2230">
+                <a:alpha val="28000"/>
+              </a:srgbClr>
+            </a:outerShdw>
+          </a:effectLst>
         </p:spPr>
         <p:style>
           <a:lnRef idx="1">
@@ -4483,22 +4526,20 @@
       </p:sp>
       <p:sp>
         <p:nvSpPr>
-          <p:cNvPr id="5" name="Oval 4"/>
+          <p:cNvPr id="5" name="Rectangle 4"/>
           <p:cNvSpPr/>
           <p:nvPr/>
         </p:nvSpPr>
         <p:spPr>
           <a:xfrm>
-            <a:off x="4114800" y="3108959"/>
-            <a:ext cx="2651760" cy="2651760"/>
-          </a:xfrm>
-          <a:prstGeom prst="ellipse">
+            <a:off x="822960" y="1965960"/>
+            <a:ext cx="3337560" cy="118872"/>
+          </a:xfrm>
+          <a:prstGeom prst="rect">
             <a:avLst/>
           </a:prstGeom>
           <a:solidFill>
-            <a:srgbClr val="2A9D8F">
-              <a:alpha val="58000"/>
-            </a:srgbClr>
+            <a:srgbClr val="C97B2E"/>
           </a:solidFill>
           <a:ln>
             <a:noFill/>
@@ -4529,27 +4570,102 @@
       </p:sp>
       <p:sp>
         <p:nvSpPr>
-          <p:cNvPr id="6" name="Oval 5"/>
+          <p:cNvPr id="6" name="TextBox 5"/>
+          <p:cNvSpPr txBox="1"/>
+          <p:nvPr/>
+        </p:nvSpPr>
+        <p:spPr>
+          <a:xfrm>
+            <a:off x="822960" y="2194560"/>
+            <a:ext cx="3337560" cy="685800"/>
+          </a:xfrm>
+          <a:prstGeom prst="rect">
+            <a:avLst/>
+          </a:prstGeom>
+          <a:noFill/>
+        </p:spPr>
+        <p:txBody>
+          <a:bodyPr wrap="square" anchor="t" lIns="0" rIns="0" tIns="0" bIns="0">
+            <a:spAutoFit/>
+          </a:bodyPr>
+          <a:lstStyle/>
+          <a:p>
+            <a:pPr algn="ctr"/>
+            <a:r>
+              <a:rPr sz="3300" b="1" i="0">
+                <a:solidFill>
+                  <a:srgbClr val="C97B2E"/>
+                </a:solidFill>
+                <a:latin typeface="Georgia"/>
+              </a:rPr>
+              <a:t>46,359</a:t>
+            </a:r>
+          </a:p>
+        </p:txBody>
+      </p:sp>
+      <p:sp>
+        <p:nvSpPr>
+          <p:cNvPr id="7" name="TextBox 6"/>
+          <p:cNvSpPr txBox="1"/>
+          <p:nvPr/>
+        </p:nvSpPr>
+        <p:spPr>
+          <a:xfrm>
+            <a:off x="822960" y="2926080"/>
+            <a:ext cx="3337560" cy="411480"/>
+          </a:xfrm>
+          <a:prstGeom prst="rect">
+            <a:avLst/>
+          </a:prstGeom>
+          <a:noFill/>
+        </p:spPr>
+        <p:txBody>
+          <a:bodyPr wrap="square" anchor="t" lIns="0" rIns="0" tIns="0" bIns="0">
+            <a:spAutoFit/>
+          </a:bodyPr>
+          <a:lstStyle/>
+          <a:p>
+            <a:pPr algn="ctr"/>
+            <a:r>
+              <a:rPr sz="1250" b="0" i="0">
+                <a:solidFill>
+                  <a:srgbClr val="5B707B"/>
+                </a:solidFill>
+                <a:latin typeface="Calibri"/>
+              </a:rPr>
+              <a:t>genes annotated (RefSeq)</a:t>
+            </a:r>
+          </a:p>
+        </p:txBody>
+      </p:sp>
+      <p:sp>
+        <p:nvSpPr>
+          <p:cNvPr id="8" name="Rounded Rectangle 7"/>
           <p:cNvSpPr/>
           <p:nvPr/>
         </p:nvSpPr>
         <p:spPr>
           <a:xfrm>
-            <a:off x="3451859" y="1965960"/>
-            <a:ext cx="2651760" cy="2651760"/>
-          </a:xfrm>
-          <a:prstGeom prst="ellipse">
+            <a:off x="4416552" y="1965960"/>
+            <a:ext cx="3337560" cy="1463040"/>
+          </a:xfrm>
+          <a:prstGeom prst="roundRect">
             <a:avLst/>
           </a:prstGeom>
           <a:solidFill>
-            <a:srgbClr val="065A82">
-              <a:alpha val="58000"/>
-            </a:srgbClr>
+            <a:srgbClr val="F4F7F9"/>
           </a:solidFill>
           <a:ln>
             <a:noFill/>
           </a:ln>
           <a:effectLst/>
+          <a:effectLst>
+            <a:outerShdw blurRad="60000" dist="25000" dir="5400000" rotWithShape="0">
+              <a:srgbClr val="0A2230">
+                <a:alpha val="28000"/>
+              </a:srgbClr>
+            </a:outerShdw>
+          </a:effectLst>
         </p:spPr>
         <p:style>
           <a:lnRef idx="1">
@@ -4575,49 +4691,58 @@
       </p:sp>
       <p:sp>
         <p:nvSpPr>
-          <p:cNvPr id="7" name="TextBox 6"/>
-          <p:cNvSpPr txBox="1"/>
-          <p:nvPr/>
-        </p:nvSpPr>
-        <p:spPr>
-          <a:xfrm>
-            <a:off x="3771900" y="2240280"/>
-            <a:ext cx="2011680" cy="365760"/>
-          </a:xfrm>
-          <a:prstGeom prst="rect">
-            <a:avLst/>
-          </a:prstGeom>
-          <a:noFill/>
-        </p:spPr>
-        <p:txBody>
-          <a:bodyPr wrap="square" anchor="t" lIns="0" rIns="0" tIns="0" bIns="0">
-            <a:spAutoFit/>
-          </a:bodyPr>
+          <p:cNvPr id="9" name="Rectangle 8"/>
+          <p:cNvSpPr/>
+          <p:nvPr/>
+        </p:nvSpPr>
+        <p:spPr>
+          <a:xfrm>
+            <a:off x="4416552" y="1965960"/>
+            <a:ext cx="3337560" cy="118872"/>
+          </a:xfrm>
+          <a:prstGeom prst="rect">
+            <a:avLst/>
+          </a:prstGeom>
+          <a:solidFill>
+            <a:srgbClr val="1C7293"/>
+          </a:solidFill>
+          <a:ln>
+            <a:noFill/>
+          </a:ln>
+          <a:effectLst/>
+        </p:spPr>
+        <p:style>
+          <a:lnRef idx="1">
+            <a:schemeClr val="accent1"/>
+          </a:lnRef>
+          <a:fillRef idx="3">
+            <a:schemeClr val="accent1"/>
+          </a:fillRef>
+          <a:effectRef idx="2">
+            <a:schemeClr val="accent1"/>
+          </a:effectRef>
+          <a:fontRef idx="minor">
+            <a:schemeClr val="lt1"/>
+          </a:fontRef>
+        </p:style>
+        <p:txBody>
+          <a:bodyPr rtlCol="0" anchor="ctr"/>
           <a:lstStyle/>
           <a:p>
             <a:pPr algn="ctr"/>
-            <a:r>
-              <a:rPr sz="1300" b="1" i="0">
-                <a:solidFill>
-                  <a:srgbClr val="FFFFFF"/>
-                </a:solidFill>
-                <a:latin typeface="Calibri"/>
-              </a:rPr>
-              <a:t>Structure (PAV)</a:t>
-            </a:r>
-          </a:p>
-        </p:txBody>
-      </p:sp>
-      <p:sp>
-        <p:nvSpPr>
-          <p:cNvPr id="8" name="TextBox 7"/>
-          <p:cNvSpPr txBox="1"/>
-          <p:nvPr/>
-        </p:nvSpPr>
-        <p:spPr>
-          <a:xfrm>
-            <a:off x="2971800" y="4846320"/>
-            <a:ext cx="1554480" cy="365760"/>
+          </a:p>
+        </p:txBody>
+      </p:sp>
+      <p:sp>
+        <p:nvSpPr>
+          <p:cNvPr id="10" name="TextBox 9"/>
+          <p:cNvSpPr txBox="1"/>
+          <p:nvPr/>
+        </p:nvSpPr>
+        <p:spPr>
+          <a:xfrm>
+            <a:off x="4416552" y="2194560"/>
+            <a:ext cx="3337560" cy="685800"/>
           </a:xfrm>
           <a:prstGeom prst="rect">
             <a:avLst/>
@@ -4632,27 +4757,27 @@
           <a:p>
             <a:pPr algn="ctr"/>
             <a:r>
-              <a:rPr sz="1300" b="1" i="0">
-                <a:solidFill>
-                  <a:srgbClr val="FFFFFF"/>
-                </a:solidFill>
-                <a:latin typeface="Calibri"/>
-              </a:rPr>
-              <a:t>Methylation</a:t>
-            </a:r>
-          </a:p>
-        </p:txBody>
-      </p:sp>
-      <p:sp>
-        <p:nvSpPr>
-          <p:cNvPr id="9" name="TextBox 8"/>
-          <p:cNvSpPr txBox="1"/>
-          <p:nvPr/>
-        </p:nvSpPr>
-        <p:spPr>
-          <a:xfrm>
-            <a:off x="5029200" y="4846320"/>
-            <a:ext cx="1554480" cy="365760"/>
+              <a:rPr sz="3300" b="1" i="0">
+                <a:solidFill>
+                  <a:srgbClr val="1C7293"/>
+                </a:solidFill>
+                <a:latin typeface="Georgia"/>
+              </a:rPr>
+              <a:t>46,231</a:t>
+            </a:r>
+          </a:p>
+        </p:txBody>
+      </p:sp>
+      <p:sp>
+        <p:nvSpPr>
+          <p:cNvPr id="11" name="TextBox 10"/>
+          <p:cNvSpPr txBox="1"/>
+          <p:nvPr/>
+        </p:nvSpPr>
+        <p:spPr>
+          <a:xfrm>
+            <a:off x="4416552" y="2926080"/>
+            <a:ext cx="3337560" cy="411480"/>
           </a:xfrm>
           <a:prstGeom prst="rect">
             <a:avLst/>
@@ -4667,74 +4792,271 @@
           <a:p>
             <a:pPr algn="ctr"/>
             <a:r>
-              <a:rPr sz="1300" b="1" i="0">
-                <a:solidFill>
-                  <a:srgbClr val="FFFFFF"/>
-                </a:solidFill>
-                <a:latin typeface="Calibri"/>
-              </a:rPr>
-              <a:t>Expression</a:t>
-            </a:r>
-          </a:p>
-        </p:txBody>
-      </p:sp>
-      <p:sp>
-        <p:nvSpPr>
-          <p:cNvPr id="10" name="TextBox 9"/>
-          <p:cNvSpPr txBox="1"/>
-          <p:nvPr/>
-        </p:nvSpPr>
-        <p:spPr>
-          <a:xfrm>
-            <a:off x="3863339" y="4114800"/>
-            <a:ext cx="1828800" cy="548640"/>
-          </a:xfrm>
-          <a:prstGeom prst="rect">
-            <a:avLst/>
-          </a:prstGeom>
-          <a:noFill/>
-        </p:spPr>
-        <p:txBody>
-          <a:bodyPr wrap="square" anchor="t" lIns="0" rIns="0" tIns="0" bIns="0">
-            <a:spAutoFit/>
-          </a:bodyPr>
+              <a:rPr sz="1250" b="0" i="0">
+                <a:solidFill>
+                  <a:srgbClr val="5B707B"/>
+                </a:solidFill>
+                <a:latin typeface="Calibri"/>
+              </a:rPr>
+              <a:t>with a product description</a:t>
+            </a:r>
+          </a:p>
+        </p:txBody>
+      </p:sp>
+      <p:sp>
+        <p:nvSpPr>
+          <p:cNvPr id="12" name="Rounded Rectangle 11"/>
+          <p:cNvSpPr/>
+          <p:nvPr/>
+        </p:nvSpPr>
+        <p:spPr>
+          <a:xfrm>
+            <a:off x="8010144" y="1965960"/>
+            <a:ext cx="3337560" cy="1463040"/>
+          </a:xfrm>
+          <a:prstGeom prst="roundRect">
+            <a:avLst/>
+          </a:prstGeom>
+          <a:solidFill>
+            <a:srgbClr val="F4F7F9"/>
+          </a:solidFill>
+          <a:ln>
+            <a:noFill/>
+          </a:ln>
+          <a:effectLst/>
+          <a:effectLst>
+            <a:outerShdw blurRad="60000" dist="25000" dir="5400000" rotWithShape="0">
+              <a:srgbClr val="0A2230">
+                <a:alpha val="28000"/>
+              </a:srgbClr>
+            </a:outerShdw>
+          </a:effectLst>
+        </p:spPr>
+        <p:style>
+          <a:lnRef idx="1">
+            <a:schemeClr val="accent1"/>
+          </a:lnRef>
+          <a:fillRef idx="3">
+            <a:schemeClr val="accent1"/>
+          </a:fillRef>
+          <a:effectRef idx="2">
+            <a:schemeClr val="accent1"/>
+          </a:effectRef>
+          <a:fontRef idx="minor">
+            <a:schemeClr val="lt1"/>
+          </a:fontRef>
+        </p:style>
+        <p:txBody>
+          <a:bodyPr rtlCol="0" anchor="ctr"/>
           <a:lstStyle/>
           <a:p>
             <a:pPr algn="ctr"/>
-            <a:r>
-              <a:rPr sz="1200" b="1" i="0">
+          </a:p>
+        </p:txBody>
+      </p:sp>
+      <p:sp>
+        <p:nvSpPr>
+          <p:cNvPr id="13" name="Rectangle 12"/>
+          <p:cNvSpPr/>
+          <p:nvPr/>
+        </p:nvSpPr>
+        <p:spPr>
+          <a:xfrm>
+            <a:off x="8010144" y="1965960"/>
+            <a:ext cx="3337560" cy="118872"/>
+          </a:xfrm>
+          <a:prstGeom prst="rect">
+            <a:avLst/>
+          </a:prstGeom>
+          <a:solidFill>
+            <a:srgbClr val="2A9D8F"/>
+          </a:solidFill>
+          <a:ln>
+            <a:noFill/>
+          </a:ln>
+          <a:effectLst/>
+        </p:spPr>
+        <p:style>
+          <a:lnRef idx="1">
+            <a:schemeClr val="accent1"/>
+          </a:lnRef>
+          <a:fillRef idx="3">
+            <a:schemeClr val="accent1"/>
+          </a:fillRef>
+          <a:effectRef idx="2">
+            <a:schemeClr val="accent1"/>
+          </a:effectRef>
+          <a:fontRef idx="minor">
+            <a:schemeClr val="lt1"/>
+          </a:fontRef>
+        </p:style>
+        <p:txBody>
+          <a:bodyPr rtlCol="0" anchor="ctr"/>
+          <a:lstStyle/>
+          <a:p>
+            <a:pPr algn="ctr"/>
+          </a:p>
+        </p:txBody>
+      </p:sp>
+      <p:sp>
+        <p:nvSpPr>
+          <p:cNvPr id="14" name="TextBox 13"/>
+          <p:cNvSpPr txBox="1"/>
+          <p:nvPr/>
+        </p:nvSpPr>
+        <p:spPr>
+          <a:xfrm>
+            <a:off x="8010144" y="2194560"/>
+            <a:ext cx="3337560" cy="685800"/>
+          </a:xfrm>
+          <a:prstGeom prst="rect">
+            <a:avLst/>
+          </a:prstGeom>
+          <a:noFill/>
+        </p:spPr>
+        <p:txBody>
+          <a:bodyPr wrap="square" anchor="t" lIns="0" rIns="0" tIns="0" bIns="0">
+            <a:spAutoFit/>
+          </a:bodyPr>
+          <a:lstStyle/>
+          <a:p>
+            <a:pPr algn="ctr"/>
+            <a:r>
+              <a:rPr sz="3300" b="1" i="0">
+                <a:solidFill>
+                  <a:srgbClr val="2A9D8F"/>
+                </a:solidFill>
+                <a:latin typeface="Georgia"/>
+              </a:rPr>
+              <a:t>34,367</a:t>
+            </a:r>
+          </a:p>
+        </p:txBody>
+      </p:sp>
+      <p:sp>
+        <p:nvSpPr>
+          <p:cNvPr id="15" name="TextBox 14"/>
+          <p:cNvSpPr txBox="1"/>
+          <p:nvPr/>
+        </p:nvSpPr>
+        <p:spPr>
+          <a:xfrm>
+            <a:off x="8010144" y="2926080"/>
+            <a:ext cx="3337560" cy="411480"/>
+          </a:xfrm>
+          <a:prstGeom prst="rect">
+            <a:avLst/>
+          </a:prstGeom>
+          <a:noFill/>
+        </p:spPr>
+        <p:txBody>
+          <a:bodyPr wrap="square" anchor="t" lIns="0" rIns="0" tIns="0" bIns="0">
+            <a:spAutoFit/>
+          </a:bodyPr>
+          <a:lstStyle/>
+          <a:p>
+            <a:pPr algn="ctr"/>
+            <a:r>
+              <a:rPr sz="1250" b="0" i="0">
+                <a:solidFill>
+                  <a:srgbClr val="5B707B"/>
+                </a:solidFill>
+                <a:latin typeface="Calibri"/>
+              </a:rPr>
+              <a:t>with ≥1 Gene Ontology term</a:t>
+            </a:r>
+          </a:p>
+        </p:txBody>
+      </p:sp>
+      <p:sp>
+        <p:nvSpPr>
+          <p:cNvPr id="16" name="Rounded Rectangle 15"/>
+          <p:cNvSpPr/>
+          <p:nvPr/>
+        </p:nvSpPr>
+        <p:spPr>
+          <a:xfrm>
+            <a:off x="822960" y="3749039"/>
+            <a:ext cx="10515600" cy="1874519"/>
+          </a:xfrm>
+          <a:prstGeom prst="roundRect">
+            <a:avLst/>
+          </a:prstGeom>
+          <a:solidFill>
+            <a:srgbClr val="F4F7F9"/>
+          </a:solidFill>
+          <a:ln>
+            <a:noFill/>
+          </a:ln>
+          <a:effectLst/>
+        </p:spPr>
+        <p:style>
+          <a:lnRef idx="1">
+            <a:schemeClr val="accent1"/>
+          </a:lnRef>
+          <a:fillRef idx="3">
+            <a:schemeClr val="accent1"/>
+          </a:fillRef>
+          <a:effectRef idx="2">
+            <a:schemeClr val="accent1"/>
+          </a:effectRef>
+          <a:fontRef idx="minor">
+            <a:schemeClr val="lt1"/>
+          </a:fontRef>
+        </p:style>
+        <p:txBody>
+          <a:bodyPr rtlCol="0" anchor="ctr"/>
+          <a:lstStyle/>
+          <a:p>
+            <a:pPr algn="ctr"/>
+          </a:p>
+        </p:txBody>
+      </p:sp>
+      <p:sp>
+        <p:nvSpPr>
+          <p:cNvPr id="17" name="TextBox 16"/>
+          <p:cNvSpPr txBox="1"/>
+          <p:nvPr/>
+        </p:nvSpPr>
+        <p:spPr>
+          <a:xfrm>
+            <a:off x="1143000" y="3931920"/>
+            <a:ext cx="10058400" cy="411480"/>
+          </a:xfrm>
+          <a:prstGeom prst="rect">
+            <a:avLst/>
+          </a:prstGeom>
+          <a:noFill/>
+        </p:spPr>
+        <p:txBody>
+          <a:bodyPr wrap="square" anchor="t" lIns="0" rIns="0" tIns="0" bIns="0">
+            <a:spAutoFit/>
+          </a:bodyPr>
+          <a:lstStyle/>
+          <a:p>
+            <a:pPr algn="l"/>
+            <a:r>
+              <a:rPr sz="1800" b="1" i="0">
                 <a:solidFill>
                   <a:srgbClr val="1A2B35"/>
                 </a:solidFill>
-                <a:latin typeface="Calibri"/>
-              </a:rPr>
-              <a:t>causal</a:t>
-            </a:r>
-          </a:p>
-          <a:p>
-            <a:pPr algn="ctr"/>
-            <a:r>
-              <a:rPr sz="1200" b="1" i="0">
-                <a:solidFill>
-                  <a:srgbClr val="1A2B35"/>
-                </a:solidFill>
-                <a:latin typeface="Calibri"/>
-              </a:rPr>
-              <a:t>candidates</a:t>
-            </a:r>
-          </a:p>
-        </p:txBody>
-      </p:sp>
-      <p:sp>
-        <p:nvSpPr>
-          <p:cNvPr id="11" name="TextBox 10"/>
-          <p:cNvSpPr txBox="1"/>
-          <p:nvPr/>
-        </p:nvSpPr>
-        <p:spPr>
-          <a:xfrm>
-            <a:off x="7498079" y="2103120"/>
-            <a:ext cx="4023360" cy="3657600"/>
+                <a:latin typeface="Georgia"/>
+              </a:rPr>
+              <a:t>The move that makes everything interpretable</a:t>
+            </a:r>
+          </a:p>
+        </p:txBody>
+      </p:sp>
+      <p:sp>
+        <p:nvSpPr>
+          <p:cNvPr id="18" name="TextBox 17"/>
+          <p:cNvSpPr txBox="1"/>
+          <p:nvPr/>
+        </p:nvSpPr>
+        <p:spPr>
+          <a:xfrm>
+            <a:off x="1143000" y="4434840"/>
+            <a:ext cx="9966960" cy="1097280"/>
           </a:xfrm>
           <a:prstGeom prst="rect">
             <a:avLst/>
@@ -4749,126 +5071,119 @@
           <a:p>
             <a:pPr>
               <a:spcAft>
-                <a:spcPts val="1400"/>
+                <a:spcPts val="800"/>
               </a:spcAft>
             </a:pPr>
             <a:r>
               <a:rPr sz="1600" b="1">
                 <a:solidFill>
-                  <a:srgbClr val="065A82"/>
+                  <a:srgbClr val="C97B2E"/>
                 </a:solidFill>
                 <a:latin typeface="Calibri"/>
               </a:rPr>
               <a:t>—  </a:t>
             </a:r>
             <a:r>
-              <a:rPr sz="1550" b="0" i="0">
+              <a:rPr sz="1450" b="1" i="0">
+                <a:solidFill>
+                  <a:srgbClr val="C97B2E"/>
+                </a:solidFill>
+                <a:latin typeface="Calibri"/>
+              </a:rPr>
+              <a:t>Strand-aware assignment</a:t>
+            </a:r>
+            <a:r>
+              <a:rPr sz="1450" b="0" i="0">
                 <a:solidFill>
                   <a:srgbClr val="1A2B35"/>
                 </a:solidFill>
                 <a:latin typeface="Calibri"/>
               </a:rPr>
-              <a:t>Are DMRs enriched near PAV breakpoints?</a:t>
+              <a:t> of every DMR / DMC / stringent-PAV to genes (promoter ±2 kb, flank ±5 kb)</a:t>
             </a:r>
           </a:p>
           <a:p>
             <a:pPr>
               <a:spcAft>
-                <a:spcPts val="1400"/>
+                <a:spcPts val="800"/>
               </a:spcAft>
             </a:pPr>
             <a:r>
               <a:rPr sz="1600" b="1">
                 <a:solidFill>
-                  <a:srgbClr val="065A82"/>
+                  <a:srgbClr val="C97B2E"/>
                 </a:solidFill>
                 <a:latin typeface="Calibri"/>
               </a:rPr>
               <a:t>—  </a:t>
             </a:r>
             <a:r>
-              <a:rPr sz="1550" b="0" i="0">
+              <a:rPr sz="1450" b="1" i="0">
+                <a:solidFill>
+                  <a:srgbClr val="C97B2E"/>
+                </a:solidFill>
+                <a:latin typeface="Calibri"/>
+              </a:rPr>
+              <a:t>2,036 candidate genes</a:t>
+            </a:r>
+            <a:r>
+              <a:rPr sz="1450" b="0" i="0">
                 <a:solidFill>
                   <a:srgbClr val="1A2B35"/>
                 </a:solidFill>
                 <a:latin typeface="Calibri"/>
               </a:rPr>
-              <a:t>Do PAV-hit genes overlap the 202 liver DETs?</a:t>
+              <a:t> sit within 5 kb of a differential feature — ranked by convergence, placement &amp; expression</a:t>
             </a:r>
           </a:p>
           <a:p>
             <a:pPr>
               <a:spcAft>
-                <a:spcPts val="1400"/>
+                <a:spcPts val="800"/>
               </a:spcAft>
             </a:pPr>
             <a:r>
               <a:rPr sz="1600" b="1">
                 <a:solidFill>
-                  <a:srgbClr val="065A82"/>
+                  <a:srgbClr val="C97B2E"/>
                 </a:solidFill>
                 <a:latin typeface="Calibri"/>
               </a:rPr>
               <a:t>—  </a:t>
             </a:r>
             <a:r>
-              <a:rPr sz="1550" b="1" i="0">
-                <a:solidFill>
-                  <a:srgbClr val="065A82"/>
-                </a:solidFill>
-                <a:latin typeface="Calibri"/>
-              </a:rPr>
-              <a:t>Three-way agreement</a:t>
-            </a:r>
-            <a:r>
-              <a:rPr sz="1550" b="0" i="0">
+              <a:rPr sz="1450" b="0" i="0">
                 <a:solidFill>
                   <a:srgbClr val="1A2B35"/>
                 </a:solidFill>
                 <a:latin typeface="Calibri"/>
               </a:rPr>
-              <a:t> turns correlation into mechanism</a:t>
-            </a:r>
-          </a:p>
-          <a:p>
-            <a:pPr>
-              <a:spcAft>
-                <a:spcPts val="1400"/>
-              </a:spcAft>
-            </a:pPr>
-            <a:r>
-              <a:rPr sz="1600" b="1">
-                <a:solidFill>
-                  <a:srgbClr val="065A82"/>
-                </a:solidFill>
-                <a:latin typeface="Calibri"/>
-              </a:rPr>
-              <a:t>—  </a:t>
-            </a:r>
-            <a:r>
-              <a:rPr sz="1550" b="1" i="0">
+              <a:t>149/302 DMRs and 1,543/3,465 deletions land near a gene; </a:t>
+            </a:r>
+            <a:r>
+              <a:rPr sz="1450" b="1" i="0">
                 <a:solidFill>
                   <a:srgbClr val="1A2B35"/>
                 </a:solidFill>
                 <a:latin typeface="Calibri"/>
               </a:rPr>
-              <a:t>Next: </a:t>
-            </a:r>
-            <a:r>
-              <a:rPr sz="1550" b="0" i="0">
+              <a:t>54 deletions overlap an exon</a:t>
+            </a:r>
+            <a:r>
+              <a:rPr sz="1450" b="0" i="0">
                 <a:solidFill>
                   <a:srgbClr val="1A2B35"/>
                 </a:solidFill>
                 <a:latin typeface="Calibri"/>
               </a:rPr>
-              <a:t>ecotype-specific hifiasm assemblies remove reference bias on PAV calls</a:t>
-            </a:r>
-          </a:p>
-        </p:txBody>
-      </p:sp>
-      <p:sp>
-        <p:nvSpPr>
-          <p:cNvPr id="12" name="TextBox 11"/>
+              <a:t> (candidate copy/LOF)</a:t>
+            </a:r>
+          </a:p>
+        </p:txBody>
+      </p:sp>
+      <p:sp>
+        <p:nvSpPr>
+          <p:cNvPr id="19" name="TextBox 18"/>
           <p:cNvSpPr txBox="1"/>
           <p:nvPr/>
         </p:nvSpPr>
@@ -4910,6 +5225,1007 @@
 </file>
 
 <file path=ppt/slides/slide12.xml><?xml version="1.0" encoding="utf-8"?>
+<p:sld xmlns:a="http://schemas.openxmlformats.org/drawingml/2006/main" xmlns:p="http://schemas.openxmlformats.org/presentationml/2006/main" xmlns:r="http://schemas.openxmlformats.org/officeDocument/2006/relationships">
+  <p:cSld>
+    <p:bg>
+      <p:bgPr>
+        <a:solidFill>
+          <a:srgbClr val="FFFFFF"/>
+        </a:solidFill>
+        <a:effectLst/>
+      </p:bgPr>
+    </p:bg>
+    <p:spTree>
+      <p:nvGrpSpPr>
+        <p:cNvPr id="1" name=""/>
+        <p:cNvGrpSpPr/>
+        <p:nvPr/>
+      </p:nvGrpSpPr>
+      <p:grpSpPr/>
+      <p:sp>
+        <p:nvSpPr>
+          <p:cNvPr id="2" name="TextBox 1"/>
+          <p:cNvSpPr txBox="1"/>
+          <p:nvPr/>
+        </p:nvSpPr>
+        <p:spPr>
+          <a:xfrm>
+            <a:off x="822960" y="502920"/>
+            <a:ext cx="7315200" cy="320040"/>
+          </a:xfrm>
+          <a:prstGeom prst="rect">
+            <a:avLst/>
+          </a:prstGeom>
+          <a:noFill/>
+        </p:spPr>
+        <p:txBody>
+          <a:bodyPr wrap="square" anchor="t" lIns="0" rIns="0" tIns="0" bIns="0">
+            <a:spAutoFit/>
+          </a:bodyPr>
+          <a:lstStyle/>
+          <a:p>
+            <a:pPr algn="l"/>
+            <a:r>
+              <a:rPr sz="1300" b="1" i="0" spc="250">
+                <a:solidFill>
+                  <a:srgbClr val="C97B2E"/>
+                </a:solidFill>
+                <a:latin typeface="Calibri"/>
+              </a:rPr>
+              <a:t>LAYER 3 · WHERE THE LAYERS CONVERGE</a:t>
+            </a:r>
+          </a:p>
+        </p:txBody>
+      </p:sp>
+      <p:sp>
+        <p:nvSpPr>
+          <p:cNvPr id="3" name="TextBox 2"/>
+          <p:cNvSpPr txBox="1"/>
+          <p:nvPr/>
+        </p:nvSpPr>
+        <p:spPr>
+          <a:xfrm>
+            <a:off x="822960" y="868680"/>
+            <a:ext cx="10515600" cy="731520"/>
+          </a:xfrm>
+          <a:prstGeom prst="rect">
+            <a:avLst/>
+          </a:prstGeom>
+          <a:noFill/>
+        </p:spPr>
+        <p:txBody>
+          <a:bodyPr wrap="square" anchor="t" lIns="0" rIns="0" tIns="0" bIns="0">
+            <a:spAutoFit/>
+          </a:bodyPr>
+          <a:lstStyle/>
+          <a:p>
+            <a:pPr algn="l"/>
+            <a:r>
+              <a:rPr sz="2800" b="1" i="0">
+                <a:solidFill>
+                  <a:srgbClr val="1A2B35"/>
+                </a:solidFill>
+                <a:latin typeface="Georgia"/>
+              </a:rPr>
+              <a:t>Four genes carry both a DMR and a siscowet deletion</a:t>
+            </a:r>
+          </a:p>
+        </p:txBody>
+      </p:sp>
+      <p:pic>
+        <p:nvPicPr>
+          <p:cNvPr id="4" name="Picture 3" descr="18-top-candidates.png"/>
+          <p:cNvPicPr>
+            <a:picLocks noChangeAspect="1"/>
+          </p:cNvPicPr>
+          <p:nvPr/>
+        </p:nvPicPr>
+        <p:blipFill>
+          <a:blip r:embed="rId2"/>
+          <a:stretch>
+            <a:fillRect/>
+          </a:stretch>
+        </p:blipFill>
+        <p:spPr>
+          <a:xfrm>
+            <a:off x="6537960" y="1783080"/>
+            <a:ext cx="4937760" cy="3291840"/>
+          </a:xfrm>
+          <a:prstGeom prst="rect">
+            <a:avLst/>
+          </a:prstGeom>
+        </p:spPr>
+      </p:pic>
+      <p:sp>
+        <p:nvSpPr>
+          <p:cNvPr id="5" name="TextBox 4"/>
+          <p:cNvSpPr txBox="1"/>
+          <p:nvPr/>
+        </p:nvSpPr>
+        <p:spPr>
+          <a:xfrm>
+            <a:off x="6537960" y="5989320"/>
+            <a:ext cx="4937760" cy="365760"/>
+          </a:xfrm>
+          <a:prstGeom prst="rect">
+            <a:avLst/>
+          </a:prstGeom>
+          <a:noFill/>
+        </p:spPr>
+        <p:txBody>
+          <a:bodyPr wrap="square" anchor="t" lIns="0" rIns="0" tIns="0" bIns="0">
+            <a:spAutoFit/>
+          </a:bodyPr>
+          <a:lstStyle/>
+          <a:p>
+            <a:pPr algn="ctr"/>
+            <a:r>
+              <a:rPr sz="1100" b="0" i="1">
+                <a:solidFill>
+                  <a:srgbClr val="5B707B"/>
+                </a:solidFill>
+                <a:latin typeface="Calibri"/>
+              </a:rPr>
+              <a:t>Top protein-coding candidates by integrated rank score.</a:t>
+            </a:r>
+          </a:p>
+        </p:txBody>
+      </p:sp>
+      <p:sp>
+        <p:nvSpPr>
+          <p:cNvPr id="6" name="TextBox 5"/>
+          <p:cNvSpPr txBox="1"/>
+          <p:nvPr/>
+        </p:nvSpPr>
+        <p:spPr>
+          <a:xfrm>
+            <a:off x="822960" y="1737360"/>
+            <a:ext cx="5486400" cy="320040"/>
+          </a:xfrm>
+          <a:prstGeom prst="rect">
+            <a:avLst/>
+          </a:prstGeom>
+          <a:noFill/>
+        </p:spPr>
+        <p:txBody>
+          <a:bodyPr wrap="square" anchor="t" lIns="0" rIns="0" tIns="0" bIns="0">
+            <a:spAutoFit/>
+          </a:bodyPr>
+          <a:lstStyle/>
+          <a:p>
+            <a:pPr algn="l"/>
+            <a:r>
+              <a:rPr sz="1200" b="1" i="0" spc="150">
+                <a:solidFill>
+                  <a:srgbClr val="C97B2E"/>
+                </a:solidFill>
+                <a:latin typeface="Calibri"/>
+              </a:rPr>
+              <a:t>4 CONVERGENT LOCI</a:t>
+            </a:r>
+          </a:p>
+        </p:txBody>
+      </p:sp>
+      <p:sp>
+        <p:nvSpPr>
+          <p:cNvPr id="7" name="Rounded Rectangle 6"/>
+          <p:cNvSpPr/>
+          <p:nvPr/>
+        </p:nvSpPr>
+        <p:spPr>
+          <a:xfrm>
+            <a:off x="822960" y="2103120"/>
+            <a:ext cx="5486400" cy="566928"/>
+          </a:xfrm>
+          <a:prstGeom prst="roundRect">
+            <a:avLst/>
+          </a:prstGeom>
+          <a:solidFill>
+            <a:srgbClr val="F4F7F9"/>
+          </a:solidFill>
+          <a:ln>
+            <a:noFill/>
+          </a:ln>
+          <a:effectLst/>
+        </p:spPr>
+        <p:style>
+          <a:lnRef idx="1">
+            <a:schemeClr val="accent1"/>
+          </a:lnRef>
+          <a:fillRef idx="3">
+            <a:schemeClr val="accent1"/>
+          </a:fillRef>
+          <a:effectRef idx="2">
+            <a:schemeClr val="accent1"/>
+          </a:effectRef>
+          <a:fontRef idx="minor">
+            <a:schemeClr val="lt1"/>
+          </a:fontRef>
+        </p:style>
+        <p:txBody>
+          <a:bodyPr rtlCol="0" anchor="ctr"/>
+          <a:lstStyle/>
+          <a:p>
+            <a:pPr algn="ctr"/>
+          </a:p>
+        </p:txBody>
+      </p:sp>
+      <p:sp>
+        <p:nvSpPr>
+          <p:cNvPr id="8" name="Rectangle 7"/>
+          <p:cNvSpPr/>
+          <p:nvPr/>
+        </p:nvSpPr>
+        <p:spPr>
+          <a:xfrm>
+            <a:off x="822960" y="2103120"/>
+            <a:ext cx="91440" cy="566928"/>
+          </a:xfrm>
+          <a:prstGeom prst="rect">
+            <a:avLst/>
+          </a:prstGeom>
+          <a:solidFill>
+            <a:srgbClr val="C97B2E"/>
+          </a:solidFill>
+          <a:ln>
+            <a:noFill/>
+          </a:ln>
+          <a:effectLst/>
+        </p:spPr>
+        <p:style>
+          <a:lnRef idx="1">
+            <a:schemeClr val="accent1"/>
+          </a:lnRef>
+          <a:fillRef idx="3">
+            <a:schemeClr val="accent1"/>
+          </a:fillRef>
+          <a:effectRef idx="2">
+            <a:schemeClr val="accent1"/>
+          </a:effectRef>
+          <a:fontRef idx="minor">
+            <a:schemeClr val="lt1"/>
+          </a:fontRef>
+        </p:style>
+        <p:txBody>
+          <a:bodyPr rtlCol="0" anchor="ctr"/>
+          <a:lstStyle/>
+          <a:p>
+            <a:pPr algn="ctr"/>
+          </a:p>
+        </p:txBody>
+      </p:sp>
+      <p:sp>
+        <p:nvSpPr>
+          <p:cNvPr id="9" name="TextBox 8"/>
+          <p:cNvSpPr txBox="1"/>
+          <p:nvPr/>
+        </p:nvSpPr>
+        <p:spPr>
+          <a:xfrm>
+            <a:off x="1051560" y="2167127"/>
+            <a:ext cx="2743200" cy="457200"/>
+          </a:xfrm>
+          <a:prstGeom prst="rect">
+            <a:avLst/>
+          </a:prstGeom>
+          <a:noFill/>
+        </p:spPr>
+        <p:txBody>
+          <a:bodyPr wrap="square" anchor="t" lIns="0" rIns="0" tIns="0" bIns="0">
+            <a:spAutoFit/>
+          </a:bodyPr>
+          <a:lstStyle/>
+          <a:p>
+            <a:pPr algn="l"/>
+            <a:r>
+              <a:rPr sz="1400" b="1" i="0">
+                <a:solidFill>
+                  <a:srgbClr val="1A2B35"/>
+                </a:solidFill>
+                <a:latin typeface="Calibri"/>
+              </a:rPr>
+              <a:t>znf883-like</a:t>
+            </a:r>
+          </a:p>
+        </p:txBody>
+      </p:sp>
+      <p:sp>
+        <p:nvSpPr>
+          <p:cNvPr id="10" name="TextBox 9"/>
+          <p:cNvSpPr txBox="1"/>
+          <p:nvPr/>
+        </p:nvSpPr>
+        <p:spPr>
+          <a:xfrm>
+            <a:off x="3611880" y="2194560"/>
+            <a:ext cx="2606040" cy="411480"/>
+          </a:xfrm>
+          <a:prstGeom prst="rect">
+            <a:avLst/>
+          </a:prstGeom>
+          <a:noFill/>
+        </p:spPr>
+        <p:txBody>
+          <a:bodyPr wrap="square" anchor="t" lIns="0" rIns="0" tIns="0" bIns="0">
+            <a:spAutoFit/>
+          </a:bodyPr>
+          <a:lstStyle/>
+          <a:p>
+            <a:pPr algn="l"/>
+            <a:r>
+              <a:rPr sz="1150" b="0" i="0">
+                <a:solidFill>
+                  <a:srgbClr val="5B707B"/>
+                </a:solidFill>
+                <a:latin typeface="Calibri"/>
+              </a:rPr>
+              <a:t>exon DMR + exonic deletion · TOP</a:t>
+            </a:r>
+          </a:p>
+        </p:txBody>
+      </p:sp>
+      <p:sp>
+        <p:nvSpPr>
+          <p:cNvPr id="11" name="Rounded Rectangle 10"/>
+          <p:cNvSpPr/>
+          <p:nvPr/>
+        </p:nvSpPr>
+        <p:spPr>
+          <a:xfrm>
+            <a:off x="822960" y="2743200"/>
+            <a:ext cx="5486400" cy="566928"/>
+          </a:xfrm>
+          <a:prstGeom prst="roundRect">
+            <a:avLst/>
+          </a:prstGeom>
+          <a:solidFill>
+            <a:srgbClr val="F4F7F9"/>
+          </a:solidFill>
+          <a:ln>
+            <a:noFill/>
+          </a:ln>
+          <a:effectLst/>
+        </p:spPr>
+        <p:style>
+          <a:lnRef idx="1">
+            <a:schemeClr val="accent1"/>
+          </a:lnRef>
+          <a:fillRef idx="3">
+            <a:schemeClr val="accent1"/>
+          </a:fillRef>
+          <a:effectRef idx="2">
+            <a:schemeClr val="accent1"/>
+          </a:effectRef>
+          <a:fontRef idx="minor">
+            <a:schemeClr val="lt1"/>
+          </a:fontRef>
+        </p:style>
+        <p:txBody>
+          <a:bodyPr rtlCol="0" anchor="ctr"/>
+          <a:lstStyle/>
+          <a:p>
+            <a:pPr algn="ctr"/>
+          </a:p>
+        </p:txBody>
+      </p:sp>
+      <p:sp>
+        <p:nvSpPr>
+          <p:cNvPr id="12" name="Rectangle 11"/>
+          <p:cNvSpPr/>
+          <p:nvPr/>
+        </p:nvSpPr>
+        <p:spPr>
+          <a:xfrm>
+            <a:off x="822960" y="2743200"/>
+            <a:ext cx="91440" cy="566928"/>
+          </a:xfrm>
+          <a:prstGeom prst="rect">
+            <a:avLst/>
+          </a:prstGeom>
+          <a:solidFill>
+            <a:srgbClr val="1C7293"/>
+          </a:solidFill>
+          <a:ln>
+            <a:noFill/>
+          </a:ln>
+          <a:effectLst/>
+        </p:spPr>
+        <p:style>
+          <a:lnRef idx="1">
+            <a:schemeClr val="accent1"/>
+          </a:lnRef>
+          <a:fillRef idx="3">
+            <a:schemeClr val="accent1"/>
+          </a:fillRef>
+          <a:effectRef idx="2">
+            <a:schemeClr val="accent1"/>
+          </a:effectRef>
+          <a:fontRef idx="minor">
+            <a:schemeClr val="lt1"/>
+          </a:fontRef>
+        </p:style>
+        <p:txBody>
+          <a:bodyPr rtlCol="0" anchor="ctr"/>
+          <a:lstStyle/>
+          <a:p>
+            <a:pPr algn="ctr"/>
+          </a:p>
+        </p:txBody>
+      </p:sp>
+      <p:sp>
+        <p:nvSpPr>
+          <p:cNvPr id="13" name="TextBox 12"/>
+          <p:cNvSpPr txBox="1"/>
+          <p:nvPr/>
+        </p:nvSpPr>
+        <p:spPr>
+          <a:xfrm>
+            <a:off x="1051560" y="2807208"/>
+            <a:ext cx="2743200" cy="457200"/>
+          </a:xfrm>
+          <a:prstGeom prst="rect">
+            <a:avLst/>
+          </a:prstGeom>
+          <a:noFill/>
+        </p:spPr>
+        <p:txBody>
+          <a:bodyPr wrap="square" anchor="t" lIns="0" rIns="0" tIns="0" bIns="0">
+            <a:spAutoFit/>
+          </a:bodyPr>
+          <a:lstStyle/>
+          <a:p>
+            <a:pPr algn="l"/>
+            <a:r>
+              <a:rPr sz="1400" b="1" i="0">
+                <a:solidFill>
+                  <a:srgbClr val="1A2B35"/>
+                </a:solidFill>
+                <a:latin typeface="Calibri"/>
+              </a:rPr>
+              <a:t>XlCGF57.1-like</a:t>
+            </a:r>
+          </a:p>
+        </p:txBody>
+      </p:sp>
+      <p:sp>
+        <p:nvSpPr>
+          <p:cNvPr id="14" name="TextBox 13"/>
+          <p:cNvSpPr txBox="1"/>
+          <p:nvPr/>
+        </p:nvSpPr>
+        <p:spPr>
+          <a:xfrm>
+            <a:off x="3611880" y="2834640"/>
+            <a:ext cx="2606040" cy="411480"/>
+          </a:xfrm>
+          <a:prstGeom prst="rect">
+            <a:avLst/>
+          </a:prstGeom>
+          <a:noFill/>
+        </p:spPr>
+        <p:txBody>
+          <a:bodyPr wrap="square" anchor="t" lIns="0" rIns="0" tIns="0" bIns="0">
+            <a:spAutoFit/>
+          </a:bodyPr>
+          <a:lstStyle/>
+          <a:p>
+            <a:pPr algn="l"/>
+            <a:r>
+              <a:rPr sz="1150" b="0" i="0">
+                <a:solidFill>
+                  <a:srgbClr val="5B707B"/>
+                </a:solidFill>
+                <a:latin typeface="Calibri"/>
+              </a:rPr>
+              <a:t>intron hypo-DMR + nearby deletion</a:t>
+            </a:r>
+          </a:p>
+        </p:txBody>
+      </p:sp>
+      <p:sp>
+        <p:nvSpPr>
+          <p:cNvPr id="15" name="Rounded Rectangle 14"/>
+          <p:cNvSpPr/>
+          <p:nvPr/>
+        </p:nvSpPr>
+        <p:spPr>
+          <a:xfrm>
+            <a:off x="822960" y="3383280"/>
+            <a:ext cx="5486400" cy="566928"/>
+          </a:xfrm>
+          <a:prstGeom prst="roundRect">
+            <a:avLst/>
+          </a:prstGeom>
+          <a:solidFill>
+            <a:srgbClr val="F4F7F9"/>
+          </a:solidFill>
+          <a:ln>
+            <a:noFill/>
+          </a:ln>
+          <a:effectLst/>
+        </p:spPr>
+        <p:style>
+          <a:lnRef idx="1">
+            <a:schemeClr val="accent1"/>
+          </a:lnRef>
+          <a:fillRef idx="3">
+            <a:schemeClr val="accent1"/>
+          </a:fillRef>
+          <a:effectRef idx="2">
+            <a:schemeClr val="accent1"/>
+          </a:effectRef>
+          <a:fontRef idx="minor">
+            <a:schemeClr val="lt1"/>
+          </a:fontRef>
+        </p:style>
+        <p:txBody>
+          <a:bodyPr rtlCol="0" anchor="ctr"/>
+          <a:lstStyle/>
+          <a:p>
+            <a:pPr algn="ctr"/>
+          </a:p>
+        </p:txBody>
+      </p:sp>
+      <p:sp>
+        <p:nvSpPr>
+          <p:cNvPr id="16" name="Rectangle 15"/>
+          <p:cNvSpPr/>
+          <p:nvPr/>
+        </p:nvSpPr>
+        <p:spPr>
+          <a:xfrm>
+            <a:off x="822960" y="3383280"/>
+            <a:ext cx="91440" cy="566928"/>
+          </a:xfrm>
+          <a:prstGeom prst="rect">
+            <a:avLst/>
+          </a:prstGeom>
+          <a:solidFill>
+            <a:srgbClr val="1C7293"/>
+          </a:solidFill>
+          <a:ln>
+            <a:noFill/>
+          </a:ln>
+          <a:effectLst/>
+        </p:spPr>
+        <p:style>
+          <a:lnRef idx="1">
+            <a:schemeClr val="accent1"/>
+          </a:lnRef>
+          <a:fillRef idx="3">
+            <a:schemeClr val="accent1"/>
+          </a:fillRef>
+          <a:effectRef idx="2">
+            <a:schemeClr val="accent1"/>
+          </a:effectRef>
+          <a:fontRef idx="minor">
+            <a:schemeClr val="lt1"/>
+          </a:fontRef>
+        </p:style>
+        <p:txBody>
+          <a:bodyPr rtlCol="0" anchor="ctr"/>
+          <a:lstStyle/>
+          <a:p>
+            <a:pPr algn="ctr"/>
+          </a:p>
+        </p:txBody>
+      </p:sp>
+      <p:sp>
+        <p:nvSpPr>
+          <p:cNvPr id="17" name="TextBox 16"/>
+          <p:cNvSpPr txBox="1"/>
+          <p:nvPr/>
+        </p:nvSpPr>
+        <p:spPr>
+          <a:xfrm>
+            <a:off x="1051560" y="3447288"/>
+            <a:ext cx="2743200" cy="457200"/>
+          </a:xfrm>
+          <a:prstGeom prst="rect">
+            <a:avLst/>
+          </a:prstGeom>
+          <a:noFill/>
+        </p:spPr>
+        <p:txBody>
+          <a:bodyPr wrap="square" anchor="t" lIns="0" rIns="0" tIns="0" bIns="0">
+            <a:spAutoFit/>
+          </a:bodyPr>
+          <a:lstStyle/>
+          <a:p>
+            <a:pPr algn="l"/>
+            <a:r>
+              <a:rPr sz="1400" b="1" i="0">
+                <a:solidFill>
+                  <a:srgbClr val="1A2B35"/>
+                </a:solidFill>
+                <a:latin typeface="Calibri"/>
+              </a:rPr>
+              <a:t>septin-9-like</a:t>
+            </a:r>
+          </a:p>
+        </p:txBody>
+      </p:sp>
+      <p:sp>
+        <p:nvSpPr>
+          <p:cNvPr id="18" name="TextBox 17"/>
+          <p:cNvSpPr txBox="1"/>
+          <p:nvPr/>
+        </p:nvSpPr>
+        <p:spPr>
+          <a:xfrm>
+            <a:off x="3611880" y="3474720"/>
+            <a:ext cx="2606040" cy="411480"/>
+          </a:xfrm>
+          <a:prstGeom prst="rect">
+            <a:avLst/>
+          </a:prstGeom>
+          <a:noFill/>
+        </p:spPr>
+        <p:txBody>
+          <a:bodyPr wrap="square" anchor="t" lIns="0" rIns="0" tIns="0" bIns="0">
+            <a:spAutoFit/>
+          </a:bodyPr>
+          <a:lstStyle/>
+          <a:p>
+            <a:pPr algn="l"/>
+            <a:r>
+              <a:rPr sz="1150" b="0" i="0">
+                <a:solidFill>
+                  <a:srgbClr val="5B707B"/>
+                </a:solidFill>
+                <a:latin typeface="Calibri"/>
+              </a:rPr>
+              <a:t>intron hyper-DMR + nearby deletion</a:t>
+            </a:r>
+          </a:p>
+        </p:txBody>
+      </p:sp>
+      <p:sp>
+        <p:nvSpPr>
+          <p:cNvPr id="19" name="Rounded Rectangle 18"/>
+          <p:cNvSpPr/>
+          <p:nvPr/>
+        </p:nvSpPr>
+        <p:spPr>
+          <a:xfrm>
+            <a:off x="822960" y="4023360"/>
+            <a:ext cx="5486400" cy="566928"/>
+          </a:xfrm>
+          <a:prstGeom prst="roundRect">
+            <a:avLst/>
+          </a:prstGeom>
+          <a:solidFill>
+            <a:srgbClr val="F4F7F9"/>
+          </a:solidFill>
+          <a:ln>
+            <a:noFill/>
+          </a:ln>
+          <a:effectLst/>
+        </p:spPr>
+        <p:style>
+          <a:lnRef idx="1">
+            <a:schemeClr val="accent1"/>
+          </a:lnRef>
+          <a:fillRef idx="3">
+            <a:schemeClr val="accent1"/>
+          </a:fillRef>
+          <a:effectRef idx="2">
+            <a:schemeClr val="accent1"/>
+          </a:effectRef>
+          <a:fontRef idx="minor">
+            <a:schemeClr val="lt1"/>
+          </a:fontRef>
+        </p:style>
+        <p:txBody>
+          <a:bodyPr rtlCol="0" anchor="ctr"/>
+          <a:lstStyle/>
+          <a:p>
+            <a:pPr algn="ctr"/>
+          </a:p>
+        </p:txBody>
+      </p:sp>
+      <p:sp>
+        <p:nvSpPr>
+          <p:cNvPr id="20" name="Rectangle 19"/>
+          <p:cNvSpPr/>
+          <p:nvPr/>
+        </p:nvSpPr>
+        <p:spPr>
+          <a:xfrm>
+            <a:off x="822960" y="4023360"/>
+            <a:ext cx="91440" cy="566928"/>
+          </a:xfrm>
+          <a:prstGeom prst="rect">
+            <a:avLst/>
+          </a:prstGeom>
+          <a:solidFill>
+            <a:srgbClr val="5B707B"/>
+          </a:solidFill>
+          <a:ln>
+            <a:noFill/>
+          </a:ln>
+          <a:effectLst/>
+        </p:spPr>
+        <p:style>
+          <a:lnRef idx="1">
+            <a:schemeClr val="accent1"/>
+          </a:lnRef>
+          <a:fillRef idx="3">
+            <a:schemeClr val="accent1"/>
+          </a:fillRef>
+          <a:effectRef idx="2">
+            <a:schemeClr val="accent1"/>
+          </a:effectRef>
+          <a:fontRef idx="minor">
+            <a:schemeClr val="lt1"/>
+          </a:fontRef>
+        </p:style>
+        <p:txBody>
+          <a:bodyPr rtlCol="0" anchor="ctr"/>
+          <a:lstStyle/>
+          <a:p>
+            <a:pPr algn="ctr"/>
+          </a:p>
+        </p:txBody>
+      </p:sp>
+      <p:sp>
+        <p:nvSpPr>
+          <p:cNvPr id="21" name="TextBox 20"/>
+          <p:cNvSpPr txBox="1"/>
+          <p:nvPr/>
+        </p:nvSpPr>
+        <p:spPr>
+          <a:xfrm>
+            <a:off x="1051560" y="4087368"/>
+            <a:ext cx="2743200" cy="457200"/>
+          </a:xfrm>
+          <a:prstGeom prst="rect">
+            <a:avLst/>
+          </a:prstGeom>
+          <a:noFill/>
+        </p:spPr>
+        <p:txBody>
+          <a:bodyPr wrap="square" anchor="t" lIns="0" rIns="0" tIns="0" bIns="0">
+            <a:spAutoFit/>
+          </a:bodyPr>
+          <a:lstStyle/>
+          <a:p>
+            <a:pPr algn="l"/>
+            <a:r>
+              <a:rPr sz="1400" b="1" i="0">
+                <a:solidFill>
+                  <a:srgbClr val="1A2B35"/>
+                </a:solidFill>
+                <a:latin typeface="Calibri"/>
+              </a:rPr>
+              <a:t>LOC120039781</a:t>
+            </a:r>
+          </a:p>
+        </p:txBody>
+      </p:sp>
+      <p:sp>
+        <p:nvSpPr>
+          <p:cNvPr id="22" name="TextBox 21"/>
+          <p:cNvSpPr txBox="1"/>
+          <p:nvPr/>
+        </p:nvSpPr>
+        <p:spPr>
+          <a:xfrm>
+            <a:off x="3611880" y="4114800"/>
+            <a:ext cx="2606040" cy="411480"/>
+          </a:xfrm>
+          <a:prstGeom prst="rect">
+            <a:avLst/>
+          </a:prstGeom>
+          <a:noFill/>
+        </p:spPr>
+        <p:txBody>
+          <a:bodyPr wrap="square" anchor="t" lIns="0" rIns="0" tIns="0" bIns="0">
+            <a:spAutoFit/>
+          </a:bodyPr>
+          <a:lstStyle/>
+          <a:p>
+            <a:pPr algn="l"/>
+            <a:r>
+              <a:rPr sz="1150" b="0" i="0">
+                <a:solidFill>
+                  <a:srgbClr val="5B707B"/>
+                </a:solidFill>
+                <a:latin typeface="Calibri"/>
+              </a:rPr>
+              <a:t>uncharacterized · intron hypo-DMR</a:t>
+            </a:r>
+          </a:p>
+        </p:txBody>
+      </p:sp>
+      <p:sp>
+        <p:nvSpPr>
+          <p:cNvPr id="23" name="TextBox 22"/>
+          <p:cNvSpPr txBox="1"/>
+          <p:nvPr/>
+        </p:nvSpPr>
+        <p:spPr>
+          <a:xfrm>
+            <a:off x="822960" y="4754880"/>
+            <a:ext cx="5486400" cy="320040"/>
+          </a:xfrm>
+          <a:prstGeom prst="rect">
+            <a:avLst/>
+          </a:prstGeom>
+          <a:noFill/>
+        </p:spPr>
+        <p:txBody>
+          <a:bodyPr wrap="square" anchor="t" lIns="0" rIns="0" tIns="0" bIns="0">
+            <a:spAutoFit/>
+          </a:bodyPr>
+          <a:lstStyle/>
+          <a:p>
+            <a:pPr algn="l"/>
+            <a:r>
+              <a:rPr sz="1200" b="1" i="0" spc="120">
+                <a:solidFill>
+                  <a:srgbClr val="E9964E"/>
+                </a:solidFill>
+                <a:latin typeface="Calibri"/>
+              </a:rPr>
+              <a:t>EXONIC DELETIONS IN LIPID GENES</a:t>
+            </a:r>
+          </a:p>
+        </p:txBody>
+      </p:sp>
+      <p:sp>
+        <p:nvSpPr>
+          <p:cNvPr id="24" name="TextBox 23"/>
+          <p:cNvSpPr txBox="1"/>
+          <p:nvPr/>
+        </p:nvSpPr>
+        <p:spPr>
+          <a:xfrm>
+            <a:off x="822960" y="5120640"/>
+            <a:ext cx="5486400" cy="1188720"/>
+          </a:xfrm>
+          <a:prstGeom prst="rect">
+            <a:avLst/>
+          </a:prstGeom>
+          <a:noFill/>
+        </p:spPr>
+        <p:txBody>
+          <a:bodyPr wrap="square" lIns="0" rIns="0" tIns="0">
+            <a:spAutoFit/>
+          </a:bodyPr>
+          <a:lstStyle/>
+          <a:p>
+            <a:pPr>
+              <a:spcAft>
+                <a:spcPts val="500"/>
+              </a:spcAft>
+            </a:pPr>
+            <a:r>
+              <a:rPr sz="1600" b="1">
+                <a:solidFill>
+                  <a:srgbClr val="E9964E"/>
+                </a:solidFill>
+                <a:latin typeface="Calibri"/>
+              </a:rPr>
+              <a:t>—  </a:t>
+            </a:r>
+            <a:r>
+              <a:rPr sz="1350" b="1" i="0">
+                <a:solidFill>
+                  <a:srgbClr val="1A2B35"/>
+                </a:solidFill>
+                <a:latin typeface="Calibri"/>
+              </a:rPr>
+              <a:t>angptl5</a:t>
+            </a:r>
+            <a:r>
+              <a:rPr sz="1350" b="0" i="0">
+                <a:solidFill>
+                  <a:srgbClr val="5B707B"/>
+                </a:solidFill>
+                <a:latin typeface="Calibri"/>
+              </a:rPr>
+              <a:t>  ·  </a:t>
+            </a:r>
+            <a:r>
+              <a:rPr sz="1350" b="1" i="0">
+                <a:solidFill>
+                  <a:srgbClr val="1A2B35"/>
+                </a:solidFill>
+                <a:latin typeface="Calibri"/>
+              </a:rPr>
+              <a:t>mogat2</a:t>
+            </a:r>
+            <a:r>
+              <a:rPr sz="1350" b="0" i="0">
+                <a:solidFill>
+                  <a:srgbClr val="5B707B"/>
+                </a:solidFill>
+                <a:latin typeface="Calibri"/>
+              </a:rPr>
+              <a:t>  ·  </a:t>
+            </a:r>
+            <a:r>
+              <a:rPr sz="1350" b="1" i="0">
+                <a:solidFill>
+                  <a:srgbClr val="1A2B35"/>
+                </a:solidFill>
+                <a:latin typeface="Calibri"/>
+              </a:rPr>
+              <a:t>epoxide hydrolase 1</a:t>
+            </a:r>
+          </a:p>
+          <a:p>
+            <a:pPr>
+              <a:spcAft>
+                <a:spcPts val="500"/>
+              </a:spcAft>
+            </a:pPr>
+            <a:r>
+              <a:rPr sz="1600" b="1">
+                <a:solidFill>
+                  <a:srgbClr val="E9964E"/>
+                </a:solidFill>
+                <a:latin typeface="Calibri"/>
+              </a:rPr>
+              <a:t>—  </a:t>
+            </a:r>
+            <a:r>
+              <a:rPr sz="1250" b="0" i="1">
+                <a:solidFill>
+                  <a:srgbClr val="5B707B"/>
+                </a:solidFill>
+                <a:latin typeface="Calibri"/>
+              </a:rPr>
+              <a:t>Lipid handling — consistent with the defining high-lipid siscowet phenotype</a:t>
+            </a:r>
+          </a:p>
+        </p:txBody>
+      </p:sp>
+      <p:sp>
+        <p:nvSpPr>
+          <p:cNvPr id="25" name="TextBox 24"/>
+          <p:cNvSpPr txBox="1"/>
+          <p:nvPr/>
+        </p:nvSpPr>
+        <p:spPr>
+          <a:xfrm>
+            <a:off x="11338560" y="6446520"/>
+            <a:ext cx="640080" cy="274320"/>
+          </a:xfrm>
+          <a:prstGeom prst="rect">
+            <a:avLst/>
+          </a:prstGeom>
+          <a:noFill/>
+        </p:spPr>
+        <p:txBody>
+          <a:bodyPr wrap="square" anchor="t" lIns="0" rIns="0" tIns="0" bIns="0">
+            <a:spAutoFit/>
+          </a:bodyPr>
+          <a:lstStyle/>
+          <a:p>
+            <a:pPr algn="r"/>
+            <a:r>
+              <a:rPr sz="1100" b="0" i="0">
+                <a:solidFill>
+                  <a:srgbClr val="5B707B"/>
+                </a:solidFill>
+                <a:latin typeface="Calibri"/>
+              </a:rPr>
+              <a:t>11</a:t>
+            </a:r>
+          </a:p>
+        </p:txBody>
+      </p:sp>
+    </p:spTree>
+  </p:cSld>
+  <p:clrMapOvr>
+    <a:masterClrMapping/>
+  </p:clrMapOvr>
+</p:sld>
+</file>
+
+<file path=ppt/slides/slide13.xml><?xml version="1.0" encoding="utf-8"?>
 <p:sld xmlns:a="http://schemas.openxmlformats.org/drawingml/2006/main" xmlns:p="http://schemas.openxmlformats.org/presentationml/2006/main" xmlns:r="http://schemas.openxmlformats.org/officeDocument/2006/relationships">
   <p:cSld>
     <p:bg>
@@ -4957,7 +6273,7 @@
                 </a:solidFill>
                 <a:latin typeface="Calibri"/>
               </a:rPr>
-              <a:t>TAKE-HOME</a:t>
+              <a:t>LAYER 3 · FUNCTION &amp; PHENOTYPE</a:t>
             </a:r>
           </a:p>
         </p:txBody>
@@ -4986,13 +6302,13 @@
           <a:p>
             <a:pPr algn="l"/>
             <a:r>
-              <a:rPr sz="3300" b="1" i="0">
+              <a:rPr sz="3100" b="1" i="0">
                 <a:solidFill>
                   <a:srgbClr val="1A2B35"/>
                 </a:solidFill>
                 <a:latin typeface="Georgia"/>
               </a:rPr>
-              <a:t>Three things to remember</a:t>
+              <a:t>What the candidate set points toward</a:t>
             </a:r>
           </a:p>
         </p:txBody>
@@ -5005,8 +6321,8 @@
         </p:nvSpPr>
         <p:spPr>
           <a:xfrm>
-            <a:off x="822960" y="1965960"/>
-            <a:ext cx="10515600" cy="1325880"/>
+            <a:off x="822960" y="1920240"/>
+            <a:ext cx="5074920" cy="3703320"/>
           </a:xfrm>
           <a:prstGeom prst="roundRect">
             <a:avLst/>
@@ -5050,207 +6366,749 @@
       </p:sp>
       <p:sp>
         <p:nvSpPr>
-          <p:cNvPr id="5" name="Rectangle 4"/>
+          <p:cNvPr id="5" name="TextBox 4"/>
+          <p:cNvSpPr txBox="1"/>
+          <p:nvPr/>
+        </p:nvSpPr>
+        <p:spPr>
+          <a:xfrm>
+            <a:off x="1097280" y="2103120"/>
+            <a:ext cx="4572000" cy="365760"/>
+          </a:xfrm>
+          <a:prstGeom prst="rect">
+            <a:avLst/>
+          </a:prstGeom>
+          <a:noFill/>
+        </p:spPr>
+        <p:txBody>
+          <a:bodyPr wrap="square" anchor="t" lIns="0" rIns="0" tIns="0" bIns="0">
+            <a:spAutoFit/>
+          </a:bodyPr>
+          <a:lstStyle/>
+          <a:p>
+            <a:pPr algn="l"/>
+            <a:r>
+              <a:rPr sz="1600" b="1" i="0">
+                <a:solidFill>
+                  <a:srgbClr val="1A2B35"/>
+                </a:solidFill>
+                <a:latin typeface="Georgia"/>
+              </a:rPr>
+              <a:t>GO enrichment — deletion set</a:t>
+            </a:r>
+          </a:p>
+        </p:txBody>
+      </p:sp>
+      <p:sp>
+        <p:nvSpPr>
+          <p:cNvPr id="6" name="TextBox 5"/>
+          <p:cNvSpPr txBox="1"/>
+          <p:nvPr/>
+        </p:nvSpPr>
+        <p:spPr>
+          <a:xfrm>
+            <a:off x="1097280" y="2542032"/>
+            <a:ext cx="3017520" cy="320040"/>
+          </a:xfrm>
+          <a:prstGeom prst="rect">
+            <a:avLst/>
+          </a:prstGeom>
+          <a:noFill/>
+        </p:spPr>
+        <p:txBody>
+          <a:bodyPr wrap="square" anchor="t" lIns="0" rIns="0" tIns="0" bIns="0">
+            <a:spAutoFit/>
+          </a:bodyPr>
+          <a:lstStyle/>
+          <a:p>
+            <a:pPr algn="l"/>
+            <a:r>
+              <a:rPr sz="1050" b="1" i="0" spc="100">
+                <a:solidFill>
+                  <a:srgbClr val="5B707B"/>
+                </a:solidFill>
+                <a:latin typeface="Calibri"/>
+              </a:rPr>
+              <a:t>term</a:t>
+            </a:r>
+          </a:p>
+        </p:txBody>
+      </p:sp>
+      <p:sp>
+        <p:nvSpPr>
+          <p:cNvPr id="7" name="TextBox 6"/>
+          <p:cNvSpPr txBox="1"/>
+          <p:nvPr/>
+        </p:nvSpPr>
+        <p:spPr>
+          <a:xfrm>
+            <a:off x="4160520" y="2542032"/>
+            <a:ext cx="731520" cy="320040"/>
+          </a:xfrm>
+          <a:prstGeom prst="rect">
+            <a:avLst/>
+          </a:prstGeom>
+          <a:noFill/>
+        </p:spPr>
+        <p:txBody>
+          <a:bodyPr wrap="square" anchor="t" lIns="0" rIns="0" tIns="0" bIns="0">
+            <a:spAutoFit/>
+          </a:bodyPr>
+          <a:lstStyle/>
+          <a:p>
+            <a:pPr algn="r"/>
+            <a:r>
+              <a:rPr sz="1050" b="1" i="0">
+                <a:solidFill>
+                  <a:srgbClr val="5B707B"/>
+                </a:solidFill>
+                <a:latin typeface="Calibri"/>
+              </a:rPr>
+              <a:t>FOLD</a:t>
+            </a:r>
+          </a:p>
+        </p:txBody>
+      </p:sp>
+      <p:sp>
+        <p:nvSpPr>
+          <p:cNvPr id="8" name="TextBox 7"/>
+          <p:cNvSpPr txBox="1"/>
+          <p:nvPr/>
+        </p:nvSpPr>
+        <p:spPr>
+          <a:xfrm>
+            <a:off x="4892040" y="2542032"/>
+            <a:ext cx="868680" cy="320040"/>
+          </a:xfrm>
+          <a:prstGeom prst="rect">
+            <a:avLst/>
+          </a:prstGeom>
+          <a:noFill/>
+        </p:spPr>
+        <p:txBody>
+          <a:bodyPr wrap="square" anchor="t" lIns="0" rIns="0" tIns="0" bIns="0">
+            <a:spAutoFit/>
+          </a:bodyPr>
+          <a:lstStyle/>
+          <a:p>
+            <a:pPr algn="r"/>
+            <a:r>
+              <a:rPr sz="1050" b="1" i="0">
+                <a:solidFill>
+                  <a:srgbClr val="5B707B"/>
+                </a:solidFill>
+                <a:latin typeface="Calibri"/>
+              </a:rPr>
+              <a:t>FDR</a:t>
+            </a:r>
+          </a:p>
+        </p:txBody>
+      </p:sp>
+      <p:sp>
+        <p:nvSpPr>
+          <p:cNvPr id="9" name="TextBox 8"/>
+          <p:cNvSpPr txBox="1"/>
+          <p:nvPr/>
+        </p:nvSpPr>
+        <p:spPr>
+          <a:xfrm>
+            <a:off x="1097280" y="2926080"/>
+            <a:ext cx="3017520" cy="365760"/>
+          </a:xfrm>
+          <a:prstGeom prst="rect">
+            <a:avLst/>
+          </a:prstGeom>
+          <a:noFill/>
+        </p:spPr>
+        <p:txBody>
+          <a:bodyPr wrap="square" anchor="t" lIns="0" rIns="0" tIns="0" bIns="0">
+            <a:spAutoFit/>
+          </a:bodyPr>
+          <a:lstStyle/>
+          <a:p>
+            <a:pPr algn="l"/>
+            <a:r>
+              <a:rPr sz="1250" b="1" i="0">
+                <a:solidFill>
+                  <a:srgbClr val="1A2B35"/>
+                </a:solidFill>
+                <a:latin typeface="Calibri"/>
+              </a:rPr>
+              <a:t>Ca²⁺ transmembrane transport</a:t>
+            </a:r>
+          </a:p>
+        </p:txBody>
+      </p:sp>
+      <p:sp>
+        <p:nvSpPr>
+          <p:cNvPr id="10" name="TextBox 9"/>
+          <p:cNvSpPr txBox="1"/>
+          <p:nvPr/>
+        </p:nvSpPr>
+        <p:spPr>
+          <a:xfrm>
+            <a:off x="4160520" y="2926080"/>
+            <a:ext cx="731520" cy="365760"/>
+          </a:xfrm>
+          <a:prstGeom prst="rect">
+            <a:avLst/>
+          </a:prstGeom>
+          <a:noFill/>
+        </p:spPr>
+        <p:txBody>
+          <a:bodyPr wrap="square" anchor="t" lIns="0" rIns="0" tIns="0" bIns="0">
+            <a:spAutoFit/>
+          </a:bodyPr>
+          <a:lstStyle/>
+          <a:p>
+            <a:pPr algn="r"/>
+            <a:r>
+              <a:rPr sz="1250" b="0" i="0">
+                <a:solidFill>
+                  <a:srgbClr val="1A2B35"/>
+                </a:solidFill>
+                <a:latin typeface="Calibri"/>
+              </a:rPr>
+              <a:t>3.7</a:t>
+            </a:r>
+          </a:p>
+        </p:txBody>
+      </p:sp>
+      <p:sp>
+        <p:nvSpPr>
+          <p:cNvPr id="11" name="TextBox 10"/>
+          <p:cNvSpPr txBox="1"/>
+          <p:nvPr/>
+        </p:nvSpPr>
+        <p:spPr>
+          <a:xfrm>
+            <a:off x="4892040" y="2926080"/>
+            <a:ext cx="868680" cy="365760"/>
+          </a:xfrm>
+          <a:prstGeom prst="rect">
+            <a:avLst/>
+          </a:prstGeom>
+          <a:noFill/>
+        </p:spPr>
+        <p:txBody>
+          <a:bodyPr wrap="square" anchor="t" lIns="0" rIns="0" tIns="0" bIns="0">
+            <a:spAutoFit/>
+          </a:bodyPr>
+          <a:lstStyle/>
+          <a:p>
+            <a:pPr algn="r"/>
+            <a:r>
+              <a:rPr sz="1250" b="0" i="0">
+                <a:solidFill>
+                  <a:srgbClr val="1A2B35"/>
+                </a:solidFill>
+                <a:latin typeface="Calibri"/>
+              </a:rPr>
+              <a:t>5.6e-4</a:t>
+            </a:r>
+          </a:p>
+        </p:txBody>
+      </p:sp>
+      <p:sp>
+        <p:nvSpPr>
+          <p:cNvPr id="12" name="TextBox 11"/>
+          <p:cNvSpPr txBox="1"/>
+          <p:nvPr/>
+        </p:nvSpPr>
+        <p:spPr>
+          <a:xfrm>
+            <a:off x="1097280" y="3364992"/>
+            <a:ext cx="3017520" cy="365760"/>
+          </a:xfrm>
+          <a:prstGeom prst="rect">
+            <a:avLst/>
+          </a:prstGeom>
+          <a:noFill/>
+        </p:spPr>
+        <p:txBody>
+          <a:bodyPr wrap="square" anchor="t" lIns="0" rIns="0" tIns="0" bIns="0">
+            <a:spAutoFit/>
+          </a:bodyPr>
+          <a:lstStyle/>
+          <a:p>
+            <a:pPr algn="l"/>
+            <a:r>
+              <a:rPr sz="1250" b="1" i="0">
+                <a:solidFill>
+                  <a:srgbClr val="1A2B35"/>
+                </a:solidFill>
+                <a:latin typeface="Calibri"/>
+              </a:rPr>
+              <a:t>Neuron projection development</a:t>
+            </a:r>
+          </a:p>
+        </p:txBody>
+      </p:sp>
+      <p:sp>
+        <p:nvSpPr>
+          <p:cNvPr id="13" name="TextBox 12"/>
+          <p:cNvSpPr txBox="1"/>
+          <p:nvPr/>
+        </p:nvSpPr>
+        <p:spPr>
+          <a:xfrm>
+            <a:off x="4160520" y="3364992"/>
+            <a:ext cx="731520" cy="365760"/>
+          </a:xfrm>
+          <a:prstGeom prst="rect">
+            <a:avLst/>
+          </a:prstGeom>
+          <a:noFill/>
+        </p:spPr>
+        <p:txBody>
+          <a:bodyPr wrap="square" anchor="t" lIns="0" rIns="0" tIns="0" bIns="0">
+            <a:spAutoFit/>
+          </a:bodyPr>
+          <a:lstStyle/>
+          <a:p>
+            <a:pPr algn="r"/>
+            <a:r>
+              <a:rPr sz="1250" b="0" i="0">
+                <a:solidFill>
+                  <a:srgbClr val="1A2B35"/>
+                </a:solidFill>
+                <a:latin typeface="Calibri"/>
+              </a:rPr>
+              <a:t>2.4</a:t>
+            </a:r>
+          </a:p>
+        </p:txBody>
+      </p:sp>
+      <p:sp>
+        <p:nvSpPr>
+          <p:cNvPr id="14" name="TextBox 13"/>
+          <p:cNvSpPr txBox="1"/>
+          <p:nvPr/>
+        </p:nvSpPr>
+        <p:spPr>
+          <a:xfrm>
+            <a:off x="4892040" y="3364992"/>
+            <a:ext cx="868680" cy="365760"/>
+          </a:xfrm>
+          <a:prstGeom prst="rect">
+            <a:avLst/>
+          </a:prstGeom>
+          <a:noFill/>
+        </p:spPr>
+        <p:txBody>
+          <a:bodyPr wrap="square" anchor="t" lIns="0" rIns="0" tIns="0" bIns="0">
+            <a:spAutoFit/>
+          </a:bodyPr>
+          <a:lstStyle/>
+          <a:p>
+            <a:pPr algn="r"/>
+            <a:r>
+              <a:rPr sz="1250" b="0" i="0">
+                <a:solidFill>
+                  <a:srgbClr val="1A2B35"/>
+                </a:solidFill>
+                <a:latin typeface="Calibri"/>
+              </a:rPr>
+              <a:t>2.6e-3</a:t>
+            </a:r>
+          </a:p>
+        </p:txBody>
+      </p:sp>
+      <p:sp>
+        <p:nvSpPr>
+          <p:cNvPr id="15" name="TextBox 14"/>
+          <p:cNvSpPr txBox="1"/>
+          <p:nvPr/>
+        </p:nvSpPr>
+        <p:spPr>
+          <a:xfrm>
+            <a:off x="1097280" y="3803904"/>
+            <a:ext cx="3017520" cy="365760"/>
+          </a:xfrm>
+          <a:prstGeom prst="rect">
+            <a:avLst/>
+          </a:prstGeom>
+          <a:noFill/>
+        </p:spPr>
+        <p:txBody>
+          <a:bodyPr wrap="square" anchor="t" lIns="0" rIns="0" tIns="0" bIns="0">
+            <a:spAutoFit/>
+          </a:bodyPr>
+          <a:lstStyle/>
+          <a:p>
+            <a:pPr algn="l"/>
+            <a:r>
+              <a:rPr sz="1250" b="0" i="0">
+                <a:solidFill>
+                  <a:srgbClr val="5B707B"/>
+                </a:solidFill>
+                <a:latin typeface="Calibri"/>
+              </a:rPr>
+              <a:t>Calcium channel complex</a:t>
+            </a:r>
+          </a:p>
+        </p:txBody>
+      </p:sp>
+      <p:sp>
+        <p:nvSpPr>
+          <p:cNvPr id="16" name="TextBox 15"/>
+          <p:cNvSpPr txBox="1"/>
+          <p:nvPr/>
+        </p:nvSpPr>
+        <p:spPr>
+          <a:xfrm>
+            <a:off x="4160520" y="3803904"/>
+            <a:ext cx="731520" cy="365760"/>
+          </a:xfrm>
+          <a:prstGeom prst="rect">
+            <a:avLst/>
+          </a:prstGeom>
+          <a:noFill/>
+        </p:spPr>
+        <p:txBody>
+          <a:bodyPr wrap="square" anchor="t" lIns="0" rIns="0" tIns="0" bIns="0">
+            <a:spAutoFit/>
+          </a:bodyPr>
+          <a:lstStyle/>
+          <a:p>
+            <a:pPr algn="r"/>
+            <a:r>
+              <a:rPr sz="1250" b="0" i="0">
+                <a:solidFill>
+                  <a:srgbClr val="5B707B"/>
+                </a:solidFill>
+                <a:latin typeface="Calibri"/>
+              </a:rPr>
+              <a:t>4.6</a:t>
+            </a:r>
+          </a:p>
+        </p:txBody>
+      </p:sp>
+      <p:sp>
+        <p:nvSpPr>
+          <p:cNvPr id="17" name="TextBox 16"/>
+          <p:cNvSpPr txBox="1"/>
+          <p:nvPr/>
+        </p:nvSpPr>
+        <p:spPr>
+          <a:xfrm>
+            <a:off x="4892040" y="3803904"/>
+            <a:ext cx="868680" cy="365760"/>
+          </a:xfrm>
+          <a:prstGeom prst="rect">
+            <a:avLst/>
+          </a:prstGeom>
+          <a:noFill/>
+        </p:spPr>
+        <p:txBody>
+          <a:bodyPr wrap="square" anchor="t" lIns="0" rIns="0" tIns="0" bIns="0">
+            <a:spAutoFit/>
+          </a:bodyPr>
+          <a:lstStyle/>
+          <a:p>
+            <a:pPr algn="r"/>
+            <a:r>
+              <a:rPr sz="1250" b="0" i="0">
+                <a:solidFill>
+                  <a:srgbClr val="5B707B"/>
+                </a:solidFill>
+                <a:latin typeface="Calibri"/>
+              </a:rPr>
+              <a:t>3.0e-3</a:t>
+            </a:r>
+          </a:p>
+        </p:txBody>
+      </p:sp>
+      <p:sp>
+        <p:nvSpPr>
+          <p:cNvPr id="18" name="TextBox 17"/>
+          <p:cNvSpPr txBox="1"/>
+          <p:nvPr/>
+        </p:nvSpPr>
+        <p:spPr>
+          <a:xfrm>
+            <a:off x="1097280" y="4242816"/>
+            <a:ext cx="3017520" cy="365760"/>
+          </a:xfrm>
+          <a:prstGeom prst="rect">
+            <a:avLst/>
+          </a:prstGeom>
+          <a:noFill/>
+        </p:spPr>
+        <p:txBody>
+          <a:bodyPr wrap="square" anchor="t" lIns="0" rIns="0" tIns="0" bIns="0">
+            <a:spAutoFit/>
+          </a:bodyPr>
+          <a:lstStyle/>
+          <a:p>
+            <a:pPr algn="l"/>
+            <a:r>
+              <a:rPr sz="1250" b="1" i="0">
+                <a:solidFill>
+                  <a:srgbClr val="1A2B35"/>
+                </a:solidFill>
+                <a:latin typeface="Calibri"/>
+              </a:rPr>
+              <a:t>Calcium ion transport</a:t>
+            </a:r>
+          </a:p>
+        </p:txBody>
+      </p:sp>
+      <p:sp>
+        <p:nvSpPr>
+          <p:cNvPr id="19" name="TextBox 18"/>
+          <p:cNvSpPr txBox="1"/>
+          <p:nvPr/>
+        </p:nvSpPr>
+        <p:spPr>
+          <a:xfrm>
+            <a:off x="4160520" y="4242816"/>
+            <a:ext cx="731520" cy="365760"/>
+          </a:xfrm>
+          <a:prstGeom prst="rect">
+            <a:avLst/>
+          </a:prstGeom>
+          <a:noFill/>
+        </p:spPr>
+        <p:txBody>
+          <a:bodyPr wrap="square" anchor="t" lIns="0" rIns="0" tIns="0" bIns="0">
+            <a:spAutoFit/>
+          </a:bodyPr>
+          <a:lstStyle/>
+          <a:p>
+            <a:pPr algn="r"/>
+            <a:r>
+              <a:rPr sz="1250" b="0" i="0">
+                <a:solidFill>
+                  <a:srgbClr val="1A2B35"/>
+                </a:solidFill>
+                <a:latin typeface="Calibri"/>
+              </a:rPr>
+              <a:t>3.0</a:t>
+            </a:r>
+          </a:p>
+        </p:txBody>
+      </p:sp>
+      <p:sp>
+        <p:nvSpPr>
+          <p:cNvPr id="20" name="TextBox 19"/>
+          <p:cNvSpPr txBox="1"/>
+          <p:nvPr/>
+        </p:nvSpPr>
+        <p:spPr>
+          <a:xfrm>
+            <a:off x="4892040" y="4242816"/>
+            <a:ext cx="868680" cy="365760"/>
+          </a:xfrm>
+          <a:prstGeom prst="rect">
+            <a:avLst/>
+          </a:prstGeom>
+          <a:noFill/>
+        </p:spPr>
+        <p:txBody>
+          <a:bodyPr wrap="square" anchor="t" lIns="0" rIns="0" tIns="0" bIns="0">
+            <a:spAutoFit/>
+          </a:bodyPr>
+          <a:lstStyle/>
+          <a:p>
+            <a:pPr algn="r"/>
+            <a:r>
+              <a:rPr sz="1250" b="0" i="0">
+                <a:solidFill>
+                  <a:srgbClr val="1A2B35"/>
+                </a:solidFill>
+                <a:latin typeface="Calibri"/>
+              </a:rPr>
+              <a:t>3.0e-3</a:t>
+            </a:r>
+          </a:p>
+        </p:txBody>
+      </p:sp>
+      <p:sp>
+        <p:nvSpPr>
+          <p:cNvPr id="21" name="TextBox 20"/>
+          <p:cNvSpPr txBox="1"/>
+          <p:nvPr/>
+        </p:nvSpPr>
+        <p:spPr>
+          <a:xfrm>
+            <a:off x="1097280" y="4681728"/>
+            <a:ext cx="3017520" cy="365760"/>
+          </a:xfrm>
+          <a:prstGeom prst="rect">
+            <a:avLst/>
+          </a:prstGeom>
+          <a:noFill/>
+        </p:spPr>
+        <p:txBody>
+          <a:bodyPr wrap="square" anchor="t" lIns="0" rIns="0" tIns="0" bIns="0">
+            <a:spAutoFit/>
+          </a:bodyPr>
+          <a:lstStyle/>
+          <a:p>
+            <a:pPr algn="l"/>
+            <a:r>
+              <a:rPr sz="1250" b="0" i="0">
+                <a:solidFill>
+                  <a:srgbClr val="5B707B"/>
+                </a:solidFill>
+                <a:latin typeface="Calibri"/>
+              </a:rPr>
+              <a:t>Lipid / phospholipid binding</a:t>
+            </a:r>
+          </a:p>
+        </p:txBody>
+      </p:sp>
+      <p:sp>
+        <p:nvSpPr>
+          <p:cNvPr id="22" name="TextBox 21"/>
+          <p:cNvSpPr txBox="1"/>
+          <p:nvPr/>
+        </p:nvSpPr>
+        <p:spPr>
+          <a:xfrm>
+            <a:off x="4160520" y="4681728"/>
+            <a:ext cx="731520" cy="365760"/>
+          </a:xfrm>
+          <a:prstGeom prst="rect">
+            <a:avLst/>
+          </a:prstGeom>
+          <a:noFill/>
+        </p:spPr>
+        <p:txBody>
+          <a:bodyPr wrap="square" anchor="t" lIns="0" rIns="0" tIns="0" bIns="0">
+            <a:spAutoFit/>
+          </a:bodyPr>
+          <a:lstStyle/>
+          <a:p>
+            <a:pPr algn="r"/>
+            <a:r>
+              <a:rPr sz="1250" b="0" i="0">
+                <a:solidFill>
+                  <a:srgbClr val="5B707B"/>
+                </a:solidFill>
+                <a:latin typeface="Calibri"/>
+              </a:rPr>
+              <a:t>1.5</a:t>
+            </a:r>
+          </a:p>
+        </p:txBody>
+      </p:sp>
+      <p:sp>
+        <p:nvSpPr>
+          <p:cNvPr id="23" name="TextBox 22"/>
+          <p:cNvSpPr txBox="1"/>
+          <p:nvPr/>
+        </p:nvSpPr>
+        <p:spPr>
+          <a:xfrm>
+            <a:off x="4892040" y="4681728"/>
+            <a:ext cx="868680" cy="365760"/>
+          </a:xfrm>
+          <a:prstGeom prst="rect">
+            <a:avLst/>
+          </a:prstGeom>
+          <a:noFill/>
+        </p:spPr>
+        <p:txBody>
+          <a:bodyPr wrap="square" anchor="t" lIns="0" rIns="0" tIns="0" bIns="0">
+            <a:spAutoFit/>
+          </a:bodyPr>
+          <a:lstStyle/>
+          <a:p>
+            <a:pPr algn="r"/>
+            <a:r>
+              <a:rPr sz="1250" b="0" i="0">
+                <a:solidFill>
+                  <a:srgbClr val="5B707B"/>
+                </a:solidFill>
+                <a:latin typeface="Calibri"/>
+              </a:rPr>
+              <a:t>ns</a:t>
+            </a:r>
+          </a:p>
+        </p:txBody>
+      </p:sp>
+      <p:sp>
+        <p:nvSpPr>
+          <p:cNvPr id="24" name="TextBox 23"/>
+          <p:cNvSpPr txBox="1"/>
+          <p:nvPr/>
+        </p:nvSpPr>
+        <p:spPr>
+          <a:xfrm>
+            <a:off x="1097280" y="5166360"/>
+            <a:ext cx="4572000" cy="411480"/>
+          </a:xfrm>
+          <a:prstGeom prst="rect">
+            <a:avLst/>
+          </a:prstGeom>
+          <a:noFill/>
+        </p:spPr>
+        <p:txBody>
+          <a:bodyPr wrap="square" anchor="t" lIns="0" rIns="0" tIns="0" bIns="0">
+            <a:spAutoFit/>
+          </a:bodyPr>
+          <a:lstStyle/>
+          <a:p>
+            <a:pPr algn="l"/>
+            <a:r>
+              <a:rPr sz="1050" b="0" i="1">
+                <a:solidFill>
+                  <a:srgbClr val="5B707B"/>
+                </a:solidFill>
+                <a:latin typeface="Calibri"/>
+              </a:rPr>
+              <a:t>Calcium transport = most defensible; carries a gene-length caveat. DMR set is a tandem-cluster artifact.</a:t>
+            </a:r>
+          </a:p>
+        </p:txBody>
+      </p:sp>
+      <p:sp>
+        <p:nvSpPr>
+          <p:cNvPr id="25" name="TextBox 24"/>
+          <p:cNvSpPr txBox="1"/>
+          <p:nvPr/>
+        </p:nvSpPr>
+        <p:spPr>
+          <a:xfrm>
+            <a:off x="6172200" y="1920240"/>
+            <a:ext cx="5120640" cy="320040"/>
+          </a:xfrm>
+          <a:prstGeom prst="rect">
+            <a:avLst/>
+          </a:prstGeom>
+          <a:noFill/>
+        </p:spPr>
+        <p:txBody>
+          <a:bodyPr wrap="square" anchor="t" lIns="0" rIns="0" tIns="0" bIns="0">
+            <a:spAutoFit/>
+          </a:bodyPr>
+          <a:lstStyle/>
+          <a:p>
+            <a:pPr algn="l"/>
+            <a:r>
+              <a:rPr sz="1200" b="1" i="0" spc="120">
+                <a:solidFill>
+                  <a:srgbClr val="C97B2E"/>
+                </a:solidFill>
+                <a:latin typeface="Calibri"/>
+              </a:rPr>
+              <a:t>HYPOTHESIZED PHENOTYPE AXES</a:t>
+            </a:r>
+          </a:p>
+        </p:txBody>
+      </p:sp>
+      <p:sp>
+        <p:nvSpPr>
+          <p:cNvPr id="26" name="Rounded Rectangle 25"/>
           <p:cNvSpPr/>
           <p:nvPr/>
         </p:nvSpPr>
         <p:spPr>
           <a:xfrm>
-            <a:off x="822960" y="1965960"/>
-            <a:ext cx="128016" cy="1325880"/>
-          </a:xfrm>
-          <a:prstGeom prst="rect">
-            <a:avLst/>
-          </a:prstGeom>
-          <a:solidFill>
-            <a:srgbClr val="065A82"/>
-          </a:solidFill>
-          <a:ln>
-            <a:noFill/>
-          </a:ln>
-          <a:effectLst/>
-        </p:spPr>
-        <p:style>
-          <a:lnRef idx="1">
-            <a:schemeClr val="accent1"/>
-          </a:lnRef>
-          <a:fillRef idx="3">
-            <a:schemeClr val="accent1"/>
-          </a:fillRef>
-          <a:effectRef idx="2">
-            <a:schemeClr val="accent1"/>
-          </a:effectRef>
-          <a:fontRef idx="minor">
-            <a:schemeClr val="lt1"/>
-          </a:fontRef>
-        </p:style>
-        <p:txBody>
-          <a:bodyPr rtlCol="0" anchor="ctr"/>
-          <a:lstStyle/>
-          <a:p>
-            <a:pPr algn="ctr"/>
-          </a:p>
-        </p:txBody>
-      </p:sp>
-      <p:sp>
-        <p:nvSpPr>
-          <p:cNvPr id="6" name="Oval 5"/>
-          <p:cNvSpPr/>
-          <p:nvPr/>
-        </p:nvSpPr>
-        <p:spPr>
-          <a:xfrm>
-            <a:off x="1143000" y="2258568"/>
-            <a:ext cx="731520" cy="731520"/>
-          </a:xfrm>
-          <a:prstGeom prst="ellipse">
-            <a:avLst/>
-          </a:prstGeom>
-          <a:solidFill>
-            <a:srgbClr val="065A82"/>
-          </a:solidFill>
-          <a:ln>
-            <a:noFill/>
-          </a:ln>
-          <a:effectLst/>
-        </p:spPr>
-        <p:style>
-          <a:lnRef idx="1">
-            <a:schemeClr val="accent1"/>
-          </a:lnRef>
-          <a:fillRef idx="3">
-            <a:schemeClr val="accent1"/>
-          </a:fillRef>
-          <a:effectRef idx="2">
-            <a:schemeClr val="accent1"/>
-          </a:effectRef>
-          <a:fontRef idx="minor">
-            <a:schemeClr val="lt1"/>
-          </a:fontRef>
-        </p:style>
-        <p:txBody>
-          <a:bodyPr rtlCol="0" anchor="ctr"/>
-          <a:lstStyle/>
-          <a:p>
-            <a:pPr algn="ctr"/>
-          </a:p>
-        </p:txBody>
-      </p:sp>
-      <p:sp>
-        <p:nvSpPr>
-          <p:cNvPr id="7" name="TextBox 6"/>
-          <p:cNvSpPr txBox="1"/>
-          <p:nvPr/>
-        </p:nvSpPr>
-        <p:spPr>
-          <a:xfrm>
-            <a:off x="1143000" y="2331720"/>
-            <a:ext cx="731520" cy="548640"/>
-          </a:xfrm>
-          <a:prstGeom prst="rect">
-            <a:avLst/>
-          </a:prstGeom>
-          <a:noFill/>
-        </p:spPr>
-        <p:txBody>
-          <a:bodyPr wrap="square" anchor="t" lIns="0" rIns="0" tIns="0" bIns="0">
-            <a:spAutoFit/>
-          </a:bodyPr>
-          <a:lstStyle/>
-          <a:p>
-            <a:pPr algn="ctr"/>
-            <a:r>
-              <a:rPr sz="2600" b="1" i="0">
-                <a:solidFill>
-                  <a:srgbClr val="FFFFFF"/>
-                </a:solidFill>
-                <a:latin typeface="Georgia"/>
-              </a:rPr>
-              <a:t>1</a:t>
-            </a:r>
-          </a:p>
-        </p:txBody>
-      </p:sp>
-      <p:sp>
-        <p:nvSpPr>
-          <p:cNvPr id="8" name="TextBox 7"/>
-          <p:cNvSpPr txBox="1"/>
-          <p:nvPr/>
-        </p:nvSpPr>
-        <p:spPr>
-          <a:xfrm>
-            <a:off x="2194560" y="2167128"/>
-            <a:ext cx="8778240" cy="457200"/>
-          </a:xfrm>
-          <a:prstGeom prst="rect">
-            <a:avLst/>
-          </a:prstGeom>
-          <a:noFill/>
-        </p:spPr>
-        <p:txBody>
-          <a:bodyPr wrap="square" anchor="t" lIns="0" rIns="0" tIns="0" bIns="0">
-            <a:spAutoFit/>
-          </a:bodyPr>
-          <a:lstStyle/>
-          <a:p>
-            <a:pPr algn="l"/>
-            <a:r>
-              <a:rPr sz="1900" b="1" i="0">
-                <a:solidFill>
-                  <a:srgbClr val="1A2B35"/>
-                </a:solidFill>
-                <a:latin typeface="Georgia"/>
-              </a:rPr>
-              <a:t>Ecotype divergence is written at two levels</a:t>
-            </a:r>
-          </a:p>
-        </p:txBody>
-      </p:sp>
-      <p:sp>
-        <p:nvSpPr>
-          <p:cNvPr id="9" name="TextBox 8"/>
-          <p:cNvSpPr txBox="1"/>
-          <p:nvPr/>
-        </p:nvSpPr>
-        <p:spPr>
-          <a:xfrm>
-            <a:off x="2194560" y="2679191"/>
-            <a:ext cx="8778240" cy="502920"/>
-          </a:xfrm>
-          <a:prstGeom prst="rect">
-            <a:avLst/>
-          </a:prstGeom>
-          <a:noFill/>
-        </p:spPr>
-        <p:txBody>
-          <a:bodyPr wrap="square" anchor="t" lIns="0" rIns="0" tIns="0" bIns="0">
-            <a:spAutoFit/>
-          </a:bodyPr>
-          <a:lstStyle/>
-          <a:p>
-            <a:pPr algn="l"/>
-            <a:r>
-              <a:rPr sz="1450" b="0" i="0">
-                <a:solidFill>
-                  <a:srgbClr val="5B707B"/>
-                </a:solidFill>
-                <a:latin typeface="Calibri"/>
-              </a:rPr>
-              <a:t>Structural (what genes exist) and epigenetic (how they're used) — not either/or.</a:t>
-            </a:r>
-          </a:p>
-        </p:txBody>
-      </p:sp>
-      <p:sp>
-        <p:nvSpPr>
-          <p:cNvPr id="10" name="Rounded Rectangle 9"/>
-          <p:cNvSpPr/>
-          <p:nvPr/>
-        </p:nvSpPr>
-        <p:spPr>
-          <a:xfrm>
-            <a:off x="822960" y="3456432"/>
-            <a:ext cx="10515600" cy="1325880"/>
+            <a:off x="6172200" y="2286000"/>
+            <a:ext cx="5166360" cy="841248"/>
           </a:xfrm>
           <a:prstGeom prst="roundRect">
             <a:avLst/>
@@ -5294,14 +7152,14 @@
       </p:sp>
       <p:sp>
         <p:nvSpPr>
-          <p:cNvPr id="11" name="Rectangle 10"/>
+          <p:cNvPr id="27" name="Rectangle 26"/>
           <p:cNvSpPr/>
           <p:nvPr/>
         </p:nvSpPr>
         <p:spPr>
           <a:xfrm>
-            <a:off x="822960" y="3456432"/>
-            <a:ext cx="128016" cy="1325880"/>
+            <a:off x="6172200" y="2286000"/>
+            <a:ext cx="91440" cy="841248"/>
           </a:xfrm>
           <a:prstGeom prst="rect">
             <a:avLst/>
@@ -5338,163 +7196,119 @@
       </p:sp>
       <p:sp>
         <p:nvSpPr>
-          <p:cNvPr id="12" name="Oval 11"/>
+          <p:cNvPr id="28" name="TextBox 27"/>
+          <p:cNvSpPr txBox="1"/>
+          <p:nvPr/>
+        </p:nvSpPr>
+        <p:spPr>
+          <a:xfrm>
+            <a:off x="6428232" y="2404872"/>
+            <a:ext cx="548640" cy="548640"/>
+          </a:xfrm>
+          <a:prstGeom prst="rect">
+            <a:avLst/>
+          </a:prstGeom>
+          <a:noFill/>
+        </p:spPr>
+        <p:txBody>
+          <a:bodyPr wrap="square" anchor="t" lIns="0" rIns="0" tIns="0" bIns="0">
+            <a:spAutoFit/>
+          </a:bodyPr>
+          <a:lstStyle/>
+          <a:p>
+            <a:pPr algn="l"/>
+            <a:r>
+              <a:rPr sz="2000" b="0" i="0">
+                <a:solidFill>
+                  <a:srgbClr val="1A2B35"/>
+                </a:solidFill>
+                <a:latin typeface="Calibri"/>
+              </a:rPr>
+              <a:t>🫧</a:t>
+            </a:r>
+          </a:p>
+        </p:txBody>
+      </p:sp>
+      <p:sp>
+        <p:nvSpPr>
+          <p:cNvPr id="29" name="TextBox 28"/>
+          <p:cNvSpPr txBox="1"/>
+          <p:nvPr/>
+        </p:nvSpPr>
+        <p:spPr>
+          <a:xfrm>
+            <a:off x="7013448" y="2377440"/>
+            <a:ext cx="4251960" cy="365760"/>
+          </a:xfrm>
+          <a:prstGeom prst="rect">
+            <a:avLst/>
+          </a:prstGeom>
+          <a:noFill/>
+        </p:spPr>
+        <p:txBody>
+          <a:bodyPr wrap="square" anchor="t" lIns="0" rIns="0" tIns="0" bIns="0">
+            <a:spAutoFit/>
+          </a:bodyPr>
+          <a:lstStyle/>
+          <a:p>
+            <a:pPr algn="l"/>
+            <a:r>
+              <a:rPr sz="1400" b="1" i="0">
+                <a:solidFill>
+                  <a:srgbClr val="1A2B35"/>
+                </a:solidFill>
+                <a:latin typeface="Georgia"/>
+              </a:rPr>
+              <a:t>Lipid &amp; energy storage</a:t>
+            </a:r>
+          </a:p>
+        </p:txBody>
+      </p:sp>
+      <p:sp>
+        <p:nvSpPr>
+          <p:cNvPr id="30" name="TextBox 29"/>
+          <p:cNvSpPr txBox="1"/>
+          <p:nvPr/>
+        </p:nvSpPr>
+        <p:spPr>
+          <a:xfrm>
+            <a:off x="7013448" y="2715768"/>
+            <a:ext cx="4251960" cy="365760"/>
+          </a:xfrm>
+          <a:prstGeom prst="rect">
+            <a:avLst/>
+          </a:prstGeom>
+          <a:noFill/>
+        </p:spPr>
+        <p:txBody>
+          <a:bodyPr wrap="square" anchor="t" lIns="0" rIns="0" tIns="0" bIns="0">
+            <a:spAutoFit/>
+          </a:bodyPr>
+          <a:lstStyle/>
+          <a:p>
+            <a:pPr algn="l"/>
+            <a:r>
+              <a:rPr sz="1100" b="0" i="0">
+                <a:solidFill>
+                  <a:srgbClr val="5B707B"/>
+                </a:solidFill>
+                <a:latin typeface="Calibri"/>
+              </a:rPr>
+              <a:t>angptl5, mogat2, ephx1 — high-lipid siscowet / buoyancy</a:t>
+            </a:r>
+          </a:p>
+        </p:txBody>
+      </p:sp>
+      <p:sp>
+        <p:nvSpPr>
+          <p:cNvPr id="31" name="Rounded Rectangle 30"/>
           <p:cNvSpPr/>
           <p:nvPr/>
         </p:nvSpPr>
         <p:spPr>
           <a:xfrm>
-            <a:off x="1143000" y="3749039"/>
-            <a:ext cx="731520" cy="731520"/>
-          </a:xfrm>
-          <a:prstGeom prst="ellipse">
-            <a:avLst/>
-          </a:prstGeom>
-          <a:solidFill>
-            <a:srgbClr val="E9964E"/>
-          </a:solidFill>
-          <a:ln>
-            <a:noFill/>
-          </a:ln>
-          <a:effectLst/>
-        </p:spPr>
-        <p:style>
-          <a:lnRef idx="1">
-            <a:schemeClr val="accent1"/>
-          </a:lnRef>
-          <a:fillRef idx="3">
-            <a:schemeClr val="accent1"/>
-          </a:fillRef>
-          <a:effectRef idx="2">
-            <a:schemeClr val="accent1"/>
-          </a:effectRef>
-          <a:fontRef idx="minor">
-            <a:schemeClr val="lt1"/>
-          </a:fontRef>
-        </p:style>
-        <p:txBody>
-          <a:bodyPr rtlCol="0" anchor="ctr"/>
-          <a:lstStyle/>
-          <a:p>
-            <a:pPr algn="ctr"/>
-          </a:p>
-        </p:txBody>
-      </p:sp>
-      <p:sp>
-        <p:nvSpPr>
-          <p:cNvPr id="13" name="TextBox 12"/>
-          <p:cNvSpPr txBox="1"/>
-          <p:nvPr/>
-        </p:nvSpPr>
-        <p:spPr>
-          <a:xfrm>
-            <a:off x="1143000" y="3822191"/>
-            <a:ext cx="731520" cy="548640"/>
-          </a:xfrm>
-          <a:prstGeom prst="rect">
-            <a:avLst/>
-          </a:prstGeom>
-          <a:noFill/>
-        </p:spPr>
-        <p:txBody>
-          <a:bodyPr wrap="square" anchor="t" lIns="0" rIns="0" tIns="0" bIns="0">
-            <a:spAutoFit/>
-          </a:bodyPr>
-          <a:lstStyle/>
-          <a:p>
-            <a:pPr algn="ctr"/>
-            <a:r>
-              <a:rPr sz="2600" b="1" i="0">
-                <a:solidFill>
-                  <a:srgbClr val="FFFFFF"/>
-                </a:solidFill>
-                <a:latin typeface="Georgia"/>
-              </a:rPr>
-              <a:t>2</a:t>
-            </a:r>
-          </a:p>
-        </p:txBody>
-      </p:sp>
-      <p:sp>
-        <p:nvSpPr>
-          <p:cNvPr id="14" name="TextBox 13"/>
-          <p:cNvSpPr txBox="1"/>
-          <p:nvPr/>
-        </p:nvSpPr>
-        <p:spPr>
-          <a:xfrm>
-            <a:off x="2194560" y="3657600"/>
-            <a:ext cx="8778240" cy="457200"/>
-          </a:xfrm>
-          <a:prstGeom prst="rect">
-            <a:avLst/>
-          </a:prstGeom>
-          <a:noFill/>
-        </p:spPr>
-        <p:txBody>
-          <a:bodyPr wrap="square" anchor="t" lIns="0" rIns="0" tIns="0" bIns="0">
-            <a:spAutoFit/>
-          </a:bodyPr>
-          <a:lstStyle/>
-          <a:p>
-            <a:pPr algn="l"/>
-            <a:r>
-              <a:rPr sz="1900" b="1" i="0">
-                <a:solidFill>
-                  <a:srgbClr val="1A2B35"/>
-                </a:solidFill>
-                <a:latin typeface="Georgia"/>
-              </a:rPr>
-              <a:t>Both signals point the same way</a:t>
-            </a:r>
-          </a:p>
-        </p:txBody>
-      </p:sp>
-      <p:sp>
-        <p:nvSpPr>
-          <p:cNvPr id="15" name="TextBox 14"/>
-          <p:cNvSpPr txBox="1"/>
-          <p:nvPr/>
-        </p:nvSpPr>
-        <p:spPr>
-          <a:xfrm>
-            <a:off x="2194560" y="4169663"/>
-            <a:ext cx="8778240" cy="502920"/>
-          </a:xfrm>
-          <a:prstGeom prst="rect">
-            <a:avLst/>
-          </a:prstGeom>
-          <a:noFill/>
-        </p:spPr>
-        <p:txBody>
-          <a:bodyPr wrap="square" anchor="t" lIns="0" rIns="0" tIns="0" bIns="0">
-            <a:spAutoFit/>
-          </a:bodyPr>
-          <a:lstStyle/>
-          <a:p>
-            <a:pPr algn="l"/>
-            <a:r>
-              <a:rPr sz="1450" b="0" i="0">
-                <a:solidFill>
-                  <a:srgbClr val="5B707B"/>
-                </a:solidFill>
-                <a:latin typeface="Calibri"/>
-              </a:rPr>
-              <a:t>Siscowet shows ~34% more ecotype-specific PAV and 282/302 DMRs hypomethylated.</a:t>
-            </a:r>
-          </a:p>
-        </p:txBody>
-      </p:sp>
-      <p:sp>
-        <p:nvSpPr>
-          <p:cNvPr id="16" name="Rounded Rectangle 15"/>
-          <p:cNvSpPr/>
-          <p:nvPr/>
-        </p:nvSpPr>
-        <p:spPr>
-          <a:xfrm>
-            <a:off x="822960" y="4946904"/>
-            <a:ext cx="10515600" cy="1325880"/>
+            <a:off x="6172200" y="3200400"/>
+            <a:ext cx="5166360" cy="841248"/>
           </a:xfrm>
           <a:prstGeom prst="roundRect">
             <a:avLst/>
@@ -5538,14 +7352,414 @@
       </p:sp>
       <p:sp>
         <p:nvSpPr>
-          <p:cNvPr id="17" name="Rectangle 16"/>
+          <p:cNvPr id="32" name="Rectangle 31"/>
           <p:cNvSpPr/>
           <p:nvPr/>
         </p:nvSpPr>
         <p:spPr>
           <a:xfrm>
-            <a:off x="822960" y="4946904"/>
-            <a:ext cx="128016" cy="1325880"/>
+            <a:off x="6172200" y="3200400"/>
+            <a:ext cx="91440" cy="841248"/>
+          </a:xfrm>
+          <a:prstGeom prst="rect">
+            <a:avLst/>
+          </a:prstGeom>
+          <a:solidFill>
+            <a:srgbClr val="1C7293"/>
+          </a:solidFill>
+          <a:ln>
+            <a:noFill/>
+          </a:ln>
+          <a:effectLst/>
+        </p:spPr>
+        <p:style>
+          <a:lnRef idx="1">
+            <a:schemeClr val="accent1"/>
+          </a:lnRef>
+          <a:fillRef idx="3">
+            <a:schemeClr val="accent1"/>
+          </a:fillRef>
+          <a:effectRef idx="2">
+            <a:schemeClr val="accent1"/>
+          </a:effectRef>
+          <a:fontRef idx="minor">
+            <a:schemeClr val="lt1"/>
+          </a:fontRef>
+        </p:style>
+        <p:txBody>
+          <a:bodyPr rtlCol="0" anchor="ctr"/>
+          <a:lstStyle/>
+          <a:p>
+            <a:pPr algn="ctr"/>
+          </a:p>
+        </p:txBody>
+      </p:sp>
+      <p:sp>
+        <p:nvSpPr>
+          <p:cNvPr id="33" name="TextBox 32"/>
+          <p:cNvSpPr txBox="1"/>
+          <p:nvPr/>
+        </p:nvSpPr>
+        <p:spPr>
+          <a:xfrm>
+            <a:off x="6428232" y="3319272"/>
+            <a:ext cx="548640" cy="548640"/>
+          </a:xfrm>
+          <a:prstGeom prst="rect">
+            <a:avLst/>
+          </a:prstGeom>
+          <a:noFill/>
+        </p:spPr>
+        <p:txBody>
+          <a:bodyPr wrap="square" anchor="t" lIns="0" rIns="0" tIns="0" bIns="0">
+            <a:spAutoFit/>
+          </a:bodyPr>
+          <a:lstStyle/>
+          <a:p>
+            <a:pPr algn="l"/>
+            <a:r>
+              <a:rPr sz="2000" b="0" i="0">
+                <a:solidFill>
+                  <a:srgbClr val="1A2B35"/>
+                </a:solidFill>
+                <a:latin typeface="Calibri"/>
+              </a:rPr>
+              <a:t>🐠</a:t>
+            </a:r>
+          </a:p>
+        </p:txBody>
+      </p:sp>
+      <p:sp>
+        <p:nvSpPr>
+          <p:cNvPr id="34" name="TextBox 33"/>
+          <p:cNvSpPr txBox="1"/>
+          <p:nvPr/>
+        </p:nvSpPr>
+        <p:spPr>
+          <a:xfrm>
+            <a:off x="7013448" y="3291840"/>
+            <a:ext cx="4251960" cy="365760"/>
+          </a:xfrm>
+          <a:prstGeom prst="rect">
+            <a:avLst/>
+          </a:prstGeom>
+          <a:noFill/>
+        </p:spPr>
+        <p:txBody>
+          <a:bodyPr wrap="square" anchor="t" lIns="0" rIns="0" tIns="0" bIns="0">
+            <a:spAutoFit/>
+          </a:bodyPr>
+          <a:lstStyle/>
+          <a:p>
+            <a:pPr algn="l"/>
+            <a:r>
+              <a:rPr sz="1400" b="1" i="0">
+                <a:solidFill>
+                  <a:srgbClr val="1A2B35"/>
+                </a:solidFill>
+                <a:latin typeface="Georgia"/>
+              </a:rPr>
+              <a:t>Body shape, growth &amp; muscle</a:t>
+            </a:r>
+          </a:p>
+        </p:txBody>
+      </p:sp>
+      <p:sp>
+        <p:nvSpPr>
+          <p:cNvPr id="35" name="TextBox 34"/>
+          <p:cNvSpPr txBox="1"/>
+          <p:nvPr/>
+        </p:nvSpPr>
+        <p:spPr>
+          <a:xfrm>
+            <a:off x="7013448" y="3630168"/>
+            <a:ext cx="4251960" cy="365760"/>
+          </a:xfrm>
+          <a:prstGeom prst="rect">
+            <a:avLst/>
+          </a:prstGeom>
+          <a:noFill/>
+        </p:spPr>
+        <p:txBody>
+          <a:bodyPr wrap="square" anchor="t" lIns="0" rIns="0" tIns="0" bIns="0">
+            <a:spAutoFit/>
+          </a:bodyPr>
+          <a:lstStyle/>
+          <a:p>
+            <a:pPr algn="l"/>
+            <a:r>
+              <a:rPr sz="1100" b="0" i="0">
+                <a:solidFill>
+                  <a:srgbClr val="5B707B"/>
+                </a:solidFill>
+                <a:latin typeface="Calibri"/>
+              </a:rPr>
+              <a:t>rbm24b + growth GO — elongate-lean vs. robust-siscowet</a:t>
+            </a:r>
+          </a:p>
+        </p:txBody>
+      </p:sp>
+      <p:sp>
+        <p:nvSpPr>
+          <p:cNvPr id="36" name="Rounded Rectangle 35"/>
+          <p:cNvSpPr/>
+          <p:nvPr/>
+        </p:nvSpPr>
+        <p:spPr>
+          <a:xfrm>
+            <a:off x="6172200" y="4114800"/>
+            <a:ext cx="5166360" cy="841248"/>
+          </a:xfrm>
+          <a:prstGeom prst="roundRect">
+            <a:avLst/>
+          </a:prstGeom>
+          <a:solidFill>
+            <a:srgbClr val="FFFFFF"/>
+          </a:solidFill>
+          <a:ln>
+            <a:noFill/>
+          </a:ln>
+          <a:effectLst/>
+          <a:effectLst>
+            <a:outerShdw blurRad="60000" dist="25000" dir="5400000" rotWithShape="0">
+              <a:srgbClr val="0A2230">
+                <a:alpha val="28000"/>
+              </a:srgbClr>
+            </a:outerShdw>
+          </a:effectLst>
+        </p:spPr>
+        <p:style>
+          <a:lnRef idx="1">
+            <a:schemeClr val="accent1"/>
+          </a:lnRef>
+          <a:fillRef idx="3">
+            <a:schemeClr val="accent1"/>
+          </a:fillRef>
+          <a:effectRef idx="2">
+            <a:schemeClr val="accent1"/>
+          </a:effectRef>
+          <a:fontRef idx="minor">
+            <a:schemeClr val="lt1"/>
+          </a:fontRef>
+        </p:style>
+        <p:txBody>
+          <a:bodyPr rtlCol="0" anchor="ctr"/>
+          <a:lstStyle/>
+          <a:p>
+            <a:pPr algn="ctr"/>
+          </a:p>
+        </p:txBody>
+      </p:sp>
+      <p:sp>
+        <p:nvSpPr>
+          <p:cNvPr id="37" name="Rectangle 36"/>
+          <p:cNvSpPr/>
+          <p:nvPr/>
+        </p:nvSpPr>
+        <p:spPr>
+          <a:xfrm>
+            <a:off x="6172200" y="4114800"/>
+            <a:ext cx="91440" cy="841248"/>
+          </a:xfrm>
+          <a:prstGeom prst="rect">
+            <a:avLst/>
+          </a:prstGeom>
+          <a:solidFill>
+            <a:srgbClr val="065A82"/>
+          </a:solidFill>
+          <a:ln>
+            <a:noFill/>
+          </a:ln>
+          <a:effectLst/>
+        </p:spPr>
+        <p:style>
+          <a:lnRef idx="1">
+            <a:schemeClr val="accent1"/>
+          </a:lnRef>
+          <a:fillRef idx="3">
+            <a:schemeClr val="accent1"/>
+          </a:fillRef>
+          <a:effectRef idx="2">
+            <a:schemeClr val="accent1"/>
+          </a:effectRef>
+          <a:fontRef idx="minor">
+            <a:schemeClr val="lt1"/>
+          </a:fontRef>
+        </p:style>
+        <p:txBody>
+          <a:bodyPr rtlCol="0" anchor="ctr"/>
+          <a:lstStyle/>
+          <a:p>
+            <a:pPr algn="ctr"/>
+          </a:p>
+        </p:txBody>
+      </p:sp>
+      <p:sp>
+        <p:nvSpPr>
+          <p:cNvPr id="38" name="TextBox 37"/>
+          <p:cNvSpPr txBox="1"/>
+          <p:nvPr/>
+        </p:nvSpPr>
+        <p:spPr>
+          <a:xfrm>
+            <a:off x="6428232" y="4233672"/>
+            <a:ext cx="548640" cy="548640"/>
+          </a:xfrm>
+          <a:prstGeom prst="rect">
+            <a:avLst/>
+          </a:prstGeom>
+          <a:noFill/>
+        </p:spPr>
+        <p:txBody>
+          <a:bodyPr wrap="square" anchor="t" lIns="0" rIns="0" tIns="0" bIns="0">
+            <a:spAutoFit/>
+          </a:bodyPr>
+          <a:lstStyle/>
+          <a:p>
+            <a:pPr algn="l"/>
+            <a:r>
+              <a:rPr sz="2000" b="0" i="0">
+                <a:solidFill>
+                  <a:srgbClr val="1A2B35"/>
+                </a:solidFill>
+                <a:latin typeface="Calibri"/>
+              </a:rPr>
+              <a:t>⚡</a:t>
+            </a:r>
+          </a:p>
+        </p:txBody>
+      </p:sp>
+      <p:sp>
+        <p:nvSpPr>
+          <p:cNvPr id="39" name="TextBox 38"/>
+          <p:cNvSpPr txBox="1"/>
+          <p:nvPr/>
+        </p:nvSpPr>
+        <p:spPr>
+          <a:xfrm>
+            <a:off x="7013448" y="4206240"/>
+            <a:ext cx="4251960" cy="365760"/>
+          </a:xfrm>
+          <a:prstGeom prst="rect">
+            <a:avLst/>
+          </a:prstGeom>
+          <a:noFill/>
+        </p:spPr>
+        <p:txBody>
+          <a:bodyPr wrap="square" anchor="t" lIns="0" rIns="0" tIns="0" bIns="0">
+            <a:spAutoFit/>
+          </a:bodyPr>
+          <a:lstStyle/>
+          <a:p>
+            <a:pPr algn="l"/>
+            <a:r>
+              <a:rPr sz="1400" b="1" i="0">
+                <a:solidFill>
+                  <a:srgbClr val="1A2B35"/>
+                </a:solidFill>
+                <a:latin typeface="Georgia"/>
+              </a:rPr>
+              <a:t>Calcium / sensory-neural</a:t>
+            </a:r>
+          </a:p>
+        </p:txBody>
+      </p:sp>
+      <p:sp>
+        <p:nvSpPr>
+          <p:cNvPr id="40" name="TextBox 39"/>
+          <p:cNvSpPr txBox="1"/>
+          <p:nvPr/>
+        </p:nvSpPr>
+        <p:spPr>
+          <a:xfrm>
+            <a:off x="7013448" y="4544568"/>
+            <a:ext cx="4251960" cy="365760"/>
+          </a:xfrm>
+          <a:prstGeom prst="rect">
+            <a:avLst/>
+          </a:prstGeom>
+          <a:noFill/>
+        </p:spPr>
+        <p:txBody>
+          <a:bodyPr wrap="square" anchor="t" lIns="0" rIns="0" tIns="0" bIns="0">
+            <a:spAutoFit/>
+          </a:bodyPr>
+          <a:lstStyle/>
+          <a:p>
+            <a:pPr algn="l"/>
+            <a:r>
+              <a:rPr sz="1100" b="0" i="0">
+                <a:solidFill>
+                  <a:srgbClr val="5B707B"/>
+                </a:solidFill>
+                <a:latin typeface="Calibri"/>
+              </a:rPr>
+              <a:t>Ca²⁺ &amp; neuron-projection GO — deep, dark, high-pressure</a:t>
+            </a:r>
+          </a:p>
+        </p:txBody>
+      </p:sp>
+      <p:sp>
+        <p:nvSpPr>
+          <p:cNvPr id="41" name="Rounded Rectangle 40"/>
+          <p:cNvSpPr/>
+          <p:nvPr/>
+        </p:nvSpPr>
+        <p:spPr>
+          <a:xfrm>
+            <a:off x="6172200" y="5029200"/>
+            <a:ext cx="5166360" cy="841248"/>
+          </a:xfrm>
+          <a:prstGeom prst="roundRect">
+            <a:avLst/>
+          </a:prstGeom>
+          <a:solidFill>
+            <a:srgbClr val="FFFFFF"/>
+          </a:solidFill>
+          <a:ln>
+            <a:noFill/>
+          </a:ln>
+          <a:effectLst/>
+          <a:effectLst>
+            <a:outerShdw blurRad="60000" dist="25000" dir="5400000" rotWithShape="0">
+              <a:srgbClr val="0A2230">
+                <a:alpha val="28000"/>
+              </a:srgbClr>
+            </a:outerShdw>
+          </a:effectLst>
+        </p:spPr>
+        <p:style>
+          <a:lnRef idx="1">
+            <a:schemeClr val="accent1"/>
+          </a:lnRef>
+          <a:fillRef idx="3">
+            <a:schemeClr val="accent1"/>
+          </a:fillRef>
+          <a:effectRef idx="2">
+            <a:schemeClr val="accent1"/>
+          </a:effectRef>
+          <a:fontRef idx="minor">
+            <a:schemeClr val="lt1"/>
+          </a:fontRef>
+        </p:style>
+        <p:txBody>
+          <a:bodyPr rtlCol="0" anchor="ctr"/>
+          <a:lstStyle/>
+          <a:p>
+            <a:pPr algn="ctr"/>
+          </a:p>
+        </p:txBody>
+      </p:sp>
+      <p:sp>
+        <p:nvSpPr>
+          <p:cNvPr id="42" name="Rectangle 41"/>
+          <p:cNvSpPr/>
+          <p:nvPr/>
+        </p:nvSpPr>
+        <p:spPr>
+          <a:xfrm>
+            <a:off x="6172200" y="5029200"/>
+            <a:ext cx="91440" cy="841248"/>
           </a:xfrm>
           <a:prstGeom prst="rect">
             <a:avLst/>
@@ -5582,93 +7796,84 @@
       </p:sp>
       <p:sp>
         <p:nvSpPr>
-          <p:cNvPr id="18" name="Oval 17"/>
-          <p:cNvSpPr/>
-          <p:nvPr/>
-        </p:nvSpPr>
-        <p:spPr>
-          <a:xfrm>
-            <a:off x="1143000" y="5239512"/>
-            <a:ext cx="731520" cy="731520"/>
-          </a:xfrm>
-          <a:prstGeom prst="ellipse">
-            <a:avLst/>
-          </a:prstGeom>
-          <a:solidFill>
-            <a:srgbClr val="2A9D8F"/>
-          </a:solidFill>
-          <a:ln>
-            <a:noFill/>
-          </a:ln>
-          <a:effectLst/>
-        </p:spPr>
-        <p:style>
-          <a:lnRef idx="1">
-            <a:schemeClr val="accent1"/>
-          </a:lnRef>
-          <a:fillRef idx="3">
-            <a:schemeClr val="accent1"/>
-          </a:fillRef>
-          <a:effectRef idx="2">
-            <a:schemeClr val="accent1"/>
-          </a:effectRef>
-          <a:fontRef idx="minor">
-            <a:schemeClr val="lt1"/>
-          </a:fontRef>
-        </p:style>
-        <p:txBody>
-          <a:bodyPr rtlCol="0" anchor="ctr"/>
-          <a:lstStyle/>
-          <a:p>
-            <a:pPr algn="ctr"/>
-          </a:p>
-        </p:txBody>
-      </p:sp>
-      <p:sp>
-        <p:nvSpPr>
-          <p:cNvPr id="19" name="TextBox 18"/>
-          <p:cNvSpPr txBox="1"/>
-          <p:nvPr/>
-        </p:nvSpPr>
-        <p:spPr>
-          <a:xfrm>
-            <a:off x="1143000" y="5312664"/>
-            <a:ext cx="731520" cy="548640"/>
-          </a:xfrm>
-          <a:prstGeom prst="rect">
-            <a:avLst/>
-          </a:prstGeom>
-          <a:noFill/>
-        </p:spPr>
-        <p:txBody>
-          <a:bodyPr wrap="square" anchor="t" lIns="0" rIns="0" tIns="0" bIns="0">
-            <a:spAutoFit/>
-          </a:bodyPr>
-          <a:lstStyle/>
-          <a:p>
-            <a:pPr algn="ctr"/>
-            <a:r>
-              <a:rPr sz="2600" b="1" i="0">
-                <a:solidFill>
-                  <a:srgbClr val="FFFFFF"/>
+          <p:cNvPr id="43" name="TextBox 42"/>
+          <p:cNvSpPr txBox="1"/>
+          <p:nvPr/>
+        </p:nvSpPr>
+        <p:spPr>
+          <a:xfrm>
+            <a:off x="6428232" y="5148072"/>
+            <a:ext cx="548640" cy="548640"/>
+          </a:xfrm>
+          <a:prstGeom prst="rect">
+            <a:avLst/>
+          </a:prstGeom>
+          <a:noFill/>
+        </p:spPr>
+        <p:txBody>
+          <a:bodyPr wrap="square" anchor="t" lIns="0" rIns="0" tIns="0" bIns="0">
+            <a:spAutoFit/>
+          </a:bodyPr>
+          <a:lstStyle/>
+          <a:p>
+            <a:pPr algn="l"/>
+            <a:r>
+              <a:rPr sz="2000" b="0" i="0">
+                <a:solidFill>
+                  <a:srgbClr val="1A2B35"/>
+                </a:solidFill>
+                <a:latin typeface="Calibri"/>
+              </a:rPr>
+              <a:t>🛡️</a:t>
+            </a:r>
+          </a:p>
+        </p:txBody>
+      </p:sp>
+      <p:sp>
+        <p:nvSpPr>
+          <p:cNvPr id="44" name="TextBox 43"/>
+          <p:cNvSpPr txBox="1"/>
+          <p:nvPr/>
+        </p:nvSpPr>
+        <p:spPr>
+          <a:xfrm>
+            <a:off x="7013448" y="5120640"/>
+            <a:ext cx="4251960" cy="365760"/>
+          </a:xfrm>
+          <a:prstGeom prst="rect">
+            <a:avLst/>
+          </a:prstGeom>
+          <a:noFill/>
+        </p:spPr>
+        <p:txBody>
+          <a:bodyPr wrap="square" anchor="t" lIns="0" rIns="0" tIns="0" bIns="0">
+            <a:spAutoFit/>
+          </a:bodyPr>
+          <a:lstStyle/>
+          <a:p>
+            <a:pPr algn="l"/>
+            <a:r>
+              <a:rPr sz="1400" b="1" i="0">
+                <a:solidFill>
+                  <a:srgbClr val="1A2B35"/>
                 </a:solidFill>
                 <a:latin typeface="Georgia"/>
               </a:rPr>
-              <a:t>3</a:t>
-            </a:r>
-          </a:p>
-        </p:txBody>
-      </p:sp>
-      <p:sp>
-        <p:nvSpPr>
-          <p:cNvPr id="20" name="TextBox 19"/>
-          <p:cNvSpPr txBox="1"/>
-          <p:nvPr/>
-        </p:nvSpPr>
-        <p:spPr>
-          <a:xfrm>
-            <a:off x="2194560" y="5148072"/>
-            <a:ext cx="8778240" cy="457200"/>
+              <a:t>Immune &amp; adhesion</a:t>
+            </a:r>
+          </a:p>
+        </p:txBody>
+      </p:sp>
+      <p:sp>
+        <p:nvSpPr>
+          <p:cNvPr id="45" name="TextBox 44"/>
+          <p:cNvSpPr txBox="1"/>
+          <p:nvPr/>
+        </p:nvSpPr>
+        <p:spPr>
+          <a:xfrm>
+            <a:off x="7013448" y="5458968"/>
+            <a:ext cx="4251960" cy="365760"/>
           </a:xfrm>
           <a:prstGeom prst="rect">
             <a:avLst/>
@@ -5683,55 +7888,20 @@
           <a:p>
             <a:pPr algn="l"/>
             <a:r>
-              <a:rPr sz="1900" b="1" i="0">
-                <a:solidFill>
-                  <a:srgbClr val="1A2B35"/>
-                </a:solidFill>
-                <a:latin typeface="Georgia"/>
-              </a:rPr>
-              <a:t>Integration is the next experiment</a:t>
-            </a:r>
-          </a:p>
-        </p:txBody>
-      </p:sp>
-      <p:sp>
-        <p:nvSpPr>
-          <p:cNvPr id="21" name="TextBox 20"/>
-          <p:cNvSpPr txBox="1"/>
-          <p:nvPr/>
-        </p:nvSpPr>
-        <p:spPr>
-          <a:xfrm>
-            <a:off x="2194560" y="5660136"/>
-            <a:ext cx="8778240" cy="502920"/>
-          </a:xfrm>
-          <a:prstGeom prst="rect">
-            <a:avLst/>
-          </a:prstGeom>
-          <a:noFill/>
-        </p:spPr>
-        <p:txBody>
-          <a:bodyPr wrap="square" anchor="t" lIns="0" rIns="0" tIns="0" bIns="0">
-            <a:spAutoFit/>
-          </a:bodyPr>
-          <a:lstStyle/>
-          <a:p>
-            <a:pPr algn="l"/>
-            <a:r>
-              <a:rPr sz="1450" b="0" i="0">
+              <a:rPr sz="1100" b="0" i="0">
                 <a:solidFill>
                   <a:srgbClr val="5B707B"/>
                 </a:solidFill>
                 <a:latin typeface="Calibri"/>
               </a:rPr>
-              <a:t>Overlap PAV, methylation, and expression to find true causal candidates.</a:t>
-            </a:r>
-          </a:p>
-        </p:txBody>
-      </p:sp>
-      <p:sp>
-        <p:nvSpPr>
-          <p:cNvPr id="22" name="TextBox 21"/>
+              <a:t>a2m, CEACAM, DMBT1 — some real, some reference-divergent</a:t>
+            </a:r>
+          </a:p>
+        </p:txBody>
+      </p:sp>
+      <p:sp>
+        <p:nvSpPr>
+          <p:cNvPr id="46" name="TextBox 45"/>
           <p:cNvSpPr txBox="1"/>
           <p:nvPr/>
         </p:nvSpPr>
@@ -5759,7 +7929,7 @@
                 </a:solidFill>
                 <a:latin typeface="Calibri"/>
               </a:rPr>
-              <a:t>11</a:t>
+              <a:t>12</a:t>
             </a:r>
           </a:p>
         </p:txBody>
@@ -5772,7 +7942,7 @@
 </p:sld>
 </file>
 
-<file path=ppt/slides/slide13.xml><?xml version="1.0" encoding="utf-8"?>
+<file path=ppt/slides/slide14.xml><?xml version="1.0" encoding="utf-8"?>
 <p:sld xmlns:a="http://schemas.openxmlformats.org/drawingml/2006/main" xmlns:p="http://schemas.openxmlformats.org/presentationml/2006/main" xmlns:r="http://schemas.openxmlformats.org/officeDocument/2006/relationships">
   <p:cSld>
     <p:bg>
@@ -5792,16 +7962,86 @@
       <p:grpSpPr/>
       <p:sp>
         <p:nvSpPr>
-          <p:cNvPr id="2" name="Rectangle 1"/>
+          <p:cNvPr id="2" name="TextBox 1"/>
+          <p:cNvSpPr txBox="1"/>
+          <p:nvPr/>
+        </p:nvSpPr>
+        <p:spPr>
+          <a:xfrm>
+            <a:off x="822960" y="548640"/>
+            <a:ext cx="7315200" cy="320040"/>
+          </a:xfrm>
+          <a:prstGeom prst="rect">
+            <a:avLst/>
+          </a:prstGeom>
+          <a:noFill/>
+        </p:spPr>
+        <p:txBody>
+          <a:bodyPr wrap="square" anchor="t" lIns="0" rIns="0" tIns="0" bIns="0">
+            <a:spAutoFit/>
+          </a:bodyPr>
+          <a:lstStyle/>
+          <a:p>
+            <a:pPr algn="l"/>
+            <a:r>
+              <a:rPr sz="1300" b="1" i="0" spc="250">
+                <a:solidFill>
+                  <a:srgbClr val="CADCFC"/>
+                </a:solidFill>
+                <a:latin typeface="Calibri"/>
+              </a:rPr>
+              <a:t>READ THIS CAREFULLY</a:t>
+            </a:r>
+          </a:p>
+        </p:txBody>
+      </p:sp>
+      <p:sp>
+        <p:nvSpPr>
+          <p:cNvPr id="3" name="TextBox 2"/>
+          <p:cNvSpPr txBox="1"/>
+          <p:nvPr/>
+        </p:nvSpPr>
+        <p:spPr>
+          <a:xfrm>
+            <a:off x="822960" y="914400"/>
+            <a:ext cx="10515600" cy="822960"/>
+          </a:xfrm>
+          <a:prstGeom prst="rect">
+            <a:avLst/>
+          </a:prstGeom>
+          <a:noFill/>
+        </p:spPr>
+        <p:txBody>
+          <a:bodyPr wrap="square" anchor="t" lIns="0" rIns="0" tIns="0" bIns="0">
+            <a:spAutoFit/>
+          </a:bodyPr>
+          <a:lstStyle/>
+          <a:p>
+            <a:pPr algn="l"/>
+            <a:r>
+              <a:rPr sz="3100" b="1" i="0">
+                <a:solidFill>
+                  <a:srgbClr val="FFFFFF"/>
+                </a:solidFill>
+                <a:latin typeface="Georgia"/>
+              </a:rPr>
+              <a:t>Hypothesis-generating, not causal</a:t>
+            </a:r>
+          </a:p>
+        </p:txBody>
+      </p:sp>
+      <p:sp>
+        <p:nvSpPr>
+          <p:cNvPr id="4" name="Rounded Rectangle 3"/>
           <p:cNvSpPr/>
           <p:nvPr/>
         </p:nvSpPr>
         <p:spPr>
           <a:xfrm>
-            <a:off x="0" y="4937760"/>
-            <a:ext cx="12191695" cy="1920240"/>
-          </a:xfrm>
-          <a:prstGeom prst="rect">
+            <a:off x="822960" y="1965960"/>
+            <a:ext cx="5166360" cy="1417320"/>
+          </a:xfrm>
+          <a:prstGeom prst="roundRect">
             <a:avLst/>
           </a:prstGeom>
           <a:solidFill>
@@ -5836,6 +8076,1606 @@
       </p:sp>
       <p:sp>
         <p:nvSpPr>
+          <p:cNvPr id="5" name="Rectangle 4"/>
+          <p:cNvSpPr/>
+          <p:nvPr/>
+        </p:nvSpPr>
+        <p:spPr>
+          <a:xfrm>
+            <a:off x="822960" y="1965960"/>
+            <a:ext cx="91440" cy="1417320"/>
+          </a:xfrm>
+          <a:prstGeom prst="rect">
+            <a:avLst/>
+          </a:prstGeom>
+          <a:solidFill>
+            <a:srgbClr val="E9964E"/>
+          </a:solidFill>
+          <a:ln>
+            <a:noFill/>
+          </a:ln>
+          <a:effectLst/>
+        </p:spPr>
+        <p:style>
+          <a:lnRef idx="1">
+            <a:schemeClr val="accent1"/>
+          </a:lnRef>
+          <a:fillRef idx="3">
+            <a:schemeClr val="accent1"/>
+          </a:fillRef>
+          <a:effectRef idx="2">
+            <a:schemeClr val="accent1"/>
+          </a:effectRef>
+          <a:fontRef idx="minor">
+            <a:schemeClr val="lt1"/>
+          </a:fontRef>
+        </p:style>
+        <p:txBody>
+          <a:bodyPr rtlCol="0" anchor="ctr"/>
+          <a:lstStyle/>
+          <a:p>
+            <a:pPr algn="ctr"/>
+          </a:p>
+        </p:txBody>
+      </p:sp>
+      <p:sp>
+        <p:nvSpPr>
+          <p:cNvPr id="6" name="TextBox 5"/>
+          <p:cNvSpPr txBox="1"/>
+          <p:nvPr/>
+        </p:nvSpPr>
+        <p:spPr>
+          <a:xfrm>
+            <a:off x="1115568" y="2130552"/>
+            <a:ext cx="4617720" cy="411480"/>
+          </a:xfrm>
+          <a:prstGeom prst="rect">
+            <a:avLst/>
+          </a:prstGeom>
+          <a:noFill/>
+        </p:spPr>
+        <p:txBody>
+          <a:bodyPr wrap="square" anchor="t" lIns="0" rIns="0" tIns="0" bIns="0">
+            <a:spAutoFit/>
+          </a:bodyPr>
+          <a:lstStyle/>
+          <a:p>
+            <a:pPr algn="l"/>
+            <a:r>
+              <a:rPr sz="1550" b="1" i="0">
+                <a:solidFill>
+                  <a:srgbClr val="FFFFFF"/>
+                </a:solidFill>
+                <a:latin typeface="Georgia"/>
+              </a:rPr>
+              <a:t>Lean-background reference</a:t>
+            </a:r>
+          </a:p>
+        </p:txBody>
+      </p:sp>
+      <p:sp>
+        <p:nvSpPr>
+          <p:cNvPr id="7" name="TextBox 6"/>
+          <p:cNvSpPr txBox="1"/>
+          <p:nvPr/>
+        </p:nvSpPr>
+        <p:spPr>
+          <a:xfrm>
+            <a:off x="1115568" y="2569464"/>
+            <a:ext cx="4617720" cy="731520"/>
+          </a:xfrm>
+          <a:prstGeom prst="rect">
+            <a:avLst/>
+          </a:prstGeom>
+          <a:noFill/>
+        </p:spPr>
+        <p:txBody>
+          <a:bodyPr wrap="square" anchor="t" lIns="0" rIns="0" tIns="0" bIns="0">
+            <a:spAutoFit/>
+          </a:bodyPr>
+          <a:lstStyle/>
+          <a:p>
+            <a:pPr algn="l"/>
+            <a:r>
+              <a:rPr sz="1250" b="0" i="0">
+                <a:solidFill>
+                  <a:srgbClr val="CADCFC"/>
+                </a:solidFill>
+                <a:latin typeface="Calibri"/>
+              </a:rPr>
+              <a:t>SaNama_1.0 is a doubled-haploid lean fish. Siscowet diverges more, inflating its apparent deletions — counts are not magnitude-comparable.</a:t>
+            </a:r>
+          </a:p>
+        </p:txBody>
+      </p:sp>
+      <p:sp>
+        <p:nvSpPr>
+          <p:cNvPr id="8" name="Rounded Rectangle 7"/>
+          <p:cNvSpPr/>
+          <p:nvPr/>
+        </p:nvSpPr>
+        <p:spPr>
+          <a:xfrm>
+            <a:off x="6199632" y="1965960"/>
+            <a:ext cx="5166360" cy="1417320"/>
+          </a:xfrm>
+          <a:prstGeom prst="roundRect">
+            <a:avLst/>
+          </a:prstGeom>
+          <a:solidFill>
+            <a:srgbClr val="065A82"/>
+          </a:solidFill>
+          <a:ln>
+            <a:noFill/>
+          </a:ln>
+          <a:effectLst/>
+        </p:spPr>
+        <p:style>
+          <a:lnRef idx="1">
+            <a:schemeClr val="accent1"/>
+          </a:lnRef>
+          <a:fillRef idx="3">
+            <a:schemeClr val="accent1"/>
+          </a:fillRef>
+          <a:effectRef idx="2">
+            <a:schemeClr val="accent1"/>
+          </a:effectRef>
+          <a:fontRef idx="minor">
+            <a:schemeClr val="lt1"/>
+          </a:fontRef>
+        </p:style>
+        <p:txBody>
+          <a:bodyPr rtlCol="0" anchor="ctr"/>
+          <a:lstStyle/>
+          <a:p>
+            <a:pPr algn="ctr"/>
+          </a:p>
+        </p:txBody>
+      </p:sp>
+      <p:sp>
+        <p:nvSpPr>
+          <p:cNvPr id="9" name="Rectangle 8"/>
+          <p:cNvSpPr/>
+          <p:nvPr/>
+        </p:nvSpPr>
+        <p:spPr>
+          <a:xfrm>
+            <a:off x="6199632" y="1965960"/>
+            <a:ext cx="91440" cy="1417320"/>
+          </a:xfrm>
+          <a:prstGeom prst="rect">
+            <a:avLst/>
+          </a:prstGeom>
+          <a:solidFill>
+            <a:srgbClr val="E9964E"/>
+          </a:solidFill>
+          <a:ln>
+            <a:noFill/>
+          </a:ln>
+          <a:effectLst/>
+        </p:spPr>
+        <p:style>
+          <a:lnRef idx="1">
+            <a:schemeClr val="accent1"/>
+          </a:lnRef>
+          <a:fillRef idx="3">
+            <a:schemeClr val="accent1"/>
+          </a:fillRef>
+          <a:effectRef idx="2">
+            <a:schemeClr val="accent1"/>
+          </a:effectRef>
+          <a:fontRef idx="minor">
+            <a:schemeClr val="lt1"/>
+          </a:fontRef>
+        </p:style>
+        <p:txBody>
+          <a:bodyPr rtlCol="0" anchor="ctr"/>
+          <a:lstStyle/>
+          <a:p>
+            <a:pPr algn="ctr"/>
+          </a:p>
+        </p:txBody>
+      </p:sp>
+      <p:sp>
+        <p:nvSpPr>
+          <p:cNvPr id="10" name="TextBox 9"/>
+          <p:cNvSpPr txBox="1"/>
+          <p:nvPr/>
+        </p:nvSpPr>
+        <p:spPr>
+          <a:xfrm>
+            <a:off x="6492240" y="2130552"/>
+            <a:ext cx="4617720" cy="411480"/>
+          </a:xfrm>
+          <a:prstGeom prst="rect">
+            <a:avLst/>
+          </a:prstGeom>
+          <a:noFill/>
+        </p:spPr>
+        <p:txBody>
+          <a:bodyPr wrap="square" anchor="t" lIns="0" rIns="0" tIns="0" bIns="0">
+            <a:spAutoFit/>
+          </a:bodyPr>
+          <a:lstStyle/>
+          <a:p>
+            <a:pPr algn="l"/>
+            <a:r>
+              <a:rPr sz="1550" b="1" i="0">
+                <a:solidFill>
+                  <a:srgbClr val="FFFFFF"/>
+                </a:solidFill>
+                <a:latin typeface="Georgia"/>
+              </a:rPr>
+              <a:t>No single CpG survives correction</a:t>
+            </a:r>
+          </a:p>
+        </p:txBody>
+      </p:sp>
+      <p:sp>
+        <p:nvSpPr>
+          <p:cNvPr id="11" name="TextBox 10"/>
+          <p:cNvSpPr txBox="1"/>
+          <p:nvPr/>
+        </p:nvSpPr>
+        <p:spPr>
+          <a:xfrm>
+            <a:off x="6492240" y="2569464"/>
+            <a:ext cx="4617720" cy="731520"/>
+          </a:xfrm>
+          <a:prstGeom prst="rect">
+            <a:avLst/>
+          </a:prstGeom>
+          <a:noFill/>
+        </p:spPr>
+        <p:txBody>
+          <a:bodyPr wrap="square" anchor="t" lIns="0" rIns="0" tIns="0" bIns="0">
+            <a:spAutoFit/>
+          </a:bodyPr>
+          <a:lstStyle/>
+          <a:p>
+            <a:pPr algn="l"/>
+            <a:r>
+              <a:rPr sz="1250" b="0" i="0">
+                <a:solidFill>
+                  <a:srgbClr val="CADCFC"/>
+                </a:solidFill>
+                <a:latin typeface="Calibri"/>
+              </a:rPr>
+              <a:t>0 DMCs at q &lt; 0.1. Interpretation leads with DMR-level and stringent-PAV sets; single-CpG hits are suggestive only.</a:t>
+            </a:r>
+          </a:p>
+        </p:txBody>
+      </p:sp>
+      <p:sp>
+        <p:nvSpPr>
+          <p:cNvPr id="12" name="Rounded Rectangle 11"/>
+          <p:cNvSpPr/>
+          <p:nvPr/>
+        </p:nvSpPr>
+        <p:spPr>
+          <a:xfrm>
+            <a:off x="822960" y="3611880"/>
+            <a:ext cx="5166360" cy="1417320"/>
+          </a:xfrm>
+          <a:prstGeom prst="roundRect">
+            <a:avLst/>
+          </a:prstGeom>
+          <a:solidFill>
+            <a:srgbClr val="065A82"/>
+          </a:solidFill>
+          <a:ln>
+            <a:noFill/>
+          </a:ln>
+          <a:effectLst/>
+        </p:spPr>
+        <p:style>
+          <a:lnRef idx="1">
+            <a:schemeClr val="accent1"/>
+          </a:lnRef>
+          <a:fillRef idx="3">
+            <a:schemeClr val="accent1"/>
+          </a:fillRef>
+          <a:effectRef idx="2">
+            <a:schemeClr val="accent1"/>
+          </a:effectRef>
+          <a:fontRef idx="minor">
+            <a:schemeClr val="lt1"/>
+          </a:fontRef>
+        </p:style>
+        <p:txBody>
+          <a:bodyPr rtlCol="0" anchor="ctr"/>
+          <a:lstStyle/>
+          <a:p>
+            <a:pPr algn="ctr"/>
+          </a:p>
+        </p:txBody>
+      </p:sp>
+      <p:sp>
+        <p:nvSpPr>
+          <p:cNvPr id="13" name="Rectangle 12"/>
+          <p:cNvSpPr/>
+          <p:nvPr/>
+        </p:nvSpPr>
+        <p:spPr>
+          <a:xfrm>
+            <a:off x="822960" y="3611880"/>
+            <a:ext cx="91440" cy="1417320"/>
+          </a:xfrm>
+          <a:prstGeom prst="rect">
+            <a:avLst/>
+          </a:prstGeom>
+          <a:solidFill>
+            <a:srgbClr val="E9964E"/>
+          </a:solidFill>
+          <a:ln>
+            <a:noFill/>
+          </a:ln>
+          <a:effectLst/>
+        </p:spPr>
+        <p:style>
+          <a:lnRef idx="1">
+            <a:schemeClr val="accent1"/>
+          </a:lnRef>
+          <a:fillRef idx="3">
+            <a:schemeClr val="accent1"/>
+          </a:fillRef>
+          <a:effectRef idx="2">
+            <a:schemeClr val="accent1"/>
+          </a:effectRef>
+          <a:fontRef idx="minor">
+            <a:schemeClr val="lt1"/>
+          </a:fontRef>
+        </p:style>
+        <p:txBody>
+          <a:bodyPr rtlCol="0" anchor="ctr"/>
+          <a:lstStyle/>
+          <a:p>
+            <a:pPr algn="ctr"/>
+          </a:p>
+        </p:txBody>
+      </p:sp>
+      <p:sp>
+        <p:nvSpPr>
+          <p:cNvPr id="14" name="TextBox 13"/>
+          <p:cNvSpPr txBox="1"/>
+          <p:nvPr/>
+        </p:nvSpPr>
+        <p:spPr>
+          <a:xfrm>
+            <a:off x="1115568" y="3776472"/>
+            <a:ext cx="4617720" cy="411480"/>
+          </a:xfrm>
+          <a:prstGeom prst="rect">
+            <a:avLst/>
+          </a:prstGeom>
+          <a:noFill/>
+        </p:spPr>
+        <p:txBody>
+          <a:bodyPr wrap="square" anchor="t" lIns="0" rIns="0" tIns="0" bIns="0">
+            <a:spAutoFit/>
+          </a:bodyPr>
+          <a:lstStyle/>
+          <a:p>
+            <a:pPr algn="l"/>
+            <a:r>
+              <a:rPr sz="1550" b="1" i="0">
+                <a:solidFill>
+                  <a:srgbClr val="FFFFFF"/>
+                </a:solidFill>
+                <a:latin typeface="Georgia"/>
+              </a:rPr>
+              <a:t>Expression support is weak by design</a:t>
+            </a:r>
+          </a:p>
+        </p:txBody>
+      </p:sp>
+      <p:sp>
+        <p:nvSpPr>
+          <p:cNvPr id="15" name="TextBox 14"/>
+          <p:cNvSpPr txBox="1"/>
+          <p:nvPr/>
+        </p:nvSpPr>
+        <p:spPr>
+          <a:xfrm>
+            <a:off x="1115568" y="4215384"/>
+            <a:ext cx="4617720" cy="731520"/>
+          </a:xfrm>
+          <a:prstGeom prst="rect">
+            <a:avLst/>
+          </a:prstGeom>
+          <a:noFill/>
+        </p:spPr>
+        <p:txBody>
+          <a:bodyPr wrap="square" anchor="t" lIns="0" rIns="0" tIns="0" bIns="0">
+            <a:spAutoFit/>
+          </a:bodyPr>
+          <a:lstStyle/>
+          <a:p>
+            <a:pPr algn="l"/>
+            <a:r>
+              <a:rPr sz="1250" b="0" i="0">
+                <a:solidFill>
+                  <a:srgbClr val="CADCFC"/>
+                </a:solidFill>
+                <a:latin typeface="Calibri"/>
+              </a:rPr>
+              <a:t>Liver RNA-seq comes from a separate parasite study with different fish — orthogonal support, never confirmation.</a:t>
+            </a:r>
+          </a:p>
+        </p:txBody>
+      </p:sp>
+      <p:sp>
+        <p:nvSpPr>
+          <p:cNvPr id="16" name="Rounded Rectangle 15"/>
+          <p:cNvSpPr/>
+          <p:nvPr/>
+        </p:nvSpPr>
+        <p:spPr>
+          <a:xfrm>
+            <a:off x="6199632" y="3611880"/>
+            <a:ext cx="5166360" cy="1417320"/>
+          </a:xfrm>
+          <a:prstGeom prst="roundRect">
+            <a:avLst/>
+          </a:prstGeom>
+          <a:solidFill>
+            <a:srgbClr val="065A82"/>
+          </a:solidFill>
+          <a:ln>
+            <a:noFill/>
+          </a:ln>
+          <a:effectLst/>
+        </p:spPr>
+        <p:style>
+          <a:lnRef idx="1">
+            <a:schemeClr val="accent1"/>
+          </a:lnRef>
+          <a:fillRef idx="3">
+            <a:schemeClr val="accent1"/>
+          </a:fillRef>
+          <a:effectRef idx="2">
+            <a:schemeClr val="accent1"/>
+          </a:effectRef>
+          <a:fontRef idx="minor">
+            <a:schemeClr val="lt1"/>
+          </a:fontRef>
+        </p:style>
+        <p:txBody>
+          <a:bodyPr rtlCol="0" anchor="ctr"/>
+          <a:lstStyle/>
+          <a:p>
+            <a:pPr algn="ctr"/>
+          </a:p>
+        </p:txBody>
+      </p:sp>
+      <p:sp>
+        <p:nvSpPr>
+          <p:cNvPr id="17" name="Rectangle 16"/>
+          <p:cNvSpPr/>
+          <p:nvPr/>
+        </p:nvSpPr>
+        <p:spPr>
+          <a:xfrm>
+            <a:off x="6199632" y="3611880"/>
+            <a:ext cx="91440" cy="1417320"/>
+          </a:xfrm>
+          <a:prstGeom prst="rect">
+            <a:avLst/>
+          </a:prstGeom>
+          <a:solidFill>
+            <a:srgbClr val="E9964E"/>
+          </a:solidFill>
+          <a:ln>
+            <a:noFill/>
+          </a:ln>
+          <a:effectLst/>
+        </p:spPr>
+        <p:style>
+          <a:lnRef idx="1">
+            <a:schemeClr val="accent1"/>
+          </a:lnRef>
+          <a:fillRef idx="3">
+            <a:schemeClr val="accent1"/>
+          </a:fillRef>
+          <a:effectRef idx="2">
+            <a:schemeClr val="accent1"/>
+          </a:effectRef>
+          <a:fontRef idx="minor">
+            <a:schemeClr val="lt1"/>
+          </a:fontRef>
+        </p:style>
+        <p:txBody>
+          <a:bodyPr rtlCol="0" anchor="ctr"/>
+          <a:lstStyle/>
+          <a:p>
+            <a:pPr algn="ctr"/>
+          </a:p>
+        </p:txBody>
+      </p:sp>
+      <p:sp>
+        <p:nvSpPr>
+          <p:cNvPr id="18" name="TextBox 17"/>
+          <p:cNvSpPr txBox="1"/>
+          <p:nvPr/>
+        </p:nvSpPr>
+        <p:spPr>
+          <a:xfrm>
+            <a:off x="6492240" y="3776472"/>
+            <a:ext cx="4617720" cy="411480"/>
+          </a:xfrm>
+          <a:prstGeom prst="rect">
+            <a:avLst/>
+          </a:prstGeom>
+          <a:noFill/>
+        </p:spPr>
+        <p:txBody>
+          <a:bodyPr wrap="square" anchor="t" lIns="0" rIns="0" tIns="0" bIns="0">
+            <a:spAutoFit/>
+          </a:bodyPr>
+          <a:lstStyle/>
+          <a:p>
+            <a:pPr algn="l"/>
+            <a:r>
+              <a:rPr sz="1550" b="1" i="0">
+                <a:solidFill>
+                  <a:srgbClr val="FFFFFF"/>
+                </a:solidFill>
+                <a:latin typeface="Georgia"/>
+              </a:rPr>
+              <a:t>Enrichment confounders</a:t>
+            </a:r>
+          </a:p>
+        </p:txBody>
+      </p:sp>
+      <p:sp>
+        <p:nvSpPr>
+          <p:cNvPr id="19" name="TextBox 18"/>
+          <p:cNvSpPr txBox="1"/>
+          <p:nvPr/>
+        </p:nvSpPr>
+        <p:spPr>
+          <a:xfrm>
+            <a:off x="6492240" y="4215384"/>
+            <a:ext cx="4617720" cy="731520"/>
+          </a:xfrm>
+          <a:prstGeom prst="rect">
+            <a:avLst/>
+          </a:prstGeom>
+          <a:noFill/>
+        </p:spPr>
+        <p:txBody>
+          <a:bodyPr wrap="square" anchor="t" lIns="0" rIns="0" tIns="0" bIns="0">
+            <a:spAutoFit/>
+          </a:bodyPr>
+          <a:lstStyle/>
+          <a:p>
+            <a:pPr algn="l"/>
+            <a:r>
+              <a:rPr sz="1250" b="0" i="0">
+                <a:solidFill>
+                  <a:srgbClr val="CADCFC"/>
+                </a:solidFill>
+                <a:latin typeface="Calibri"/>
+              </a:rPr>
+              <a:t>PAV GO carries a gene-length bias (long Ca²⁺ channels); the DMR GO signal is a single histone/znf883 tandem cluster.</a:t>
+            </a:r>
+          </a:p>
+        </p:txBody>
+      </p:sp>
+      <p:sp>
+        <p:nvSpPr>
+          <p:cNvPr id="20" name="TextBox 19"/>
+          <p:cNvSpPr txBox="1"/>
+          <p:nvPr/>
+        </p:nvSpPr>
+        <p:spPr>
+          <a:xfrm>
+            <a:off x="822960" y="5440680"/>
+            <a:ext cx="10515600" cy="731520"/>
+          </a:xfrm>
+          <a:prstGeom prst="rect">
+            <a:avLst/>
+          </a:prstGeom>
+          <a:noFill/>
+        </p:spPr>
+        <p:txBody>
+          <a:bodyPr wrap="square" anchor="t" lIns="0" rIns="0" tIns="0" bIns="0">
+            <a:spAutoFit/>
+          </a:bodyPr>
+          <a:lstStyle/>
+          <a:p>
+            <a:pPr algn="ctr"/>
+            <a:r>
+              <a:rPr sz="1600" b="0" i="0">
+                <a:solidFill>
+                  <a:srgbClr val="CADCFC"/>
+                </a:solidFill>
+                <a:latin typeface="Calibri"/>
+              </a:rPr>
+              <a:t>The deliverable is a ranked, annotated shortlist of candidates — </a:t>
+            </a:r>
+            <a:r>
+              <a:rPr sz="1600" b="1" i="0">
+                <a:solidFill>
+                  <a:srgbClr val="FFFFFF"/>
+                </a:solidFill>
+                <a:latin typeface="Calibri"/>
+              </a:rPr>
+              <a:t>associations on one reference, awaiting functional validation.</a:t>
+            </a:r>
+          </a:p>
+        </p:txBody>
+      </p:sp>
+      <p:sp>
+        <p:nvSpPr>
+          <p:cNvPr id="21" name="TextBox 20"/>
+          <p:cNvSpPr txBox="1"/>
+          <p:nvPr/>
+        </p:nvSpPr>
+        <p:spPr>
+          <a:xfrm>
+            <a:off x="11338560" y="6446520"/>
+            <a:ext cx="640080" cy="274320"/>
+          </a:xfrm>
+          <a:prstGeom prst="rect">
+            <a:avLst/>
+          </a:prstGeom>
+          <a:noFill/>
+        </p:spPr>
+        <p:txBody>
+          <a:bodyPr wrap="square" anchor="t" lIns="0" rIns="0" tIns="0" bIns="0">
+            <a:spAutoFit/>
+          </a:bodyPr>
+          <a:lstStyle/>
+          <a:p>
+            <a:pPr algn="r"/>
+            <a:r>
+              <a:rPr sz="1100" b="0" i="0">
+                <a:solidFill>
+                  <a:srgbClr val="5B707B"/>
+                </a:solidFill>
+                <a:latin typeface="Calibri"/>
+              </a:rPr>
+              <a:t>13</a:t>
+            </a:r>
+          </a:p>
+        </p:txBody>
+      </p:sp>
+    </p:spTree>
+  </p:cSld>
+  <p:clrMapOvr>
+    <a:masterClrMapping/>
+  </p:clrMapOvr>
+</p:sld>
+</file>
+
+<file path=ppt/slides/slide15.xml><?xml version="1.0" encoding="utf-8"?>
+<p:sld xmlns:a="http://schemas.openxmlformats.org/drawingml/2006/main" xmlns:p="http://schemas.openxmlformats.org/presentationml/2006/main" xmlns:r="http://schemas.openxmlformats.org/officeDocument/2006/relationships">
+  <p:cSld>
+    <p:bg>
+      <p:bgPr>
+        <a:solidFill>
+          <a:srgbClr val="F4F7F9"/>
+        </a:solidFill>
+        <a:effectLst/>
+      </p:bgPr>
+    </p:bg>
+    <p:spTree>
+      <p:nvGrpSpPr>
+        <p:cNvPr id="1" name=""/>
+        <p:cNvGrpSpPr/>
+        <p:nvPr/>
+      </p:nvGrpSpPr>
+      <p:grpSpPr/>
+      <p:sp>
+        <p:nvSpPr>
+          <p:cNvPr id="2" name="TextBox 1"/>
+          <p:cNvSpPr txBox="1"/>
+          <p:nvPr/>
+        </p:nvSpPr>
+        <p:spPr>
+          <a:xfrm>
+            <a:off x="822960" y="548640"/>
+            <a:ext cx="7315200" cy="320040"/>
+          </a:xfrm>
+          <a:prstGeom prst="rect">
+            <a:avLst/>
+          </a:prstGeom>
+          <a:noFill/>
+        </p:spPr>
+        <p:txBody>
+          <a:bodyPr wrap="square" anchor="t" lIns="0" rIns="0" tIns="0" bIns="0">
+            <a:spAutoFit/>
+          </a:bodyPr>
+          <a:lstStyle/>
+          <a:p>
+            <a:pPr algn="l"/>
+            <a:r>
+              <a:rPr sz="1300" b="1" i="0" spc="250">
+                <a:solidFill>
+                  <a:srgbClr val="E9964E"/>
+                </a:solidFill>
+                <a:latin typeface="Calibri"/>
+              </a:rPr>
+              <a:t>TAKE-HOME</a:t>
+            </a:r>
+          </a:p>
+        </p:txBody>
+      </p:sp>
+      <p:sp>
+        <p:nvSpPr>
+          <p:cNvPr id="3" name="TextBox 2"/>
+          <p:cNvSpPr txBox="1"/>
+          <p:nvPr/>
+        </p:nvSpPr>
+        <p:spPr>
+          <a:xfrm>
+            <a:off x="822960" y="914400"/>
+            <a:ext cx="10515600" cy="822960"/>
+          </a:xfrm>
+          <a:prstGeom prst="rect">
+            <a:avLst/>
+          </a:prstGeom>
+          <a:noFill/>
+        </p:spPr>
+        <p:txBody>
+          <a:bodyPr wrap="square" anchor="t" lIns="0" rIns="0" tIns="0" bIns="0">
+            <a:spAutoFit/>
+          </a:bodyPr>
+          <a:lstStyle/>
+          <a:p>
+            <a:pPr algn="l"/>
+            <a:r>
+              <a:rPr sz="3300" b="1" i="0">
+                <a:solidFill>
+                  <a:srgbClr val="1A2B35"/>
+                </a:solidFill>
+                <a:latin typeface="Georgia"/>
+              </a:rPr>
+              <a:t>Three things to remember</a:t>
+            </a:r>
+          </a:p>
+        </p:txBody>
+      </p:sp>
+      <p:sp>
+        <p:nvSpPr>
+          <p:cNvPr id="4" name="Rounded Rectangle 3"/>
+          <p:cNvSpPr/>
+          <p:nvPr/>
+        </p:nvSpPr>
+        <p:spPr>
+          <a:xfrm>
+            <a:off x="822960" y="1965960"/>
+            <a:ext cx="10515600" cy="1325880"/>
+          </a:xfrm>
+          <a:prstGeom prst="roundRect">
+            <a:avLst/>
+          </a:prstGeom>
+          <a:solidFill>
+            <a:srgbClr val="FFFFFF"/>
+          </a:solidFill>
+          <a:ln>
+            <a:noFill/>
+          </a:ln>
+          <a:effectLst/>
+          <a:effectLst>
+            <a:outerShdw blurRad="60000" dist="25000" dir="5400000" rotWithShape="0">
+              <a:srgbClr val="0A2230">
+                <a:alpha val="28000"/>
+              </a:srgbClr>
+            </a:outerShdw>
+          </a:effectLst>
+        </p:spPr>
+        <p:style>
+          <a:lnRef idx="1">
+            <a:schemeClr val="accent1"/>
+          </a:lnRef>
+          <a:fillRef idx="3">
+            <a:schemeClr val="accent1"/>
+          </a:fillRef>
+          <a:effectRef idx="2">
+            <a:schemeClr val="accent1"/>
+          </a:effectRef>
+          <a:fontRef idx="minor">
+            <a:schemeClr val="lt1"/>
+          </a:fontRef>
+        </p:style>
+        <p:txBody>
+          <a:bodyPr rtlCol="0" anchor="ctr"/>
+          <a:lstStyle/>
+          <a:p>
+            <a:pPr algn="ctr"/>
+          </a:p>
+        </p:txBody>
+      </p:sp>
+      <p:sp>
+        <p:nvSpPr>
+          <p:cNvPr id="5" name="Rectangle 4"/>
+          <p:cNvSpPr/>
+          <p:nvPr/>
+        </p:nvSpPr>
+        <p:spPr>
+          <a:xfrm>
+            <a:off x="822960" y="1965960"/>
+            <a:ext cx="128016" cy="1325880"/>
+          </a:xfrm>
+          <a:prstGeom prst="rect">
+            <a:avLst/>
+          </a:prstGeom>
+          <a:solidFill>
+            <a:srgbClr val="065A82"/>
+          </a:solidFill>
+          <a:ln>
+            <a:noFill/>
+          </a:ln>
+          <a:effectLst/>
+        </p:spPr>
+        <p:style>
+          <a:lnRef idx="1">
+            <a:schemeClr val="accent1"/>
+          </a:lnRef>
+          <a:fillRef idx="3">
+            <a:schemeClr val="accent1"/>
+          </a:fillRef>
+          <a:effectRef idx="2">
+            <a:schemeClr val="accent1"/>
+          </a:effectRef>
+          <a:fontRef idx="minor">
+            <a:schemeClr val="lt1"/>
+          </a:fontRef>
+        </p:style>
+        <p:txBody>
+          <a:bodyPr rtlCol="0" anchor="ctr"/>
+          <a:lstStyle/>
+          <a:p>
+            <a:pPr algn="ctr"/>
+          </a:p>
+        </p:txBody>
+      </p:sp>
+      <p:sp>
+        <p:nvSpPr>
+          <p:cNvPr id="6" name="Oval 5"/>
+          <p:cNvSpPr/>
+          <p:nvPr/>
+        </p:nvSpPr>
+        <p:spPr>
+          <a:xfrm>
+            <a:off x="1143000" y="2258568"/>
+            <a:ext cx="731520" cy="731520"/>
+          </a:xfrm>
+          <a:prstGeom prst="ellipse">
+            <a:avLst/>
+          </a:prstGeom>
+          <a:solidFill>
+            <a:srgbClr val="065A82"/>
+          </a:solidFill>
+          <a:ln>
+            <a:noFill/>
+          </a:ln>
+          <a:effectLst/>
+        </p:spPr>
+        <p:style>
+          <a:lnRef idx="1">
+            <a:schemeClr val="accent1"/>
+          </a:lnRef>
+          <a:fillRef idx="3">
+            <a:schemeClr val="accent1"/>
+          </a:fillRef>
+          <a:effectRef idx="2">
+            <a:schemeClr val="accent1"/>
+          </a:effectRef>
+          <a:fontRef idx="minor">
+            <a:schemeClr val="lt1"/>
+          </a:fontRef>
+        </p:style>
+        <p:txBody>
+          <a:bodyPr rtlCol="0" anchor="ctr"/>
+          <a:lstStyle/>
+          <a:p>
+            <a:pPr algn="ctr"/>
+          </a:p>
+        </p:txBody>
+      </p:sp>
+      <p:sp>
+        <p:nvSpPr>
+          <p:cNvPr id="7" name="TextBox 6"/>
+          <p:cNvSpPr txBox="1"/>
+          <p:nvPr/>
+        </p:nvSpPr>
+        <p:spPr>
+          <a:xfrm>
+            <a:off x="1143000" y="2331720"/>
+            <a:ext cx="731520" cy="548640"/>
+          </a:xfrm>
+          <a:prstGeom prst="rect">
+            <a:avLst/>
+          </a:prstGeom>
+          <a:noFill/>
+        </p:spPr>
+        <p:txBody>
+          <a:bodyPr wrap="square" anchor="t" lIns="0" rIns="0" tIns="0" bIns="0">
+            <a:spAutoFit/>
+          </a:bodyPr>
+          <a:lstStyle/>
+          <a:p>
+            <a:pPr algn="ctr"/>
+            <a:r>
+              <a:rPr sz="2600" b="1" i="0">
+                <a:solidFill>
+                  <a:srgbClr val="FFFFFF"/>
+                </a:solidFill>
+                <a:latin typeface="Georgia"/>
+              </a:rPr>
+              <a:t>1</a:t>
+            </a:r>
+          </a:p>
+        </p:txBody>
+      </p:sp>
+      <p:sp>
+        <p:nvSpPr>
+          <p:cNvPr id="8" name="TextBox 7"/>
+          <p:cNvSpPr txBox="1"/>
+          <p:nvPr/>
+        </p:nvSpPr>
+        <p:spPr>
+          <a:xfrm>
+            <a:off x="2194560" y="2167128"/>
+            <a:ext cx="8778240" cy="457200"/>
+          </a:xfrm>
+          <a:prstGeom prst="rect">
+            <a:avLst/>
+          </a:prstGeom>
+          <a:noFill/>
+        </p:spPr>
+        <p:txBody>
+          <a:bodyPr wrap="square" anchor="t" lIns="0" rIns="0" tIns="0" bIns="0">
+            <a:spAutoFit/>
+          </a:bodyPr>
+          <a:lstStyle/>
+          <a:p>
+            <a:pPr algn="l"/>
+            <a:r>
+              <a:rPr sz="1900" b="1" i="0">
+                <a:solidFill>
+                  <a:srgbClr val="1A2B35"/>
+                </a:solidFill>
+                <a:latin typeface="Georgia"/>
+              </a:rPr>
+              <a:t>Divergence is written at two levels, read at a third</a:t>
+            </a:r>
+          </a:p>
+        </p:txBody>
+      </p:sp>
+      <p:sp>
+        <p:nvSpPr>
+          <p:cNvPr id="9" name="TextBox 8"/>
+          <p:cNvSpPr txBox="1"/>
+          <p:nvPr/>
+        </p:nvSpPr>
+        <p:spPr>
+          <a:xfrm>
+            <a:off x="2194560" y="2679191"/>
+            <a:ext cx="8778240" cy="502920"/>
+          </a:xfrm>
+          <a:prstGeom prst="rect">
+            <a:avLst/>
+          </a:prstGeom>
+          <a:noFill/>
+        </p:spPr>
+        <p:txBody>
+          <a:bodyPr wrap="square" anchor="t" lIns="0" rIns="0" tIns="0" bIns="0">
+            <a:spAutoFit/>
+          </a:bodyPr>
+          <a:lstStyle/>
+          <a:p>
+            <a:pPr algn="l"/>
+            <a:r>
+              <a:rPr sz="1450" b="0" i="0">
+                <a:solidFill>
+                  <a:srgbClr val="5B707B"/>
+                </a:solidFill>
+                <a:latin typeface="Calibri"/>
+              </a:rPr>
+              <a:t>Structure (what genes exist) + methylation (how they're used), made interpretable by annotation.</a:t>
+            </a:r>
+          </a:p>
+        </p:txBody>
+      </p:sp>
+      <p:sp>
+        <p:nvSpPr>
+          <p:cNvPr id="10" name="Rounded Rectangle 9"/>
+          <p:cNvSpPr/>
+          <p:nvPr/>
+        </p:nvSpPr>
+        <p:spPr>
+          <a:xfrm>
+            <a:off x="822960" y="3456432"/>
+            <a:ext cx="10515600" cy="1325880"/>
+          </a:xfrm>
+          <a:prstGeom prst="roundRect">
+            <a:avLst/>
+          </a:prstGeom>
+          <a:solidFill>
+            <a:srgbClr val="FFFFFF"/>
+          </a:solidFill>
+          <a:ln>
+            <a:noFill/>
+          </a:ln>
+          <a:effectLst/>
+          <a:effectLst>
+            <a:outerShdw blurRad="60000" dist="25000" dir="5400000" rotWithShape="0">
+              <a:srgbClr val="0A2230">
+                <a:alpha val="28000"/>
+              </a:srgbClr>
+            </a:outerShdw>
+          </a:effectLst>
+        </p:spPr>
+        <p:style>
+          <a:lnRef idx="1">
+            <a:schemeClr val="accent1"/>
+          </a:lnRef>
+          <a:fillRef idx="3">
+            <a:schemeClr val="accent1"/>
+          </a:fillRef>
+          <a:effectRef idx="2">
+            <a:schemeClr val="accent1"/>
+          </a:effectRef>
+          <a:fontRef idx="minor">
+            <a:schemeClr val="lt1"/>
+          </a:fontRef>
+        </p:style>
+        <p:txBody>
+          <a:bodyPr rtlCol="0" anchor="ctr"/>
+          <a:lstStyle/>
+          <a:p>
+            <a:pPr algn="ctr"/>
+          </a:p>
+        </p:txBody>
+      </p:sp>
+      <p:sp>
+        <p:nvSpPr>
+          <p:cNvPr id="11" name="Rectangle 10"/>
+          <p:cNvSpPr/>
+          <p:nvPr/>
+        </p:nvSpPr>
+        <p:spPr>
+          <a:xfrm>
+            <a:off x="822960" y="3456432"/>
+            <a:ext cx="128016" cy="1325880"/>
+          </a:xfrm>
+          <a:prstGeom prst="rect">
+            <a:avLst/>
+          </a:prstGeom>
+          <a:solidFill>
+            <a:srgbClr val="C97B2E"/>
+          </a:solidFill>
+          <a:ln>
+            <a:noFill/>
+          </a:ln>
+          <a:effectLst/>
+        </p:spPr>
+        <p:style>
+          <a:lnRef idx="1">
+            <a:schemeClr val="accent1"/>
+          </a:lnRef>
+          <a:fillRef idx="3">
+            <a:schemeClr val="accent1"/>
+          </a:fillRef>
+          <a:effectRef idx="2">
+            <a:schemeClr val="accent1"/>
+          </a:effectRef>
+          <a:fontRef idx="minor">
+            <a:schemeClr val="lt1"/>
+          </a:fontRef>
+        </p:style>
+        <p:txBody>
+          <a:bodyPr rtlCol="0" anchor="ctr"/>
+          <a:lstStyle/>
+          <a:p>
+            <a:pPr algn="ctr"/>
+          </a:p>
+        </p:txBody>
+      </p:sp>
+      <p:sp>
+        <p:nvSpPr>
+          <p:cNvPr id="12" name="Oval 11"/>
+          <p:cNvSpPr/>
+          <p:nvPr/>
+        </p:nvSpPr>
+        <p:spPr>
+          <a:xfrm>
+            <a:off x="1143000" y="3749039"/>
+            <a:ext cx="731520" cy="731520"/>
+          </a:xfrm>
+          <a:prstGeom prst="ellipse">
+            <a:avLst/>
+          </a:prstGeom>
+          <a:solidFill>
+            <a:srgbClr val="C97B2E"/>
+          </a:solidFill>
+          <a:ln>
+            <a:noFill/>
+          </a:ln>
+          <a:effectLst/>
+        </p:spPr>
+        <p:style>
+          <a:lnRef idx="1">
+            <a:schemeClr val="accent1"/>
+          </a:lnRef>
+          <a:fillRef idx="3">
+            <a:schemeClr val="accent1"/>
+          </a:fillRef>
+          <a:effectRef idx="2">
+            <a:schemeClr val="accent1"/>
+          </a:effectRef>
+          <a:fontRef idx="minor">
+            <a:schemeClr val="lt1"/>
+          </a:fontRef>
+        </p:style>
+        <p:txBody>
+          <a:bodyPr rtlCol="0" anchor="ctr"/>
+          <a:lstStyle/>
+          <a:p>
+            <a:pPr algn="ctr"/>
+          </a:p>
+        </p:txBody>
+      </p:sp>
+      <p:sp>
+        <p:nvSpPr>
+          <p:cNvPr id="13" name="TextBox 12"/>
+          <p:cNvSpPr txBox="1"/>
+          <p:nvPr/>
+        </p:nvSpPr>
+        <p:spPr>
+          <a:xfrm>
+            <a:off x="1143000" y="3822191"/>
+            <a:ext cx="731520" cy="548640"/>
+          </a:xfrm>
+          <a:prstGeom prst="rect">
+            <a:avLst/>
+          </a:prstGeom>
+          <a:noFill/>
+        </p:spPr>
+        <p:txBody>
+          <a:bodyPr wrap="square" anchor="t" lIns="0" rIns="0" tIns="0" bIns="0">
+            <a:spAutoFit/>
+          </a:bodyPr>
+          <a:lstStyle/>
+          <a:p>
+            <a:pPr algn="ctr"/>
+            <a:r>
+              <a:rPr sz="2600" b="1" i="0">
+                <a:solidFill>
+                  <a:srgbClr val="FFFFFF"/>
+                </a:solidFill>
+                <a:latin typeface="Georgia"/>
+              </a:rPr>
+              <a:t>2</a:t>
+            </a:r>
+          </a:p>
+        </p:txBody>
+      </p:sp>
+      <p:sp>
+        <p:nvSpPr>
+          <p:cNvPr id="14" name="TextBox 13"/>
+          <p:cNvSpPr txBox="1"/>
+          <p:nvPr/>
+        </p:nvSpPr>
+        <p:spPr>
+          <a:xfrm>
+            <a:off x="2194560" y="3657600"/>
+            <a:ext cx="8778240" cy="457200"/>
+          </a:xfrm>
+          <a:prstGeom prst="rect">
+            <a:avLst/>
+          </a:prstGeom>
+          <a:noFill/>
+        </p:spPr>
+        <p:txBody>
+          <a:bodyPr wrap="square" anchor="t" lIns="0" rIns="0" tIns="0" bIns="0">
+            <a:spAutoFit/>
+          </a:bodyPr>
+          <a:lstStyle/>
+          <a:p>
+            <a:pPr algn="l"/>
+            <a:r>
+              <a:rPr sz="1900" b="1" i="0">
+                <a:solidFill>
+                  <a:srgbClr val="1A2B35"/>
+                </a:solidFill>
+                <a:latin typeface="Georgia"/>
+              </a:rPr>
+              <a:t>Annotation produced a ranked shortlist</a:t>
+            </a:r>
+          </a:p>
+        </p:txBody>
+      </p:sp>
+      <p:sp>
+        <p:nvSpPr>
+          <p:cNvPr id="15" name="TextBox 14"/>
+          <p:cNvSpPr txBox="1"/>
+          <p:nvPr/>
+        </p:nvSpPr>
+        <p:spPr>
+          <a:xfrm>
+            <a:off x="2194560" y="4169663"/>
+            <a:ext cx="8778240" cy="502920"/>
+          </a:xfrm>
+          <a:prstGeom prst="rect">
+            <a:avLst/>
+          </a:prstGeom>
+          <a:noFill/>
+        </p:spPr>
+        <p:txBody>
+          <a:bodyPr wrap="square" anchor="t" lIns="0" rIns="0" tIns="0" bIns="0">
+            <a:spAutoFit/>
+          </a:bodyPr>
+          <a:lstStyle/>
+          <a:p>
+            <a:pPr algn="l"/>
+            <a:r>
+              <a:rPr sz="1450" b="0" i="0">
+                <a:solidFill>
+                  <a:srgbClr val="5B707B"/>
+                </a:solidFill>
+                <a:latin typeface="Calibri"/>
+              </a:rPr>
+              <a:t>2,036 candidates, 4 convergent loci led by znf883-like, lipid-gene deletions, and calcium-transport GO.</a:t>
+            </a:r>
+          </a:p>
+        </p:txBody>
+      </p:sp>
+      <p:sp>
+        <p:nvSpPr>
+          <p:cNvPr id="16" name="Rounded Rectangle 15"/>
+          <p:cNvSpPr/>
+          <p:nvPr/>
+        </p:nvSpPr>
+        <p:spPr>
+          <a:xfrm>
+            <a:off x="822960" y="4946904"/>
+            <a:ext cx="10515600" cy="1325880"/>
+          </a:xfrm>
+          <a:prstGeom prst="roundRect">
+            <a:avLst/>
+          </a:prstGeom>
+          <a:solidFill>
+            <a:srgbClr val="FFFFFF"/>
+          </a:solidFill>
+          <a:ln>
+            <a:noFill/>
+          </a:ln>
+          <a:effectLst/>
+          <a:effectLst>
+            <a:outerShdw blurRad="60000" dist="25000" dir="5400000" rotWithShape="0">
+              <a:srgbClr val="0A2230">
+                <a:alpha val="28000"/>
+              </a:srgbClr>
+            </a:outerShdw>
+          </a:effectLst>
+        </p:spPr>
+        <p:style>
+          <a:lnRef idx="1">
+            <a:schemeClr val="accent1"/>
+          </a:lnRef>
+          <a:fillRef idx="3">
+            <a:schemeClr val="accent1"/>
+          </a:fillRef>
+          <a:effectRef idx="2">
+            <a:schemeClr val="accent1"/>
+          </a:effectRef>
+          <a:fontRef idx="minor">
+            <a:schemeClr val="lt1"/>
+          </a:fontRef>
+        </p:style>
+        <p:txBody>
+          <a:bodyPr rtlCol="0" anchor="ctr"/>
+          <a:lstStyle/>
+          <a:p>
+            <a:pPr algn="ctr"/>
+          </a:p>
+        </p:txBody>
+      </p:sp>
+      <p:sp>
+        <p:nvSpPr>
+          <p:cNvPr id="17" name="Rectangle 16"/>
+          <p:cNvSpPr/>
+          <p:nvPr/>
+        </p:nvSpPr>
+        <p:spPr>
+          <a:xfrm>
+            <a:off x="822960" y="4946904"/>
+            <a:ext cx="128016" cy="1325880"/>
+          </a:xfrm>
+          <a:prstGeom prst="rect">
+            <a:avLst/>
+          </a:prstGeom>
+          <a:solidFill>
+            <a:srgbClr val="E9964E"/>
+          </a:solidFill>
+          <a:ln>
+            <a:noFill/>
+          </a:ln>
+          <a:effectLst/>
+        </p:spPr>
+        <p:style>
+          <a:lnRef idx="1">
+            <a:schemeClr val="accent1"/>
+          </a:lnRef>
+          <a:fillRef idx="3">
+            <a:schemeClr val="accent1"/>
+          </a:fillRef>
+          <a:effectRef idx="2">
+            <a:schemeClr val="accent1"/>
+          </a:effectRef>
+          <a:fontRef idx="minor">
+            <a:schemeClr val="lt1"/>
+          </a:fontRef>
+        </p:style>
+        <p:txBody>
+          <a:bodyPr rtlCol="0" anchor="ctr"/>
+          <a:lstStyle/>
+          <a:p>
+            <a:pPr algn="ctr"/>
+          </a:p>
+        </p:txBody>
+      </p:sp>
+      <p:sp>
+        <p:nvSpPr>
+          <p:cNvPr id="18" name="Oval 17"/>
+          <p:cNvSpPr/>
+          <p:nvPr/>
+        </p:nvSpPr>
+        <p:spPr>
+          <a:xfrm>
+            <a:off x="1143000" y="5239512"/>
+            <a:ext cx="731520" cy="731520"/>
+          </a:xfrm>
+          <a:prstGeom prst="ellipse">
+            <a:avLst/>
+          </a:prstGeom>
+          <a:solidFill>
+            <a:srgbClr val="E9964E"/>
+          </a:solidFill>
+          <a:ln>
+            <a:noFill/>
+          </a:ln>
+          <a:effectLst/>
+        </p:spPr>
+        <p:style>
+          <a:lnRef idx="1">
+            <a:schemeClr val="accent1"/>
+          </a:lnRef>
+          <a:fillRef idx="3">
+            <a:schemeClr val="accent1"/>
+          </a:fillRef>
+          <a:effectRef idx="2">
+            <a:schemeClr val="accent1"/>
+          </a:effectRef>
+          <a:fontRef idx="minor">
+            <a:schemeClr val="lt1"/>
+          </a:fontRef>
+        </p:style>
+        <p:txBody>
+          <a:bodyPr rtlCol="0" anchor="ctr"/>
+          <a:lstStyle/>
+          <a:p>
+            <a:pPr algn="ctr"/>
+          </a:p>
+        </p:txBody>
+      </p:sp>
+      <p:sp>
+        <p:nvSpPr>
+          <p:cNvPr id="19" name="TextBox 18"/>
+          <p:cNvSpPr txBox="1"/>
+          <p:nvPr/>
+        </p:nvSpPr>
+        <p:spPr>
+          <a:xfrm>
+            <a:off x="1143000" y="5312664"/>
+            <a:ext cx="731520" cy="548640"/>
+          </a:xfrm>
+          <a:prstGeom prst="rect">
+            <a:avLst/>
+          </a:prstGeom>
+          <a:noFill/>
+        </p:spPr>
+        <p:txBody>
+          <a:bodyPr wrap="square" anchor="t" lIns="0" rIns="0" tIns="0" bIns="0">
+            <a:spAutoFit/>
+          </a:bodyPr>
+          <a:lstStyle/>
+          <a:p>
+            <a:pPr algn="ctr"/>
+            <a:r>
+              <a:rPr sz="2600" b="1" i="0">
+                <a:solidFill>
+                  <a:srgbClr val="FFFFFF"/>
+                </a:solidFill>
+                <a:latin typeface="Georgia"/>
+              </a:rPr>
+              <a:t>3</a:t>
+            </a:r>
+          </a:p>
+        </p:txBody>
+      </p:sp>
+      <p:sp>
+        <p:nvSpPr>
+          <p:cNvPr id="20" name="TextBox 19"/>
+          <p:cNvSpPr txBox="1"/>
+          <p:nvPr/>
+        </p:nvSpPr>
+        <p:spPr>
+          <a:xfrm>
+            <a:off x="2194560" y="5148072"/>
+            <a:ext cx="8778240" cy="457200"/>
+          </a:xfrm>
+          <a:prstGeom prst="rect">
+            <a:avLst/>
+          </a:prstGeom>
+          <a:noFill/>
+        </p:spPr>
+        <p:txBody>
+          <a:bodyPr wrap="square" anchor="t" lIns="0" rIns="0" tIns="0" bIns="0">
+            <a:spAutoFit/>
+          </a:bodyPr>
+          <a:lstStyle/>
+          <a:p>
+            <a:pPr algn="l"/>
+            <a:r>
+              <a:rPr sz="1900" b="1" i="0">
+                <a:solidFill>
+                  <a:srgbClr val="1A2B35"/>
+                </a:solidFill>
+                <a:latin typeface="Georgia"/>
+              </a:rPr>
+              <a:t>Read it as hypotheses, not mechanisms</a:t>
+            </a:r>
+          </a:p>
+        </p:txBody>
+      </p:sp>
+      <p:sp>
+        <p:nvSpPr>
+          <p:cNvPr id="21" name="TextBox 20"/>
+          <p:cNvSpPr txBox="1"/>
+          <p:nvPr/>
+        </p:nvSpPr>
+        <p:spPr>
+          <a:xfrm>
+            <a:off x="2194560" y="5660136"/>
+            <a:ext cx="8778240" cy="502920"/>
+          </a:xfrm>
+          <a:prstGeom prst="rect">
+            <a:avLst/>
+          </a:prstGeom>
+          <a:noFill/>
+        </p:spPr>
+        <p:txBody>
+          <a:bodyPr wrap="square" anchor="t" lIns="0" rIns="0" tIns="0" bIns="0">
+            <a:spAutoFit/>
+          </a:bodyPr>
+          <a:lstStyle/>
+          <a:p>
+            <a:pPr algn="l"/>
+            <a:r>
+              <a:rPr sz="1450" b="0" i="0">
+                <a:solidFill>
+                  <a:srgbClr val="5B707B"/>
+                </a:solidFill>
+                <a:latin typeface="Calibri"/>
+              </a:rPr>
+              <a:t>Lean-reference bias, no FDR-significant CpG, and weak expression support keep every link associative.</a:t>
+            </a:r>
+          </a:p>
+        </p:txBody>
+      </p:sp>
+      <p:sp>
+        <p:nvSpPr>
+          <p:cNvPr id="22" name="TextBox 21"/>
+          <p:cNvSpPr txBox="1"/>
+          <p:nvPr/>
+        </p:nvSpPr>
+        <p:spPr>
+          <a:xfrm>
+            <a:off x="11338560" y="6446520"/>
+            <a:ext cx="640080" cy="274320"/>
+          </a:xfrm>
+          <a:prstGeom prst="rect">
+            <a:avLst/>
+          </a:prstGeom>
+          <a:noFill/>
+        </p:spPr>
+        <p:txBody>
+          <a:bodyPr wrap="square" anchor="t" lIns="0" rIns="0" tIns="0" bIns="0">
+            <a:spAutoFit/>
+          </a:bodyPr>
+          <a:lstStyle/>
+          <a:p>
+            <a:pPr algn="r"/>
+            <a:r>
+              <a:rPr sz="1100" b="0" i="0">
+                <a:solidFill>
+                  <a:srgbClr val="5B707B"/>
+                </a:solidFill>
+                <a:latin typeface="Calibri"/>
+              </a:rPr>
+              <a:t>14</a:t>
+            </a:r>
+          </a:p>
+        </p:txBody>
+      </p:sp>
+    </p:spTree>
+  </p:cSld>
+  <p:clrMapOvr>
+    <a:masterClrMapping/>
+  </p:clrMapOvr>
+</p:sld>
+</file>
+
+<file path=ppt/slides/slide16.xml><?xml version="1.0" encoding="utf-8"?>
+<p:sld xmlns:a="http://schemas.openxmlformats.org/drawingml/2006/main" xmlns:p="http://schemas.openxmlformats.org/presentationml/2006/main" xmlns:r="http://schemas.openxmlformats.org/officeDocument/2006/relationships">
+  <p:cSld>
+    <p:bg>
+      <p:bgPr>
+        <a:solidFill>
+          <a:srgbClr val="062A42"/>
+        </a:solidFill>
+        <a:effectLst/>
+      </p:bgPr>
+    </p:bg>
+    <p:spTree>
+      <p:nvGrpSpPr>
+        <p:cNvPr id="1" name=""/>
+        <p:cNvGrpSpPr/>
+        <p:nvPr/>
+      </p:nvGrpSpPr>
+      <p:grpSpPr/>
+      <p:sp>
+        <p:nvSpPr>
+          <p:cNvPr id="2" name="Rectangle 1"/>
+          <p:cNvSpPr/>
+          <p:nvPr/>
+        </p:nvSpPr>
+        <p:spPr>
+          <a:xfrm>
+            <a:off x="0" y="4937760"/>
+            <a:ext cx="12191695" cy="1920240"/>
+          </a:xfrm>
+          <a:prstGeom prst="rect">
+            <a:avLst/>
+          </a:prstGeom>
+          <a:solidFill>
+            <a:srgbClr val="065A82"/>
+          </a:solidFill>
+          <a:ln>
+            <a:noFill/>
+          </a:ln>
+          <a:effectLst/>
+        </p:spPr>
+        <p:style>
+          <a:lnRef idx="1">
+            <a:schemeClr val="accent1"/>
+          </a:lnRef>
+          <a:fillRef idx="3">
+            <a:schemeClr val="accent1"/>
+          </a:fillRef>
+          <a:effectRef idx="2">
+            <a:schemeClr val="accent1"/>
+          </a:effectRef>
+          <a:fontRef idx="minor">
+            <a:schemeClr val="lt1"/>
+          </a:fontRef>
+        </p:style>
+        <p:txBody>
+          <a:bodyPr rtlCol="0" anchor="ctr"/>
+          <a:lstStyle/>
+          <a:p>
+            <a:pPr algn="ctr"/>
+          </a:p>
+        </p:txBody>
+      </p:sp>
+      <p:sp>
+        <p:nvSpPr>
           <p:cNvPr id="3" name="Rectangle 2"/>
           <p:cNvSpPr/>
           <p:nvPr/>
@@ -5930,7 +9770,7 @@
         </p:nvSpPr>
         <p:spPr>
           <a:xfrm>
-            <a:off x="822960" y="1554480"/>
+            <a:off x="822960" y="1463040"/>
             <a:ext cx="10515600" cy="1463040"/>
           </a:xfrm>
           <a:prstGeom prst="rect">
@@ -5946,13 +9786,13 @@
           <a:p>
             <a:pPr algn="l"/>
             <a:r>
-              <a:rPr sz="4000" b="1" i="0">
+              <a:rPr sz="3800" b="1" i="0">
                 <a:solidFill>
                   <a:srgbClr val="FFFFFF"/>
                 </a:solidFill>
                 <a:latin typeface="Georgia"/>
               </a:rPr>
-              <a:t>Two layers, one divergence</a:t>
+              <a:t>From variation to candidate genes</a:t>
             </a:r>
           </a:p>
         </p:txBody>
@@ -5965,8 +9805,8 @@
         </p:nvSpPr>
         <p:spPr>
           <a:xfrm>
-            <a:off x="841248" y="2834640"/>
-            <a:ext cx="10058400" cy="1097280"/>
+            <a:off x="841248" y="2697480"/>
+            <a:ext cx="10058400" cy="1371600"/>
           </a:xfrm>
           <a:prstGeom prst="rect">
             <a:avLst/>
@@ -5991,7 +9831,7 @@
                 </a:solidFill>
                 <a:latin typeface="Calibri"/>
               </a:rPr>
-              <a:t>Presence-absence variation and DNA methylation each track the lean–siscowet split — </a:t>
+              <a:t>Methylation and structural variation each track the lean–siscowet split; </a:t>
             </a:r>
           </a:p>
           <a:p>
@@ -6007,7 +9847,7 @@
                 </a:solidFill>
                 <a:latin typeface="Calibri"/>
               </a:rPr>
-              <a:t>and where they converge, we find the genes that make an ecotype.</a:t>
+              <a:t>functional annotation turns where they converge into the genes that may make an ecotype.</a:t>
             </a:r>
           </a:p>
         </p:txBody>
@@ -6020,7 +9860,7 @@
         </p:nvSpPr>
         <p:spPr>
           <a:xfrm>
-            <a:off x="841248" y="5212080"/>
+            <a:off x="841248" y="5166360"/>
             <a:ext cx="10515600" cy="457200"/>
           </a:xfrm>
           <a:prstGeom prst="rect">
@@ -6042,7 +9882,7 @@
                 </a:solidFill>
                 <a:latin typeface="Calibri"/>
               </a:rPr>
-              <a:t>Explore the data — interactive genome browser:</a:t>
+              <a:t>Explore the data — interactive genome browsers (IGV.js + JBrowse 2):</a:t>
             </a:r>
           </a:p>
         </p:txBody>
@@ -6055,7 +9895,7 @@
         </p:nvSpPr>
         <p:spPr>
           <a:xfrm>
-            <a:off x="841248" y="6035040"/>
+            <a:off x="841248" y="5989320"/>
             <a:ext cx="10515600" cy="457200"/>
           </a:xfrm>
           <a:prstGeom prst="rect">
@@ -6077,7 +9917,7 @@
                 </a:solidFill>
                 <a:latin typeface="Calibri"/>
               </a:rPr>
-              <a:t>sr320.github.io/project-lake-trout/genome-browser</a:t>
+              <a:t>sr320.github.io/project-lake-trout</a:t>
             </a:r>
           </a:p>
         </p:txBody>
@@ -6091,7 +9931,7 @@
         <p:spPr>
           <a:xfrm>
             <a:off x="841248" y="6510528"/>
-            <a:ext cx="7315200" cy="320040"/>
+            <a:ext cx="8229600" cy="320040"/>
           </a:xfrm>
           <a:prstGeom prst="rect">
             <a:avLst/>
@@ -6112,7 +9952,7 @@
                 </a:solidFill>
                 <a:latin typeface="Calibri"/>
               </a:rPr>
-              <a:t>Roberts Lab · University of Washington · School of Aquatic &amp; Fishery Sciences</a:t>
+              <a:t>Goetz · White · Gallardo-Escarate · Roberts  ·  Roberts Lab, UW SAFS</a:t>
             </a:r>
           </a:p>
         </p:txBody>
@@ -6202,7 +10042,7 @@
           <a:p>
             <a:pPr algn="l"/>
             <a:r>
-              <a:rPr sz="3300" b="1" i="0">
+              <a:rPr sz="3200" b="1" i="0">
                 <a:solidFill>
                   <a:srgbClr val="1A2B35"/>
                 </a:solidFill>
@@ -6222,7 +10062,7 @@
         <p:spPr>
           <a:xfrm>
             <a:off x="822960" y="1965960"/>
-            <a:ext cx="4937760" cy="3566160"/>
+            <a:ext cx="4937760" cy="3246120"/>
           </a:xfrm>
           <a:prstGeom prst="roundRect">
             <a:avLst/>
@@ -6431,7 +10271,7 @@
         <p:spPr>
           <a:xfrm>
             <a:off x="1188720" y="3383280"/>
-            <a:ext cx="4297680" cy="2011680"/>
+            <a:ext cx="4297680" cy="1737360"/>
           </a:xfrm>
           <a:prstGeom prst="rect">
             <a:avLst/>
@@ -6529,7 +10369,7 @@
         <p:spPr>
           <a:xfrm>
             <a:off x="6446520" y="1965960"/>
-            <a:ext cx="4937760" cy="3566160"/>
+            <a:ext cx="4937760" cy="3246120"/>
           </a:xfrm>
           <a:prstGeom prst="roundRect">
             <a:avLst/>
@@ -6738,7 +10578,7 @@
         <p:spPr>
           <a:xfrm>
             <a:off x="6812280" y="3383280"/>
-            <a:ext cx="4297680" cy="2011680"/>
+            <a:ext cx="4297680" cy="1737360"/>
           </a:xfrm>
           <a:prstGeom prst="rect">
             <a:avLst/>
@@ -6822,7 +10662,7 @@
                 </a:solidFill>
                 <a:latin typeface="Calibri"/>
               </a:rPr>
-              <a:t>Distinct morphology</a:t>
+              <a:t>Robust, distinct morphology</a:t>
             </a:r>
           </a:p>
         </p:txBody>
@@ -6835,8 +10675,8 @@
         </p:nvSpPr>
         <p:spPr>
           <a:xfrm>
-            <a:off x="822960" y="5806440"/>
-            <a:ext cx="10515600" cy="640080"/>
+            <a:off x="822960" y="5440680"/>
+            <a:ext cx="10515600" cy="914400"/>
           </a:xfrm>
           <a:prstGeom prst="rect">
             <a:avLst/>
@@ -6857,7 +10697,7 @@
                 </a:solidFill>
                 <a:latin typeface="Calibri"/>
               </a:rPr>
-              <a:t>Same species, same reference genome — so where is the difference written? </a:t>
+              <a:t>Same species, same reference genome. </a:t>
             </a:r>
             <a:r>
               <a:rPr sz="1700" b="1" i="0">
@@ -6866,7 +10706,7 @@
                 </a:solidFill>
                 <a:latin typeface="Calibri"/>
               </a:rPr>
-              <a:t>We look at two layers.</a:t>
+              <a:t>Which genes carry the difference — and what phenotypes might they shape?</a:t>
             </a:r>
           </a:p>
         </p:txBody>
@@ -6940,7 +10780,7 @@
         </p:nvSpPr>
         <p:spPr>
           <a:xfrm>
-            <a:off x="822960" y="548640"/>
+            <a:off x="822960" y="502920"/>
             <a:ext cx="7315200" cy="320040"/>
           </a:xfrm>
           <a:prstGeom prst="rect">
@@ -6975,8 +10815,8 @@
         </p:nvSpPr>
         <p:spPr>
           <a:xfrm>
-            <a:off x="822960" y="914400"/>
-            <a:ext cx="10515600" cy="822960"/>
+            <a:off x="822960" y="868680"/>
+            <a:ext cx="10515600" cy="731520"/>
           </a:xfrm>
           <a:prstGeom prst="rect">
             <a:avLst/>
@@ -6991,13 +10831,13 @@
           <a:p>
             <a:pPr algn="l"/>
             <a:r>
-              <a:rPr sz="3300" b="1" i="0">
+              <a:rPr sz="3100" b="1" i="0">
                 <a:solidFill>
                   <a:srgbClr val="FFFFFF"/>
                 </a:solidFill>
                 <a:latin typeface="Georgia"/>
               </a:rPr>
-              <a:t>Two layers of genomic difference</a:t>
+              <a:t>Three layers, one shortlist of genes</a:t>
             </a:r>
           </a:p>
         </p:txBody>
@@ -7010,8 +10850,8 @@
         </p:nvSpPr>
         <p:spPr>
           <a:xfrm>
-            <a:off x="822960" y="2011680"/>
-            <a:ext cx="5029200" cy="3566160"/>
+            <a:off x="822960" y="1828800"/>
+            <a:ext cx="3383280" cy="3566160"/>
           </a:xfrm>
           <a:prstGeom prst="roundRect">
             <a:avLst/>
@@ -7061,8 +10901,8 @@
         </p:nvSpPr>
         <p:spPr>
           <a:xfrm>
-            <a:off x="1188720" y="2331720"/>
-            <a:ext cx="4389120" cy="457200"/>
+            <a:off x="1115568" y="2103120"/>
+            <a:ext cx="2834640" cy="365760"/>
           </a:xfrm>
           <a:prstGeom prst="rect">
             <a:avLst/>
@@ -7077,7 +10917,7 @@
           <a:p>
             <a:pPr algn="l"/>
             <a:r>
-              <a:rPr sz="1500" b="1" i="0" spc="150">
+              <a:rPr sz="1350" b="1" i="0" spc="130">
                 <a:solidFill>
                   <a:srgbClr val="E9964E"/>
                 </a:solidFill>
@@ -7096,8 +10936,8 @@
         </p:nvSpPr>
         <p:spPr>
           <a:xfrm>
-            <a:off x="1188720" y="2743200"/>
-            <a:ext cx="4389120" cy="548640"/>
+            <a:off x="1115568" y="2487168"/>
+            <a:ext cx="2834640" cy="548640"/>
           </a:xfrm>
           <a:prstGeom prst="rect">
             <a:avLst/>
@@ -7112,7 +10952,7 @@
           <a:p>
             <a:pPr algn="l"/>
             <a:r>
-              <a:rPr sz="2600" b="1" i="0">
+              <a:rPr sz="2100" b="1" i="0">
                 <a:solidFill>
                   <a:srgbClr val="FFFFFF"/>
                 </a:solidFill>
@@ -7131,8 +10971,8 @@
         </p:nvSpPr>
         <p:spPr>
           <a:xfrm>
-            <a:off x="1188720" y="3429000"/>
-            <a:ext cx="4389120" cy="1920240"/>
+            <a:off x="1115568" y="3246120"/>
+            <a:ext cx="2834640" cy="2011680"/>
           </a:xfrm>
           <a:prstGeom prst="rect">
             <a:avLst/>
@@ -7147,16 +10987,16 @@
           <a:p>
             <a:pPr algn="l"/>
             <a:r>
-              <a:rPr sz="1600" b="0" i="0">
+              <a:rPr sz="1450" b="0" i="0">
                 <a:solidFill>
                   <a:srgbClr val="CADCFC"/>
                 </a:solidFill>
                 <a:latin typeface="Calibri"/>
               </a:rPr>
-              <a:t>Presence-absence variation — segments of DNA </a:t>
-            </a:r>
-            <a:r>
-              <a:rPr sz="1600" b="1" i="0">
+              <a:t>Presence-absence variation — DNA segments </a:t>
+            </a:r>
+            <a:r>
+              <a:rPr sz="1450" b="1" i="0">
                 <a:solidFill>
                   <a:srgbClr val="FFFFFF"/>
                 </a:solidFill>
@@ -7165,19 +11005,19 @@
               <a:t>gained or lost</a:t>
             </a:r>
             <a:r>
-              <a:rPr sz="1600" b="0" i="0">
+              <a:rPr sz="1450" b="0" i="0">
                 <a:solidFill>
                   <a:srgbClr val="CADCFC"/>
                 </a:solidFill>
                 <a:latin typeface="Calibri"/>
               </a:rPr>
-              <a:t> between ecotypes.</a:t>
+              <a:t>.</a:t>
             </a:r>
           </a:p>
           <a:p>
             <a:pPr algn="l"/>
             <a:r>
-              <a:rPr sz="1600" b="0" i="0">
+              <a:rPr sz="600" b="0" i="0">
                 <a:solidFill>
                   <a:srgbClr val="1A2B35"/>
                 </a:solidFill>
@@ -7189,7 +11029,7 @@
           <a:p>
             <a:pPr algn="l"/>
             <a:r>
-              <a:rPr sz="1600" b="0" i="0">
+              <a:rPr sz="1450" b="0" i="0">
                 <a:solidFill>
                   <a:srgbClr val="CADCFC"/>
                 </a:solidFill>
@@ -7198,13 +11038,13 @@
               <a:t>Changes </a:t>
             </a:r>
             <a:r>
-              <a:rPr sz="1600" b="1" i="0">
+              <a:rPr sz="1450" b="1" i="0">
                 <a:solidFill>
                   <a:srgbClr val="FFFFFF"/>
                 </a:solidFill>
                 <a:latin typeface="Calibri"/>
               </a:rPr>
-              <a:t>what genes are present.</a:t>
+              <a:t>what genes exist.</a:t>
             </a:r>
           </a:p>
         </p:txBody>
@@ -7217,14 +11057,14 @@
         </p:nvSpPr>
         <p:spPr>
           <a:xfrm>
-            <a:off x="6309360" y="2011680"/>
-            <a:ext cx="5029200" cy="3566160"/>
+            <a:off x="4407408" y="1828800"/>
+            <a:ext cx="3383280" cy="3566160"/>
           </a:xfrm>
           <a:prstGeom prst="roundRect">
             <a:avLst/>
           </a:prstGeom>
           <a:solidFill>
-            <a:srgbClr val="1C7293"/>
+            <a:srgbClr val="065A82"/>
           </a:solidFill>
           <a:ln>
             <a:noFill/>
@@ -7268,8 +11108,8 @@
         </p:nvSpPr>
         <p:spPr>
           <a:xfrm>
-            <a:off x="6675120" y="2331720"/>
-            <a:ext cx="4389120" cy="457200"/>
+            <a:off x="4700016" y="2103120"/>
+            <a:ext cx="2834640" cy="365760"/>
           </a:xfrm>
           <a:prstGeom prst="rect">
             <a:avLst/>
@@ -7284,7 +11124,7 @@
           <a:p>
             <a:pPr algn="l"/>
             <a:r>
-              <a:rPr sz="1500" b="1" i="0" spc="150">
+              <a:rPr sz="1350" b="1" i="0" spc="130">
                 <a:solidFill>
                   <a:srgbClr val="9BE8DC"/>
                 </a:solidFill>
@@ -7303,8 +11143,8 @@
         </p:nvSpPr>
         <p:spPr>
           <a:xfrm>
-            <a:off x="6675120" y="2743200"/>
-            <a:ext cx="4389120" cy="548640"/>
+            <a:off x="4700016" y="2487168"/>
+            <a:ext cx="2834640" cy="548640"/>
           </a:xfrm>
           <a:prstGeom prst="rect">
             <a:avLst/>
@@ -7319,7 +11159,7 @@
           <a:p>
             <a:pPr algn="l"/>
             <a:r>
-              <a:rPr sz="2600" b="1" i="0">
+              <a:rPr sz="2100" b="1" i="0">
                 <a:solidFill>
                   <a:srgbClr val="FFFFFF"/>
                 </a:solidFill>
@@ -7338,8 +11178,8 @@
         </p:nvSpPr>
         <p:spPr>
           <a:xfrm>
-            <a:off x="6675120" y="3429000"/>
-            <a:ext cx="4389120" cy="1920240"/>
+            <a:off x="4700016" y="3246120"/>
+            <a:ext cx="2834640" cy="2011680"/>
           </a:xfrm>
           <a:prstGeom prst="rect">
             <a:avLst/>
@@ -7354,7 +11194,7 @@
           <a:p>
             <a:pPr algn="l"/>
             <a:r>
-              <a:rPr sz="1600" b="0" i="0">
+              <a:rPr sz="1450" b="0" i="0">
                 <a:solidFill>
                   <a:srgbClr val="CADCFC"/>
                 </a:solidFill>
@@ -7363,7 +11203,7 @@
               <a:t>DNA methylation — reversible marks that </a:t>
             </a:r>
             <a:r>
-              <a:rPr sz="1600" b="1" i="0">
+              <a:rPr sz="1450" b="1" i="0">
                 <a:solidFill>
                   <a:srgbClr val="FFFFFF"/>
                 </a:solidFill>
@@ -7372,7 +11212,7 @@
               <a:t>switch genes up or down</a:t>
             </a:r>
             <a:r>
-              <a:rPr sz="1600" b="0" i="0">
+              <a:rPr sz="1450" b="0" i="0">
                 <a:solidFill>
                   <a:srgbClr val="CADCFC"/>
                 </a:solidFill>
@@ -7384,7 +11224,7 @@
           <a:p>
             <a:pPr algn="l"/>
             <a:r>
-              <a:rPr sz="1600" b="0" i="0">
+              <a:rPr sz="600" b="0" i="0">
                 <a:solidFill>
                   <a:srgbClr val="1A2B35"/>
                 </a:solidFill>
@@ -7396,7 +11236,7 @@
           <a:p>
             <a:pPr algn="l"/>
             <a:r>
-              <a:rPr sz="1600" b="0" i="0">
+              <a:rPr sz="1450" b="0" i="0">
                 <a:solidFill>
                   <a:srgbClr val="CADCFC"/>
                 </a:solidFill>
@@ -7405,7 +11245,7 @@
               <a:t>Changes </a:t>
             </a:r>
             <a:r>
-              <a:rPr sz="1600" b="1" i="0">
+              <a:rPr sz="1450" b="1" i="0">
                 <a:solidFill>
                   <a:srgbClr val="FFFFFF"/>
                 </a:solidFill>
@@ -7418,13 +11258,220 @@
       </p:sp>
       <p:sp>
         <p:nvSpPr>
-          <p:cNvPr id="12" name="TextBox 11"/>
-          <p:cNvSpPr txBox="1"/>
-          <p:nvPr/>
-        </p:nvSpPr>
-        <p:spPr>
-          <a:xfrm>
-            <a:off x="822960" y="5897880"/>
+          <p:cNvPr id="12" name="Rounded Rectangle 11"/>
+          <p:cNvSpPr/>
+          <p:nvPr/>
+        </p:nvSpPr>
+        <p:spPr>
+          <a:xfrm>
+            <a:off x="7991856" y="1828800"/>
+            <a:ext cx="3383280" cy="3566160"/>
+          </a:xfrm>
+          <a:prstGeom prst="roundRect">
+            <a:avLst/>
+          </a:prstGeom>
+          <a:solidFill>
+            <a:srgbClr val="065A82"/>
+          </a:solidFill>
+          <a:ln>
+            <a:noFill/>
+          </a:ln>
+          <a:effectLst/>
+          <a:effectLst>
+            <a:outerShdw blurRad="60000" dist="25000" dir="5400000" rotWithShape="0">
+              <a:srgbClr val="0A2230">
+                <a:alpha val="28000"/>
+              </a:srgbClr>
+            </a:outerShdw>
+          </a:effectLst>
+        </p:spPr>
+        <p:style>
+          <a:lnRef idx="1">
+            <a:schemeClr val="accent1"/>
+          </a:lnRef>
+          <a:fillRef idx="3">
+            <a:schemeClr val="accent1"/>
+          </a:fillRef>
+          <a:effectRef idx="2">
+            <a:schemeClr val="accent1"/>
+          </a:effectRef>
+          <a:fontRef idx="minor">
+            <a:schemeClr val="lt1"/>
+          </a:fontRef>
+        </p:style>
+        <p:txBody>
+          <a:bodyPr rtlCol="0" anchor="ctr"/>
+          <a:lstStyle/>
+          <a:p>
+            <a:pPr algn="ctr"/>
+          </a:p>
+        </p:txBody>
+      </p:sp>
+      <p:sp>
+        <p:nvSpPr>
+          <p:cNvPr id="13" name="TextBox 12"/>
+          <p:cNvSpPr txBox="1"/>
+          <p:nvPr/>
+        </p:nvSpPr>
+        <p:spPr>
+          <a:xfrm>
+            <a:off x="8284464" y="2103120"/>
+            <a:ext cx="2834640" cy="365760"/>
+          </a:xfrm>
+          <a:prstGeom prst="rect">
+            <a:avLst/>
+          </a:prstGeom>
+          <a:noFill/>
+        </p:spPr>
+        <p:txBody>
+          <a:bodyPr wrap="square" anchor="t" lIns="0" rIns="0" tIns="0" bIns="0">
+            <a:spAutoFit/>
+          </a:bodyPr>
+          <a:lstStyle/>
+          <a:p>
+            <a:pPr algn="l"/>
+            <a:r>
+              <a:rPr sz="1350" b="1" i="0" spc="130">
+                <a:solidFill>
+                  <a:srgbClr val="F1C48C"/>
+                </a:solidFill>
+                <a:latin typeface="Calibri"/>
+              </a:rPr>
+              <a:t>LAYER 3 · ANNOTATION</a:t>
+            </a:r>
+          </a:p>
+        </p:txBody>
+      </p:sp>
+      <p:sp>
+        <p:nvSpPr>
+          <p:cNvPr id="14" name="TextBox 13"/>
+          <p:cNvSpPr txBox="1"/>
+          <p:nvPr/>
+        </p:nvSpPr>
+        <p:spPr>
+          <a:xfrm>
+            <a:off x="8284464" y="2487168"/>
+            <a:ext cx="2834640" cy="548640"/>
+          </a:xfrm>
+          <a:prstGeom prst="rect">
+            <a:avLst/>
+          </a:prstGeom>
+          <a:noFill/>
+        </p:spPr>
+        <p:txBody>
+          <a:bodyPr wrap="square" anchor="t" lIns="0" rIns="0" tIns="0" bIns="0">
+            <a:spAutoFit/>
+          </a:bodyPr>
+          <a:lstStyle/>
+          <a:p>
+            <a:pPr algn="l"/>
+            <a:r>
+              <a:rPr sz="2100" b="1" i="0">
+                <a:solidFill>
+                  <a:srgbClr val="FFFFFF"/>
+                </a:solidFill>
+                <a:latin typeface="Georgia"/>
+              </a:rPr>
+              <a:t>The interpreter</a:t>
+            </a:r>
+          </a:p>
+        </p:txBody>
+      </p:sp>
+      <p:sp>
+        <p:nvSpPr>
+          <p:cNvPr id="15" name="TextBox 14"/>
+          <p:cNvSpPr txBox="1"/>
+          <p:nvPr/>
+        </p:nvSpPr>
+        <p:spPr>
+          <a:xfrm>
+            <a:off x="8284464" y="3246120"/>
+            <a:ext cx="2834640" cy="2011680"/>
+          </a:xfrm>
+          <a:prstGeom prst="rect">
+            <a:avLst/>
+          </a:prstGeom>
+          <a:noFill/>
+        </p:spPr>
+        <p:txBody>
+          <a:bodyPr wrap="square" anchor="t" lIns="0" rIns="0" tIns="0" bIns="0">
+            <a:spAutoFit/>
+          </a:bodyPr>
+          <a:lstStyle/>
+          <a:p>
+            <a:pPr algn="l"/>
+            <a:r>
+              <a:rPr sz="1450" b="0" i="0">
+                <a:solidFill>
+                  <a:srgbClr val="CADCFC"/>
+                </a:solidFill>
+                <a:latin typeface="Calibri"/>
+              </a:rPr>
+              <a:t>RefSeq function turns coordinates into </a:t>
+            </a:r>
+            <a:r>
+              <a:rPr sz="1450" b="1" i="0">
+                <a:solidFill>
+                  <a:srgbClr val="FFFFFF"/>
+                </a:solidFill>
+                <a:latin typeface="Calibri"/>
+              </a:rPr>
+              <a:t>gene names, products, GO</a:t>
+            </a:r>
+            <a:r>
+              <a:rPr sz="1450" b="0" i="0">
+                <a:solidFill>
+                  <a:srgbClr val="CADCFC"/>
+                </a:solidFill>
+                <a:latin typeface="Calibri"/>
+              </a:rPr>
+              <a:t>.</a:t>
+            </a:r>
+          </a:p>
+          <a:p>
+            <a:pPr algn="l"/>
+            <a:r>
+              <a:rPr sz="600" b="0" i="0">
+                <a:solidFill>
+                  <a:srgbClr val="1A2B35"/>
+                </a:solidFill>
+                <a:latin typeface="Calibri"/>
+              </a:rPr>
+              <a:t/>
+            </a:r>
+          </a:p>
+          <a:p>
+            <a:pPr algn="l"/>
+            <a:r>
+              <a:rPr sz="1450" b="0" i="0">
+                <a:solidFill>
+                  <a:srgbClr val="CADCFC"/>
+                </a:solidFill>
+                <a:latin typeface="Calibri"/>
+              </a:rPr>
+              <a:t>Tells us </a:t>
+            </a:r>
+            <a:r>
+              <a:rPr sz="1450" b="1" i="0">
+                <a:solidFill>
+                  <a:srgbClr val="FFFFFF"/>
+                </a:solidFill>
+                <a:latin typeface="Calibri"/>
+              </a:rPr>
+              <a:t>which genes &amp; why.</a:t>
+            </a:r>
+          </a:p>
+        </p:txBody>
+      </p:sp>
+      <p:sp>
+        <p:nvSpPr>
+          <p:cNvPr id="16" name="TextBox 15"/>
+          <p:cNvSpPr txBox="1"/>
+          <p:nvPr/>
+        </p:nvSpPr>
+        <p:spPr>
+          <a:xfrm>
+            <a:off x="822960" y="5715000"/>
             <a:ext cx="10515600" cy="548640"/>
           </a:xfrm>
           <a:prstGeom prst="rect">
@@ -7440,20 +11487,20 @@
           <a:p>
             <a:pPr algn="ctr"/>
             <a:r>
-              <a:rPr sz="1700" b="1" i="1">
+              <a:rPr sz="1550" b="1" i="1">
                 <a:solidFill>
                   <a:srgbClr val="CADCFC"/>
                 </a:solidFill>
                 <a:latin typeface="Calibri"/>
               </a:rPr>
-              <a:t>Same PacBio HiFi reads resolve both layers at once.</a:t>
-            </a:r>
-          </a:p>
-        </p:txBody>
-      </p:sp>
-      <p:sp>
-        <p:nvSpPr>
-          <p:cNvPr id="13" name="TextBox 12"/>
+              <a:t>Same PacBio HiFi reads resolve PAV and methylation at once; annotation joins them to biology.</a:t>
+            </a:r>
+          </a:p>
+        </p:txBody>
+      </p:sp>
+      <p:sp>
+        <p:nvSpPr>
+          <p:cNvPr id="17" name="TextBox 16"/>
           <p:cNvSpPr txBox="1"/>
           <p:nvPr/>
         </p:nvSpPr>
@@ -7571,13 +11618,13 @@
           <a:p>
             <a:pPr algn="l"/>
             <a:r>
-              <a:rPr sz="3300" b="1" i="0">
+              <a:rPr sz="3200" b="1" i="0">
                 <a:solidFill>
                   <a:srgbClr val="1A2B35"/>
                 </a:solidFill>
                 <a:latin typeface="Georgia"/>
               </a:rPr>
-              <a:t>Eight fish, one platform, two readouts</a:t>
+              <a:t>Eight fish, one platform, three readouts</a:t>
             </a:r>
           </a:p>
         </p:txBody>
@@ -7701,7 +11748,7 @@
           <a:p>
             <a:pPr algn="l"/>
             <a:r>
-              <a:rPr sz="4000" b="1" i="0">
+              <a:rPr sz="3800" b="1" i="0">
                 <a:solidFill>
                   <a:srgbClr val="065A82"/>
                 </a:solidFill>
@@ -7866,7 +11913,7 @@
           <a:p>
             <a:pPr algn="l"/>
             <a:r>
-              <a:rPr sz="4000" b="1" i="0">
+              <a:rPr sz="3800" b="1" i="0">
                 <a:solidFill>
                   <a:srgbClr val="1C7293"/>
                 </a:solidFill>
@@ -8031,7 +12078,7 @@
           <a:p>
             <a:pPr algn="l"/>
             <a:r>
-              <a:rPr sz="4000" b="1" i="0">
+              <a:rPr sz="3800" b="1" i="0">
                 <a:solidFill>
                   <a:srgbClr val="2A9D8F"/>
                 </a:solidFill>
@@ -8143,7 +12190,7 @@
             <a:avLst/>
           </a:prstGeom>
           <a:solidFill>
-            <a:srgbClr val="E9964E"/>
+            <a:srgbClr val="C97B2E"/>
           </a:solidFill>
           <a:ln>
             <a:noFill/>
@@ -8196,13 +12243,13 @@
           <a:p>
             <a:pPr algn="l"/>
             <a:r>
-              <a:rPr sz="4000" b="1" i="0">
-                <a:solidFill>
-                  <a:srgbClr val="E9964E"/>
+              <a:rPr sz="3800" b="1" i="0">
+                <a:solidFill>
+                  <a:srgbClr val="C97B2E"/>
                 </a:solidFill>
                 <a:latin typeface="Georgia"/>
               </a:rPr>
-              <a:t>2</a:t>
+              <a:t>46,359</a:t>
             </a:r>
           </a:p>
         </p:txBody>
@@ -8237,7 +12284,7 @@
                 </a:solidFill>
                 <a:latin typeface="Calibri"/>
               </a:rPr>
-              <a:t>layers from one dataset</a:t>
+              <a:t>annotated genes</a:t>
             </a:r>
           </a:p>
         </p:txBody>
@@ -8429,13 +12476,13 @@
           <a:p>
             <a:pPr algn="l"/>
             <a:r>
-              <a:rPr sz="1250" b="0" i="0">
+              <a:rPr sz="1200" b="0" i="0">
                 <a:solidFill>
                   <a:srgbClr val="5B707B"/>
                 </a:solidFill>
                 <a:latin typeface="Calibri"/>
               </a:rPr>
-              <a:t>Samples — Lean: bc2041/2068/2069/2070   ·   Siscowet: bc2071/2072/2073/2096   ·   Supporting layer: liver RNA-seq (202 DETs)</a:t>
+              <a:t>Samples — Lean: bc2041/2068/2069/2070   ·   Siscowet: bc2071/2072/2073/2096   ·   Supporting layer: liver RNA-seq (202 DETs, separate parasite study)</a:t>
             </a:r>
           </a:p>
         </p:txBody>
@@ -8560,7 +12607,7 @@
           <a:p>
             <a:pPr algn="l"/>
             <a:r>
-              <a:rPr sz="3000" b="1" i="0">
+              <a:rPr sz="2900" b="1" i="0">
                 <a:solidFill>
                   <a:srgbClr val="1A2B35"/>
                 </a:solidFill>
@@ -9368,7 +13415,7 @@
           <a:p>
             <a:pPr algn="l"/>
             <a:r>
-              <a:rPr sz="3100" b="1" i="0">
+              <a:rPr sz="3000" b="1" i="0">
                 <a:solidFill>
                   <a:srgbClr val="1A2B35"/>
                 </a:solidFill>
@@ -9389,7 +13436,7 @@
         </p:nvGraphicFramePr>
         <p:xfrm>
           <a:off x="822960" y="1874519"/>
-          <a:ext cx="6766560" cy="4023360"/>
+          <a:ext cx="6766560" cy="3657600"/>
         </p:xfrm>
         <a:graphic>
           <a:graphicData uri="http://schemas.openxmlformats.org/drawingml/2006/chart">
@@ -9405,7 +13452,7 @@
         </p:nvSpPr>
         <p:spPr>
           <a:xfrm>
-            <a:off x="7955279" y="1965960"/>
+            <a:off x="7955279" y="1920240"/>
             <a:ext cx="3566160" cy="640080"/>
           </a:xfrm>
           <a:prstGeom prst="rect">
@@ -9421,7 +13468,7 @@
           <a:p>
             <a:pPr algn="l"/>
             <a:r>
-              <a:rPr sz="3300" b="1" i="0">
+              <a:rPr sz="3000" b="1" i="0">
                 <a:solidFill>
                   <a:srgbClr val="E9964E"/>
                 </a:solidFill>
@@ -9440,7 +13487,7 @@
         </p:nvSpPr>
         <p:spPr>
           <a:xfrm>
-            <a:off x="7973568" y="2532888"/>
+            <a:off x="7973568" y="2450592"/>
             <a:ext cx="3566160" cy="365760"/>
           </a:xfrm>
           <a:prstGeom prst="rect">
@@ -9456,75 +13503,233 @@
           <a:p>
             <a:pPr algn="l"/>
             <a:r>
+              <a:rPr sz="1250" b="0" i="0">
+                <a:solidFill>
+                  <a:srgbClr val="5B707B"/>
+                </a:solidFill>
+                <a:latin typeface="Calibri"/>
+              </a:rPr>
+              <a:t>lean-specific variants</a:t>
+            </a:r>
+          </a:p>
+        </p:txBody>
+      </p:sp>
+      <p:sp>
+        <p:nvSpPr>
+          <p:cNvPr id="7" name="TextBox 6"/>
+          <p:cNvSpPr txBox="1"/>
+          <p:nvPr/>
+        </p:nvSpPr>
+        <p:spPr>
+          <a:xfrm>
+            <a:off x="7955279" y="2971800"/>
+            <a:ext cx="3566160" cy="640080"/>
+          </a:xfrm>
+          <a:prstGeom prst="rect">
+            <a:avLst/>
+          </a:prstGeom>
+          <a:noFill/>
+        </p:spPr>
+        <p:txBody>
+          <a:bodyPr wrap="square" anchor="t" lIns="0" rIns="0" tIns="0" bIns="0">
+            <a:spAutoFit/>
+          </a:bodyPr>
+          <a:lstStyle/>
+          <a:p>
+            <a:pPr algn="l"/>
+            <a:r>
+              <a:rPr sz="3000" b="1" i="0">
+                <a:solidFill>
+                  <a:srgbClr val="065A82"/>
+                </a:solidFill>
+                <a:latin typeface="Georgia"/>
+              </a:rPr>
+              <a:t>1,332,705</a:t>
+            </a:r>
+          </a:p>
+        </p:txBody>
+      </p:sp>
+      <p:sp>
+        <p:nvSpPr>
+          <p:cNvPr id="8" name="TextBox 7"/>
+          <p:cNvSpPr txBox="1"/>
+          <p:nvPr/>
+        </p:nvSpPr>
+        <p:spPr>
+          <a:xfrm>
+            <a:off x="7973568" y="3502152"/>
+            <a:ext cx="3566160" cy="365760"/>
+          </a:xfrm>
+          <a:prstGeom prst="rect">
+            <a:avLst/>
+          </a:prstGeom>
+          <a:noFill/>
+        </p:spPr>
+        <p:txBody>
+          <a:bodyPr wrap="square" anchor="t" lIns="0" rIns="0" tIns="0" bIns="0">
+            <a:spAutoFit/>
+          </a:bodyPr>
+          <a:lstStyle/>
+          <a:p>
+            <a:pPr algn="l"/>
+            <a:r>
+              <a:rPr sz="1250" b="0" i="0">
+                <a:solidFill>
+                  <a:srgbClr val="5B707B"/>
+                </a:solidFill>
+                <a:latin typeface="Calibri"/>
+              </a:rPr>
+              <a:t>siscowet-specific variants</a:t>
+            </a:r>
+          </a:p>
+        </p:txBody>
+      </p:sp>
+      <p:sp>
+        <p:nvSpPr>
+          <p:cNvPr id="9" name="TextBox 8"/>
+          <p:cNvSpPr txBox="1"/>
+          <p:nvPr/>
+        </p:nvSpPr>
+        <p:spPr>
+          <a:xfrm>
+            <a:off x="7955279" y="4023360"/>
+            <a:ext cx="3566160" cy="640080"/>
+          </a:xfrm>
+          <a:prstGeom prst="rect">
+            <a:avLst/>
+          </a:prstGeom>
+          <a:noFill/>
+        </p:spPr>
+        <p:txBody>
+          <a:bodyPr wrap="square" anchor="t" lIns="0" rIns="0" tIns="0" bIns="0">
+            <a:spAutoFit/>
+          </a:bodyPr>
+          <a:lstStyle/>
+          <a:p>
+            <a:pPr algn="l"/>
+            <a:r>
+              <a:rPr sz="3000" b="1" i="0">
+                <a:solidFill>
+                  <a:srgbClr val="1C7293"/>
+                </a:solidFill>
+                <a:latin typeface="Georgia"/>
+              </a:rPr>
+              <a:t>878,372</a:t>
+            </a:r>
+          </a:p>
+        </p:txBody>
+      </p:sp>
+      <p:sp>
+        <p:nvSpPr>
+          <p:cNvPr id="10" name="TextBox 9"/>
+          <p:cNvSpPr txBox="1"/>
+          <p:nvPr/>
+        </p:nvSpPr>
+        <p:spPr>
+          <a:xfrm>
+            <a:off x="7973568" y="4553712"/>
+            <a:ext cx="3566160" cy="365760"/>
+          </a:xfrm>
+          <a:prstGeom prst="rect">
+            <a:avLst/>
+          </a:prstGeom>
+          <a:noFill/>
+        </p:spPr>
+        <p:txBody>
+          <a:bodyPr wrap="square" anchor="t" lIns="0" rIns="0" tIns="0" bIns="0">
+            <a:spAutoFit/>
+          </a:bodyPr>
+          <a:lstStyle/>
+          <a:p>
+            <a:pPr algn="l"/>
+            <a:r>
+              <a:rPr sz="1250" b="0" i="0">
+                <a:solidFill>
+                  <a:srgbClr val="5B707B"/>
+                </a:solidFill>
+                <a:latin typeface="Calibri"/>
+              </a:rPr>
+              <a:t>shared between ecotypes</a:t>
+            </a:r>
+          </a:p>
+        </p:txBody>
+      </p:sp>
+      <p:sp>
+        <p:nvSpPr>
+          <p:cNvPr id="11" name="TextBox 10"/>
+          <p:cNvSpPr txBox="1"/>
+          <p:nvPr/>
+        </p:nvSpPr>
+        <p:spPr>
+          <a:xfrm>
+            <a:off x="7955279" y="4937760"/>
+            <a:ext cx="3566160" cy="822960"/>
+          </a:xfrm>
+          <a:prstGeom prst="rect">
+            <a:avLst/>
+          </a:prstGeom>
+          <a:noFill/>
+        </p:spPr>
+        <p:txBody>
+          <a:bodyPr wrap="square" anchor="t" lIns="0" rIns="0" tIns="0" bIns="0">
+            <a:spAutoFit/>
+          </a:bodyPr>
+          <a:lstStyle/>
+          <a:p>
+            <a:pPr algn="l"/>
+            <a:r>
+              <a:rPr sz="1300" b="1" i="1">
+                <a:solidFill>
+                  <a:srgbClr val="1A2B35"/>
+                </a:solidFill>
+                <a:latin typeface="Calibri"/>
+              </a:rPr>
+              <a:t>≈ 34% more ecotype-specific variation in siscowet — but read with reference bias in mind</a:t>
+            </a:r>
+          </a:p>
+        </p:txBody>
+      </p:sp>
+      <p:sp>
+        <p:nvSpPr>
+          <p:cNvPr id="12" name="TextBox 11"/>
+          <p:cNvSpPr txBox="1"/>
+          <p:nvPr/>
+        </p:nvSpPr>
+        <p:spPr>
+          <a:xfrm>
+            <a:off x="822960" y="5715000"/>
+            <a:ext cx="10515600" cy="548640"/>
+          </a:xfrm>
+          <a:prstGeom prst="rect">
+            <a:avLst/>
+          </a:prstGeom>
+          <a:noFill/>
+        </p:spPr>
+        <p:txBody>
+          <a:bodyPr wrap="square" anchor="t" lIns="0" rIns="0" tIns="0" bIns="0">
+            <a:spAutoFit/>
+          </a:bodyPr>
+          <a:lstStyle/>
+          <a:p>
+            <a:pPr algn="l"/>
+            <a:r>
               <a:rPr sz="1300" b="0" i="0">
                 <a:solidFill>
                   <a:srgbClr val="5B707B"/>
                 </a:solidFill>
                 <a:latin typeface="Calibri"/>
               </a:rPr>
-              <a:t>lean-specific variants</a:t>
-            </a:r>
-          </a:p>
-        </p:txBody>
-      </p:sp>
-      <p:sp>
-        <p:nvSpPr>
-          <p:cNvPr id="7" name="TextBox 6"/>
-          <p:cNvSpPr txBox="1"/>
-          <p:nvPr/>
-        </p:nvSpPr>
-        <p:spPr>
-          <a:xfrm>
-            <a:off x="7955279" y="3154680"/>
-            <a:ext cx="3566160" cy="640080"/>
-          </a:xfrm>
-          <a:prstGeom prst="rect">
-            <a:avLst/>
-          </a:prstGeom>
-          <a:noFill/>
-        </p:spPr>
-        <p:txBody>
-          <a:bodyPr wrap="square" anchor="t" lIns="0" rIns="0" tIns="0" bIns="0">
-            <a:spAutoFit/>
-          </a:bodyPr>
-          <a:lstStyle/>
-          <a:p>
-            <a:pPr algn="l"/>
-            <a:r>
-              <a:rPr sz="3300" b="1" i="0">
+              <a:t>Interpretation focuses on </a:t>
+            </a:r>
+            <a:r>
+              <a:rPr sz="1300" b="1" i="0">
                 <a:solidFill>
                   <a:srgbClr val="065A82"/>
                 </a:solidFill>
-                <a:latin typeface="Georgia"/>
-              </a:rPr>
-              <a:t>1,332,705</a:t>
-            </a:r>
-          </a:p>
-        </p:txBody>
-      </p:sp>
-      <p:sp>
-        <p:nvSpPr>
-          <p:cNvPr id="8" name="TextBox 7"/>
-          <p:cNvSpPr txBox="1"/>
-          <p:nvPr/>
-        </p:nvSpPr>
-        <p:spPr>
-          <a:xfrm>
-            <a:off x="7973568" y="3721608"/>
-            <a:ext cx="3566160" cy="365760"/>
-          </a:xfrm>
-          <a:prstGeom prst="rect">
-            <a:avLst/>
-          </a:prstGeom>
-          <a:noFill/>
-        </p:spPr>
-        <p:txBody>
-          <a:bodyPr wrap="square" anchor="t" lIns="0" rIns="0" tIns="0" bIns="0">
-            <a:spAutoFit/>
-          </a:bodyPr>
-          <a:lstStyle/>
-          <a:p>
-            <a:pPr algn="l"/>
+                <a:latin typeface="Calibri"/>
+              </a:rPr>
+              <a:t>3,465 stringent siscowet-specific deletions</a:t>
+            </a:r>
             <a:r>
               <a:rPr sz="1300" b="0" i="0">
                 <a:solidFill>
@@ -9532,119 +13737,14 @@
                 </a:solidFill>
                 <a:latin typeface="Calibri"/>
               </a:rPr>
-              <a:t>siscowet-specific variants</a:t>
-            </a:r>
-          </a:p>
-        </p:txBody>
-      </p:sp>
-      <p:sp>
-        <p:nvSpPr>
-          <p:cNvPr id="9" name="TextBox 8"/>
-          <p:cNvSpPr txBox="1"/>
-          <p:nvPr/>
-        </p:nvSpPr>
-        <p:spPr>
-          <a:xfrm>
-            <a:off x="7955279" y="4343400"/>
-            <a:ext cx="3566160" cy="640080"/>
-          </a:xfrm>
-          <a:prstGeom prst="rect">
-            <a:avLst/>
-          </a:prstGeom>
-          <a:noFill/>
-        </p:spPr>
-        <p:txBody>
-          <a:bodyPr wrap="square" anchor="t" lIns="0" rIns="0" tIns="0" bIns="0">
-            <a:spAutoFit/>
-          </a:bodyPr>
-          <a:lstStyle/>
-          <a:p>
-            <a:pPr algn="l"/>
-            <a:r>
-              <a:rPr sz="3300" b="1" i="0">
-                <a:solidFill>
-                  <a:srgbClr val="1C7293"/>
-                </a:solidFill>
-                <a:latin typeface="Georgia"/>
-              </a:rPr>
-              <a:t>878,372</a:t>
-            </a:r>
-          </a:p>
-        </p:txBody>
-      </p:sp>
-      <p:sp>
-        <p:nvSpPr>
-          <p:cNvPr id="10" name="TextBox 9"/>
-          <p:cNvSpPr txBox="1"/>
-          <p:nvPr/>
-        </p:nvSpPr>
-        <p:spPr>
-          <a:xfrm>
-            <a:off x="7973568" y="4910328"/>
-            <a:ext cx="3566160" cy="365760"/>
-          </a:xfrm>
-          <a:prstGeom prst="rect">
-            <a:avLst/>
-          </a:prstGeom>
-          <a:noFill/>
-        </p:spPr>
-        <p:txBody>
-          <a:bodyPr wrap="square" anchor="t" lIns="0" rIns="0" tIns="0" bIns="0">
-            <a:spAutoFit/>
-          </a:bodyPr>
-          <a:lstStyle/>
-          <a:p>
-            <a:pPr algn="l"/>
-            <a:r>
-              <a:rPr sz="1300" b="0" i="0">
-                <a:solidFill>
-                  <a:srgbClr val="5B707B"/>
-                </a:solidFill>
-                <a:latin typeface="Calibri"/>
-              </a:rPr>
-              <a:t>shared between ecotypes</a:t>
-            </a:r>
-          </a:p>
-        </p:txBody>
-      </p:sp>
-      <p:sp>
-        <p:nvSpPr>
-          <p:cNvPr id="11" name="TextBox 10"/>
-          <p:cNvSpPr txBox="1"/>
-          <p:nvPr/>
-        </p:nvSpPr>
-        <p:spPr>
-          <a:xfrm>
-            <a:off x="7955279" y="5349240"/>
-            <a:ext cx="3566160" cy="731520"/>
-          </a:xfrm>
-          <a:prstGeom prst="rect">
-            <a:avLst/>
-          </a:prstGeom>
-          <a:noFill/>
-        </p:spPr>
-        <p:txBody>
-          <a:bodyPr wrap="square" anchor="t" lIns="0" rIns="0" tIns="0" bIns="0">
-            <a:spAutoFit/>
-          </a:bodyPr>
-          <a:lstStyle/>
-          <a:p>
-            <a:pPr algn="l"/>
-            <a:r>
-              <a:rPr sz="1400" b="1" i="1">
-                <a:solidFill>
-                  <a:srgbClr val="1A2B35"/>
-                </a:solidFill>
-                <a:latin typeface="Calibri"/>
-              </a:rPr>
-              <a:t>≈ 34% more ecotype-specific variation in siscowet</a:t>
-            </a:r>
-          </a:p>
-        </p:txBody>
-      </p:sp>
-      <p:sp>
-        <p:nvSpPr>
-          <p:cNvPr id="12" name="TextBox 11"/>
+              <a:t> (&gt;100 bp, all-4-vs-none) — the high-confidence set carried into annotation.</a:t>
+            </a:r>
+          </a:p>
+        </p:txBody>
+      </p:sp>
+      <p:sp>
+        <p:nvSpPr>
+          <p:cNvPr id="13" name="TextBox 12"/>
           <p:cNvSpPr txBox="1"/>
           <p:nvPr/>
         </p:nvSpPr>
@@ -10421,7 +14521,7 @@
                 </a:solidFill>
                 <a:latin typeface="Calibri"/>
               </a:rPr>
-              <a:t> — flag PAV-hit genes here and test against expression.</a:t>
+              <a:t> — annotation (Layer 3) tells us which genes are actually hit.</a:t>
             </a:r>
           </a:p>
         </p:txBody>
@@ -11922,8 +16022,8 @@
           <p:nvPr/>
         </p:nvGraphicFramePr>
         <p:xfrm>
-          <a:off x="822960" y="3794760"/>
-          <a:ext cx="5760720" cy="2468880"/>
+          <a:off x="822960" y="3840480"/>
+          <a:ext cx="5760720" cy="2240280"/>
         </p:xfrm>
         <a:graphic>
           <a:graphicData uri="http://schemas.openxmlformats.org/drawingml/2006/chart">
@@ -11939,7 +16039,7 @@
         </p:nvSpPr>
         <p:spPr>
           <a:xfrm>
-            <a:off x="6858000" y="4023360"/>
+            <a:off x="6858000" y="3931920"/>
             <a:ext cx="4480560" cy="2194560"/>
           </a:xfrm>
           <a:prstGeom prst="rect">
@@ -11967,7 +16067,7 @@
           <a:p>
             <a:pPr algn="l"/>
             <a:r>
-              <a:rPr sz="600" b="0" i="0">
+              <a:rPr sz="500" b="0" i="0">
                 <a:solidFill>
                   <a:srgbClr val="1A2B35"/>
                 </a:solidFill>
@@ -11979,7 +16079,7 @@
           <a:p>
             <a:pPr algn="l"/>
             <a:r>
-              <a:rPr sz="1600" b="0" i="0">
+              <a:rPr sz="1500" b="0" i="0">
                 <a:solidFill>
                   <a:srgbClr val="1A2B35"/>
                 </a:solidFill>
@@ -11988,7 +16088,7 @@
               <a:t>282 of 302 DMRs are </a:t>
             </a:r>
             <a:r>
-              <a:rPr sz="1600" b="1" i="0">
+              <a:rPr sz="1500" b="1" i="0">
                 <a:solidFill>
                   <a:srgbClr val="2A9D8F"/>
                 </a:solidFill>
@@ -11997,13 +16097,37 @@
               <a:t>hypomethylated</a:t>
             </a:r>
             <a:r>
-              <a:rPr sz="1600" b="0" i="0">
+              <a:rPr sz="1500" b="0" i="0">
                 <a:solidFill>
                   <a:srgbClr val="1A2B35"/>
                 </a:solidFill>
                 <a:latin typeface="Calibri"/>
               </a:rPr>
               <a:t> in siscowet — a genome-wide tilt toward de-repression.</a:t>
+            </a:r>
+          </a:p>
+          <a:p>
+            <a:pPr algn="l"/>
+            <a:r>
+              <a:rPr sz="500" b="0" i="0">
+                <a:solidFill>
+                  <a:srgbClr val="1A2B35"/>
+                </a:solidFill>
+                <a:latin typeface="Calibri"/>
+              </a:rPr>
+              <a:t/>
+            </a:r>
+          </a:p>
+          <a:p>
+            <a:pPr algn="l"/>
+            <a:r>
+              <a:rPr sz="1300" b="0" i="1">
+                <a:solidFill>
+                  <a:srgbClr val="5B707B"/>
+                </a:solidFill>
+                <a:latin typeface="Calibri"/>
+              </a:rPr>
+              <a:t>But 0 single CpGs survive q &lt; 0.1 — we lead with the DMR level, not individual sites.</a:t>
             </a:r>
           </a:p>
         </p:txBody>
